--- a/Step_Function_2026.pptx
+++ b/Step_Function_2026.pptx
@@ -4,6 +4,9 @@
   <p:sldMasterIdLst>
     <p:sldMasterId id="2147483648" r:id="rId1"/>
   </p:sldMasterIdLst>
+  <p:notesMasterIdLst>
+    <p:notesMasterId r:id="rId21"/>
+  </p:notesMasterIdLst>
   <p:sldIdLst>
     <p:sldId id="256" r:id="rId2"/>
     <p:sldId id="257" r:id="rId3"/>
@@ -22,13 +25,10 @@
     <p:sldId id="270" r:id="rId16"/>
     <p:sldId id="271" r:id="rId17"/>
     <p:sldId id="272" r:id="rId18"/>
-    <p:sldId id="273" r:id="rId19"/>
+    <p:sldId id="275" r:id="rId19"/>
     <p:sldId id="274" r:id="rId20"/>
   </p:sldIdLst>
-  <p:notesMasterIdLst>
-    <p:notesMasterId r:id="rId21"/>
-  </p:notesMasterIdLst>
-  <p:sldSz cx="9144000" cy="5143500"/>
+  <p:sldSz cx="9144000" cy="5143500" type="screen16x9"/>
   <p:notesSz cx="5143500" cy="9144000"/>
   <p:defaultTextStyle>
     <a:lvl1pPr marL="0" algn="l" defTabSz="914400" rtl="0" eaLnBrk="1" latinLnBrk="0" hangingPunct="1">
@@ -122,6 +122,11 @@
       </a:defRPr>
     </a:lvl9pPr>
   </p:defaultTextStyle>
+  <p:extLst>
+    <p:ext uri="{EFAFB233-063F-42B5-8137-9DF3F51BA10A}">
+      <p15:sldGuideLst xmlns:p15="http://schemas.microsoft.com/office/powerpoint/2012/main"/>
+    </p:ext>
+  </p:extLst>
 </p:presentation>
 </file>
 
@@ -147,234 +152,10 @@
           <a:chExt cx="0" cy="0"/>
         </a:xfrm>
       </p:grpSpPr>
-      <p:sp>
-        <p:nvSpPr>
-          <p:cNvPr id="2" name="Header Placeholder 1"/>
-          <p:cNvSpPr>
-            <a:spLocks noGrp="1"/>
-          </p:cNvSpPr>
-          <p:nvPr>
-            <p:ph type="hdr" sz="quarter"/>
-          </p:nvPr>
-        </p:nvSpPr>
-        <p:spPr>
-          <a:xfrm>
-            <a:off x="0" y="0"/>
-            <a:ext cx="2971800" cy="458788"/>
-          </a:xfrm>
-          <a:prstGeom prst="rect">
-            <a:avLst/>
-          </a:prstGeom>
-        </p:spPr>
-        <p:txBody>
-          <a:bodyPr vert="horz" lIns="91440" tIns="45720" rIns="91440" bIns="45720" rtlCol="0"/>
-          <a:lstStyle>
-            <a:lvl1pPr algn="l">
-              <a:defRPr sz="1200"/>
-            </a:lvl1pPr>
-          </a:lstStyle>
-          <a:p>
-            <a:endParaRPr lang="en-US"/>
-          </a:p>
-        </p:txBody>
-      </p:sp>
-      <p:sp>
-        <p:nvSpPr>
-          <p:cNvPr id="3" name="Date Placeholder 2"/>
-          <p:cNvSpPr>
-            <a:spLocks noGrp="1"/>
-          </p:cNvSpPr>
-          <p:nvPr>
-            <p:ph type="dt" idx="1"/>
-          </p:nvPr>
-        </p:nvSpPr>
-        <p:spPr>
-          <a:xfrm>
-            <a:off x="3884613" y="0"/>
-            <a:ext cx="2971800" cy="458788"/>
-          </a:xfrm>
-          <a:prstGeom prst="rect">
-            <a:avLst/>
-          </a:prstGeom>
-        </p:spPr>
-        <p:txBody>
-          <a:bodyPr vert="horz" lIns="91440" tIns="45720" rIns="91440" bIns="45720" rtlCol="0"/>
-          <a:lstStyle>
-            <a:lvl1pPr algn="r">
-              <a:defRPr sz="1200"/>
-            </a:lvl1pPr>
-          </a:lstStyle>
-          <a:p>
-            <a:fld id="{5282F153-3F37-0F45-9E97-73ACFA13230C}" type="datetimeFigureOut">
-              <a:rPr lang="en-US"/>
-              <a:t>7/23/19</a:t>
-            </a:fld>
-            <a:endParaRPr lang="en-US"/>
-          </a:p>
-        </p:txBody>
-      </p:sp>
-      <p:sp>
-        <p:nvSpPr>
-          <p:cNvPr id="4" name="Slide Image Placeholder 3"/>
-          <p:cNvSpPr>
-            <a:spLocks noGrp="1" noRot="1" noChangeAspect="1"/>
-          </p:cNvSpPr>
-          <p:nvPr>
-            <p:ph type="sldImg" idx="2"/>
-          </p:nvPr>
-        </p:nvSpPr>
-        <p:spPr>
-          <a:xfrm>
-            <a:off x="685800" y="1143000"/>
-            <a:ext cx="5486400" cy="3086100"/>
-          </a:xfrm>
-          <a:prstGeom prst="rect">
-            <a:avLst/>
-          </a:prstGeom>
-          <a:noFill/>
-          <a:ln w="12700">
-            <a:solidFill>
-              <a:prstClr val="black"/>
-            </a:solidFill>
-          </a:ln>
-        </p:spPr>
-        <p:txBody>
-          <a:bodyPr vert="horz" lIns="91440" tIns="45720" rIns="91440" bIns="45720" rtlCol="0" anchor="ctr"/>
-          <a:lstStyle/>
-          <a:p>
-            <a:endParaRPr lang="en-US"/>
-          </a:p>
-        </p:txBody>
-      </p:sp>
-      <p:sp>
-        <p:nvSpPr>
-          <p:cNvPr id="5" name="Notes Placeholder 4"/>
-          <p:cNvSpPr>
-            <a:spLocks noGrp="1"/>
-          </p:cNvSpPr>
-          <p:nvPr>
-            <p:ph type="body" sz="quarter" idx="3"/>
-          </p:nvPr>
-        </p:nvSpPr>
-        <p:spPr>
-          <a:xfrm>
-            <a:off x="685800" y="4400550"/>
-            <a:ext cx="5486400" cy="3600450"/>
-          </a:xfrm>
-          <a:prstGeom prst="rect">
-            <a:avLst/>
-          </a:prstGeom>
-        </p:spPr>
-        <p:txBody>
-          <a:bodyPr vert="horz" lIns="91440" tIns="45720" rIns="91440" bIns="45720" rtlCol="0"/>
-          <a:lstStyle/>
-          <a:p>
-            <a:pPr lvl="0"/>
-            <a:r>
-              <a:rPr lang="en-US"/>
-              <a:t>Click to edit Master text styles</a:t>
-            </a:r>
-          </a:p>
-          <a:p>
-            <a:pPr lvl="1"/>
-            <a:r>
-              <a:rPr lang="en-US"/>
-              <a:t>Second level</a:t>
-            </a:r>
-          </a:p>
-          <a:p>
-            <a:pPr lvl="2"/>
-            <a:r>
-              <a:rPr lang="en-US"/>
-              <a:t>Third level</a:t>
-            </a:r>
-          </a:p>
-          <a:p>
-            <a:pPr lvl="3"/>
-            <a:r>
-              <a:rPr lang="en-US"/>
-              <a:t>Fourth level</a:t>
-            </a:r>
-          </a:p>
-          <a:p>
-            <a:pPr lvl="4"/>
-            <a:r>
-              <a:rPr lang="en-US"/>
-              <a:t>Fifth level</a:t>
-            </a:r>
-          </a:p>
-        </p:txBody>
-      </p:sp>
-      <p:sp>
-        <p:nvSpPr>
-          <p:cNvPr id="6" name="Footer Placeholder 5"/>
-          <p:cNvSpPr>
-            <a:spLocks noGrp="1"/>
-          </p:cNvSpPr>
-          <p:nvPr>
-            <p:ph type="ftr" sz="quarter" idx="4"/>
-          </p:nvPr>
-        </p:nvSpPr>
-        <p:spPr>
-          <a:xfrm>
-            <a:off x="0" y="8685213"/>
-            <a:ext cx="2971800" cy="458787"/>
-          </a:xfrm>
-          <a:prstGeom prst="rect">
-            <a:avLst/>
-          </a:prstGeom>
-        </p:spPr>
-        <p:txBody>
-          <a:bodyPr vert="horz" lIns="91440" tIns="45720" rIns="91440" bIns="45720" rtlCol="0" anchor="b"/>
-          <a:lstStyle>
-            <a:lvl1pPr algn="l">
-              <a:defRPr sz="1200"/>
-            </a:lvl1pPr>
-          </a:lstStyle>
-          <a:p>
-            <a:endParaRPr lang="en-US"/>
-          </a:p>
-        </p:txBody>
-      </p:sp>
-      <p:sp>
-        <p:nvSpPr>
-          <p:cNvPr id="7" name="Slide Number Placeholder 6"/>
-          <p:cNvSpPr>
-            <a:spLocks noGrp="1"/>
-          </p:cNvSpPr>
-          <p:nvPr>
-            <p:ph type="sldNum" sz="quarter" idx="5"/>
-          </p:nvPr>
-        </p:nvSpPr>
-        <p:spPr>
-          <a:xfrm>
-            <a:off x="3884613" y="8685213"/>
-            <a:ext cx="2971800" cy="458787"/>
-          </a:xfrm>
-          <a:prstGeom prst="rect">
-            <a:avLst/>
-          </a:prstGeom>
-        </p:spPr>
-        <p:txBody>
-          <a:bodyPr vert="horz" lIns="91440" tIns="45720" rIns="91440" bIns="45720" rtlCol="0" anchor="b"/>
-          <a:lstStyle>
-            <a:lvl1pPr algn="r">
-              <a:defRPr sz="1200"/>
-            </a:lvl1pPr>
-          </a:lstStyle>
-          <a:p>
-            <a:fld id="{CE5E9CC1-C706-0F49-92D6-E571CC5EEA8F}" type="slidenum">
-              <a:rPr lang="en-US"/>
-              <a:t>‹#›</a:t>
-            </a:fld>
-            <a:endParaRPr lang="en-US"/>
-          </a:p>
-        </p:txBody>
-      </p:sp>
     </p:spTree>
     <p:extLst>
       <p:ext uri="{BB962C8B-B14F-4D97-AF65-F5344CB8AC3E}">
-        <p14:creationId xmlns:p14="http://schemas.microsoft.com/office/powerpoint/2010/main" val="1024086991"/>
+        <p14:creationId xmlns:p14="http://schemas.microsoft.com/office/powerpoint/2010/main" val="1107576747"/>
       </p:ext>
     </p:extLst>
   </p:cSld>
@@ -518,10 +299,6 @@
           <a:bodyPr/>
           <a:lstStyle/>
           <a:p>
-            <a:r>
-              <a:rPr lang="en-US" dirty="0"/>
-              <a:t/>
-            </a:r>
             <a:endParaRPr lang="en-US" dirty="0"/>
           </a:p>
         </p:txBody>
@@ -606,10 +383,6 @@
           <a:bodyPr/>
           <a:lstStyle/>
           <a:p>
-            <a:r>
-              <a:rPr lang="en-US" dirty="0"/>
-              <a:t/>
-            </a:r>
             <a:endParaRPr lang="en-US" dirty="0"/>
           </a:p>
         </p:txBody>
@@ -694,10 +467,6 @@
           <a:bodyPr/>
           <a:lstStyle/>
           <a:p>
-            <a:r>
-              <a:rPr lang="en-US" dirty="0"/>
-              <a:t/>
-            </a:r>
             <a:endParaRPr lang="en-US" dirty="0"/>
           </a:p>
         </p:txBody>
@@ -782,10 +551,6 @@
           <a:bodyPr/>
           <a:lstStyle/>
           <a:p>
-            <a:r>
-              <a:rPr lang="en-US" dirty="0"/>
-              <a:t/>
-            </a:r>
             <a:endParaRPr lang="en-US" dirty="0"/>
           </a:p>
         </p:txBody>
@@ -870,10 +635,6 @@
           <a:bodyPr/>
           <a:lstStyle/>
           <a:p>
-            <a:r>
-              <a:rPr lang="en-US" dirty="0"/>
-              <a:t/>
-            </a:r>
             <a:endParaRPr lang="en-US" dirty="0"/>
           </a:p>
         </p:txBody>
@@ -958,10 +719,6 @@
           <a:bodyPr/>
           <a:lstStyle/>
           <a:p>
-            <a:r>
-              <a:rPr lang="en-US" dirty="0"/>
-              <a:t/>
-            </a:r>
             <a:endParaRPr lang="en-US" dirty="0"/>
           </a:p>
         </p:txBody>
@@ -1046,10 +803,6 @@
           <a:bodyPr/>
           <a:lstStyle/>
           <a:p>
-            <a:r>
-              <a:rPr lang="en-US" dirty="0"/>
-              <a:t/>
-            </a:r>
             <a:endParaRPr lang="en-US" dirty="0"/>
           </a:p>
         </p:txBody>
@@ -1134,10 +887,6 @@
           <a:bodyPr/>
           <a:lstStyle/>
           <a:p>
-            <a:r>
-              <a:rPr lang="en-US" dirty="0"/>
-              <a:t/>
-            </a:r>
             <a:endParaRPr lang="en-US" dirty="0"/>
           </a:p>
         </p:txBody>
@@ -1222,10 +971,6 @@
           <a:bodyPr/>
           <a:lstStyle/>
           <a:p>
-            <a:r>
-              <a:rPr lang="en-US" dirty="0"/>
-              <a:t/>
-            </a:r>
             <a:endParaRPr lang="en-US" dirty="0"/>
           </a:p>
         </p:txBody>
@@ -1310,10 +1055,6 @@
           <a:bodyPr/>
           <a:lstStyle/>
           <a:p>
-            <a:r>
-              <a:rPr lang="en-US" dirty="0"/>
-              <a:t/>
-            </a:r>
             <a:endParaRPr lang="en-US" dirty="0"/>
           </a:p>
         </p:txBody>
@@ -1398,10 +1139,6 @@
           <a:bodyPr/>
           <a:lstStyle/>
           <a:p>
-            <a:r>
-              <a:rPr lang="en-US" dirty="0"/>
-              <a:t/>
-            </a:r>
             <a:endParaRPr lang="en-US" dirty="0"/>
           </a:p>
         </p:txBody>
@@ -1486,10 +1223,6 @@
           <a:bodyPr/>
           <a:lstStyle/>
           <a:p>
-            <a:r>
-              <a:rPr lang="en-US" dirty="0"/>
-              <a:t/>
-            </a:r>
             <a:endParaRPr lang="en-US" dirty="0"/>
           </a:p>
         </p:txBody>
@@ -1574,10 +1307,6 @@
           <a:bodyPr/>
           <a:lstStyle/>
           <a:p>
-            <a:r>
-              <a:rPr lang="en-US" dirty="0"/>
-              <a:t/>
-            </a:r>
             <a:endParaRPr lang="en-US" dirty="0"/>
           </a:p>
         </p:txBody>
@@ -1662,10 +1391,6 @@
           <a:bodyPr/>
           <a:lstStyle/>
           <a:p>
-            <a:r>
-              <a:rPr lang="en-US" dirty="0"/>
-              <a:t/>
-            </a:r>
             <a:endParaRPr lang="en-US" dirty="0"/>
           </a:p>
         </p:txBody>
@@ -1750,10 +1475,6 @@
           <a:bodyPr/>
           <a:lstStyle/>
           <a:p>
-            <a:r>
-              <a:rPr lang="en-US" dirty="0"/>
-              <a:t/>
-            </a:r>
             <a:endParaRPr lang="en-US" dirty="0"/>
           </a:p>
         </p:txBody>
@@ -1838,10 +1559,6 @@
           <a:bodyPr/>
           <a:lstStyle/>
           <a:p>
-            <a:r>
-              <a:rPr lang="en-US" dirty="0"/>
-              <a:t/>
-            </a:r>
             <a:endParaRPr lang="en-US" dirty="0"/>
           </a:p>
         </p:txBody>
@@ -1926,10 +1643,6 @@
           <a:bodyPr/>
           <a:lstStyle/>
           <a:p>
-            <a:r>
-              <a:rPr lang="en-US" dirty="0"/>
-              <a:t/>
-            </a:r>
             <a:endParaRPr lang="en-US" dirty="0"/>
           </a:p>
         </p:txBody>
@@ -2014,10 +1727,6 @@
           <a:bodyPr/>
           <a:lstStyle/>
           <a:p>
-            <a:r>
-              <a:rPr lang="en-US" dirty="0"/>
-              <a:t/>
-            </a:r>
             <a:endParaRPr lang="en-US" dirty="0"/>
           </a:p>
         </p:txBody>
@@ -2102,10 +1811,6 @@
           <a:bodyPr/>
           <a:lstStyle/>
           <a:p>
-            <a:r>
-              <a:rPr lang="en-US" dirty="0"/>
-              <a:t/>
-            </a:r>
             <a:endParaRPr lang="en-US" dirty="0"/>
           </a:p>
         </p:txBody>
@@ -2179,6 +1884,11 @@
 <file path=ppt/slideMasters/slideMaster1.xml><?xml version="1.0" encoding="utf-8"?>
 <p:sldMaster xmlns:a="http://schemas.openxmlformats.org/drawingml/2006/main" xmlns:r="http://schemas.openxmlformats.org/officeDocument/2006/relationships" xmlns:p="http://schemas.openxmlformats.org/presentationml/2006/main">
   <p:cSld>
+    <p:bg>
+      <p:bgRef idx="1001">
+        <a:schemeClr val="bg1"/>
+      </p:bgRef>
+    </p:bg>
     <p:spTree>
       <p:nvGrpSpPr>
         <p:cNvPr id="1" name=""/>
@@ -2461,6 +2171,7 @@
         <a:solidFill>
           <a:srgbClr val="1A1A2E"/>
         </a:solidFill>
+        <a:effectLst/>
       </p:bgPr>
     </p:bg>
     <p:spTree>
@@ -2501,6 +2212,13 @@
             <a:prstDash val="solid"/>
           </a:ln>
         </p:spPr>
+        <p:txBody>
+          <a:bodyPr/>
+          <a:lstStyle/>
+          <a:p>
+            <a:endParaRPr lang="en-US"/>
+          </a:p>
+        </p:txBody>
       </p:sp>
       <p:sp>
         <p:nvSpPr>
@@ -2523,7 +2241,7 @@
           <a:bodyPr wrap="square" lIns="0" tIns="0" rIns="0" bIns="0" rtlCol="0" anchor="ctr"/>
           <a:lstStyle/>
           <a:p>
-            <a:pPr algn="ctr" indent="0" marL="0">
+            <a:pPr marL="0" indent="0" algn="ctr">
               <a:buNone/>
             </a:pPr>
             <a:r>
@@ -2559,7 +2277,7 @@
           <a:bodyPr wrap="square" lIns="0" tIns="0" rIns="0" bIns="0" rtlCol="0" anchor="t"/>
           <a:lstStyle/>
           <a:p>
-            <a:pPr algn="ctr" indent="0" marL="0">
+            <a:pPr marL="0" indent="0" algn="ctr">
               <a:buNone/>
             </a:pPr>
             <a:r>
@@ -2598,6 +2316,13 @@
             <a:prstDash val="solid"/>
           </a:ln>
         </p:spPr>
+        <p:txBody>
+          <a:bodyPr/>
+          <a:lstStyle/>
+          <a:p>
+            <a:endParaRPr lang="en-US"/>
+          </a:p>
+        </p:txBody>
       </p:sp>
       <p:sp>
         <p:nvSpPr>
@@ -2620,7 +2345,7 @@
           <a:bodyPr wrap="square" lIns="0" tIns="0" rIns="0" bIns="0" rtlCol="0" anchor="ctr"/>
           <a:lstStyle/>
           <a:p>
-            <a:pPr algn="ctr" indent="0" marL="0">
+            <a:pPr marL="0" indent="0" algn="ctr">
               <a:buNone/>
             </a:pPr>
             <a:r>
@@ -2656,7 +2381,7 @@
           <a:bodyPr wrap="square" lIns="0" tIns="0" rIns="0" bIns="0" rtlCol="0" anchor="t"/>
           <a:lstStyle/>
           <a:p>
-            <a:pPr algn="ctr" indent="0" marL="0">
+            <a:pPr marL="0" indent="0" algn="ctr">
               <a:buNone/>
             </a:pPr>
             <a:r>
@@ -2695,6 +2420,13 @@
             <a:prstDash val="solid"/>
           </a:ln>
         </p:spPr>
+        <p:txBody>
+          <a:bodyPr/>
+          <a:lstStyle/>
+          <a:p>
+            <a:endParaRPr lang="en-US"/>
+          </a:p>
+        </p:txBody>
       </p:sp>
       <p:sp>
         <p:nvSpPr>
@@ -2717,7 +2449,7 @@
           <a:bodyPr wrap="square" lIns="0" tIns="0" rIns="0" bIns="0" rtlCol="0" anchor="ctr"/>
           <a:lstStyle/>
           <a:p>
-            <a:pPr algn="ctr" indent="0" marL="0">
+            <a:pPr marL="0" indent="0" algn="ctr">
               <a:buNone/>
             </a:pPr>
             <a:r>
@@ -2753,7 +2485,7 @@
           <a:bodyPr wrap="square" lIns="0" tIns="0" rIns="0" bIns="0" rtlCol="0" anchor="t"/>
           <a:lstStyle/>
           <a:p>
-            <a:pPr algn="ctr" indent="0" marL="0">
+            <a:pPr marL="0" indent="0" algn="ctr">
               <a:buNone/>
             </a:pPr>
             <a:r>
@@ -2792,6 +2524,13 @@
             <a:prstDash val="solid"/>
           </a:ln>
         </p:spPr>
+        <p:txBody>
+          <a:bodyPr/>
+          <a:lstStyle/>
+          <a:p>
+            <a:endParaRPr lang="en-US"/>
+          </a:p>
+        </p:txBody>
       </p:sp>
       <p:sp>
         <p:nvSpPr>
@@ -2814,7 +2553,7 @@
           <a:bodyPr wrap="square" lIns="0" tIns="0" rIns="0" bIns="0" rtlCol="0" anchor="ctr"/>
           <a:lstStyle/>
           <a:p>
-            <a:pPr algn="ctr" indent="0" marL="0">
+            <a:pPr marL="0" indent="0" algn="ctr">
               <a:buNone/>
             </a:pPr>
             <a:r>
@@ -2850,7 +2589,7 @@
           <a:bodyPr wrap="square" lIns="0" tIns="0" rIns="0" bIns="0" rtlCol="0" anchor="t"/>
           <a:lstStyle/>
           <a:p>
-            <a:pPr algn="ctr" indent="0" marL="0">
+            <a:pPr marL="0" indent="0" algn="ctr">
               <a:buNone/>
             </a:pPr>
             <a:r>
@@ -2886,7 +2625,7 @@
           <a:bodyPr wrap="square" rtlCol="0" anchor="ctr"/>
           <a:lstStyle/>
           <a:p>
-            <a:pPr algn="ctr" indent="0" marL="0">
+            <a:pPr marL="0" indent="0" algn="ctr">
               <a:buNone/>
             </a:pPr>
             <a:r>
@@ -2922,7 +2661,7 @@
           <a:bodyPr wrap="square" rtlCol="0" anchor="ctr"/>
           <a:lstStyle/>
           <a:p>
-            <a:pPr algn="ctr" indent="0" marL="0">
+            <a:pPr marL="0" indent="0" algn="ctr">
               <a:buNone/>
             </a:pPr>
             <a:r>
@@ -2959,6 +2698,13 @@
             <a:prstDash val="solid"/>
           </a:ln>
         </p:spPr>
+        <p:txBody>
+          <a:bodyPr/>
+          <a:lstStyle/>
+          <a:p>
+            <a:endParaRPr lang="en-US"/>
+          </a:p>
+        </p:txBody>
       </p:sp>
       <p:sp>
         <p:nvSpPr>
@@ -2981,7 +2727,7 @@
           <a:bodyPr wrap="square" rtlCol="0" anchor="ctr"/>
           <a:lstStyle/>
           <a:p>
-            <a:pPr algn="ctr" indent="0" marL="0">
+            <a:pPr marL="0" indent="0" algn="ctr">
               <a:buNone/>
             </a:pPr>
             <a:r>
@@ -3012,6 +2758,7 @@
         <a:solidFill>
           <a:srgbClr val="F8F9FA"/>
         </a:solidFill>
+        <a:effectLst/>
       </p:bgPr>
     </p:bg>
     <p:spTree>
@@ -3052,6 +2799,13 @@
             <a:prstDash val="solid"/>
           </a:ln>
         </p:spPr>
+        <p:txBody>
+          <a:bodyPr/>
+          <a:lstStyle/>
+          <a:p>
+            <a:endParaRPr lang="en-US"/>
+          </a:p>
+        </p:txBody>
       </p:sp>
       <p:sp>
         <p:nvSpPr>
@@ -3074,7 +2828,7 @@
           <a:bodyPr wrap="square" lIns="0" tIns="0" rIns="0" bIns="0" rtlCol="0" anchor="ctr"/>
           <a:lstStyle/>
           <a:p>
-            <a:pPr indent="0" marL="0">
+            <a:pPr marL="0" indent="0">
               <a:buNone/>
             </a:pPr>
             <a:r>
@@ -3110,7 +2864,7 @@
           <a:bodyPr wrap="square" lIns="0" tIns="0" rIns="0" bIns="0" rtlCol="0" anchor="ctr"/>
           <a:lstStyle/>
           <a:p>
-            <a:pPr algn="ctr" indent="0" marL="0">
+            <a:pPr marL="0" indent="0" algn="ctr">
               <a:buNone/>
             </a:pPr>
             <a:r>
@@ -3149,13 +2903,20 @@
             <a:prstDash val="solid"/>
           </a:ln>
           <a:effectLst>
-            <a:outerShdw sx="100000" sy="100000" kx="0" ky="0" algn="bl" rotWithShape="0" blurRad="101600" dist="25400" dir="8100000">
+            <a:outerShdw blurRad="101600" dist="25400" dir="8100000" algn="bl" rotWithShape="0">
               <a:srgbClr val="000000">
                 <a:alpha val="10000"/>
               </a:srgbClr>
             </a:outerShdw>
           </a:effectLst>
         </p:spPr>
+        <p:txBody>
+          <a:bodyPr/>
+          <a:lstStyle/>
+          <a:p>
+            <a:endParaRPr lang="en-US"/>
+          </a:p>
+        </p:txBody>
       </p:sp>
       <p:sp>
         <p:nvSpPr>
@@ -3181,6 +2942,13 @@
             <a:prstDash val="solid"/>
           </a:ln>
         </p:spPr>
+        <p:txBody>
+          <a:bodyPr/>
+          <a:lstStyle/>
+          <a:p>
+            <a:endParaRPr lang="en-US"/>
+          </a:p>
+        </p:txBody>
       </p:sp>
       <p:sp>
         <p:nvSpPr>
@@ -3203,7 +2971,7 @@
           <a:bodyPr wrap="square" rtlCol="0" anchor="ctr"/>
           <a:lstStyle/>
           <a:p>
-            <a:pPr algn="ctr" indent="0" marL="0">
+            <a:pPr marL="0" indent="0" algn="ctr">
               <a:buNone/>
             </a:pPr>
             <a:r>
@@ -3239,7 +3007,7 @@
           <a:bodyPr wrap="square" rtlCol="0" anchor="ctr"/>
           <a:lstStyle/>
           <a:p>
-            <a:pPr algn="ctr" indent="0" marL="0">
+            <a:pPr marL="0" indent="0" algn="ctr">
               <a:buNone/>
             </a:pPr>
             <a:r>
@@ -3275,7 +3043,7 @@
           <a:bodyPr wrap="square" rtlCol="0" anchor="ctr"/>
           <a:lstStyle/>
           <a:p>
-            <a:pPr indent="0" marL="0">
+            <a:pPr marL="0" indent="0">
               <a:buNone/>
             </a:pPr>
             <a:r>
@@ -3314,6 +3082,13 @@
             <a:prstDash val="solid"/>
           </a:ln>
         </p:spPr>
+        <p:txBody>
+          <a:bodyPr/>
+          <a:lstStyle/>
+          <a:p>
+            <a:endParaRPr lang="en-US"/>
+          </a:p>
+        </p:txBody>
       </p:sp>
       <p:sp>
         <p:nvSpPr>
@@ -3336,7 +3111,7 @@
           <a:bodyPr wrap="square" rtlCol="0" anchor="ctr"/>
           <a:lstStyle/>
           <a:p>
-            <a:pPr indent="0" marL="0">
+            <a:pPr marL="0" indent="0">
               <a:buNone/>
             </a:pPr>
             <a:r>
@@ -3353,7 +3128,7 @@
             <a:endParaRPr lang="en-US" sz="1050" dirty="0"/>
           </a:p>
           <a:p>
-            <a:pPr indent="0" marL="0">
+            <a:pPr marL="0" indent="0">
               <a:buNone/>
             </a:pPr>
             <a:r>
@@ -3370,7 +3145,7 @@
             <a:endParaRPr lang="en-US" sz="1050" dirty="0"/>
           </a:p>
           <a:p>
-            <a:pPr indent="0" marL="0">
+            <a:pPr marL="0" indent="0">
               <a:buNone/>
             </a:pPr>
             <a:r>
@@ -3387,7 +3162,7 @@
             <a:endParaRPr lang="en-US" sz="1050" dirty="0"/>
           </a:p>
           <a:p>
-            <a:pPr indent="0" marL="0">
+            <a:pPr marL="0" indent="0">
               <a:buNone/>
             </a:pPr>
             <a:r>
@@ -3404,7 +3179,7 @@
             <a:endParaRPr lang="en-US" sz="1050" dirty="0"/>
           </a:p>
           <a:p>
-            <a:pPr indent="0" marL="0">
+            <a:pPr marL="0" indent="0">
               <a:buNone/>
             </a:pPr>
             <a:r>
@@ -3421,7 +3196,7 @@
             <a:endParaRPr lang="en-US" sz="1050" dirty="0"/>
           </a:p>
           <a:p>
-            <a:pPr indent="0" marL="0">
+            <a:pPr marL="0" indent="0">
               <a:buNone/>
             </a:pPr>
             <a:r>
@@ -3438,7 +3213,7 @@
             <a:endParaRPr lang="en-US" sz="1050" dirty="0"/>
           </a:p>
           <a:p>
-            <a:pPr indent="0" marL="0">
+            <a:pPr marL="0" indent="0">
               <a:buNone/>
             </a:pPr>
             <a:r>
@@ -3480,13 +3255,20 @@
             <a:prstDash val="solid"/>
           </a:ln>
           <a:effectLst>
-            <a:outerShdw sx="100000" sy="100000" kx="0" ky="0" algn="bl" rotWithShape="0" blurRad="101600" dist="25400" dir="8100000">
+            <a:outerShdw blurRad="101600" dist="25400" dir="8100000" algn="bl" rotWithShape="0">
               <a:srgbClr val="000000">
                 <a:alpha val="10000"/>
               </a:srgbClr>
             </a:outerShdw>
           </a:effectLst>
         </p:spPr>
+        <p:txBody>
+          <a:bodyPr/>
+          <a:lstStyle/>
+          <a:p>
+            <a:endParaRPr lang="en-US"/>
+          </a:p>
+        </p:txBody>
       </p:sp>
       <p:sp>
         <p:nvSpPr>
@@ -3512,6 +3294,13 @@
             <a:prstDash val="solid"/>
           </a:ln>
         </p:spPr>
+        <p:txBody>
+          <a:bodyPr/>
+          <a:lstStyle/>
+          <a:p>
+            <a:endParaRPr lang="en-US"/>
+          </a:p>
+        </p:txBody>
       </p:sp>
       <p:sp>
         <p:nvSpPr>
@@ -3534,7 +3323,7 @@
           <a:bodyPr wrap="square" rtlCol="0" anchor="ctr"/>
           <a:lstStyle/>
           <a:p>
-            <a:pPr algn="ctr" indent="0" marL="0">
+            <a:pPr marL="0" indent="0" algn="ctr">
               <a:buNone/>
             </a:pPr>
             <a:r>
@@ -3570,7 +3359,7 @@
           <a:bodyPr wrap="square" rtlCol="0" anchor="ctr"/>
           <a:lstStyle/>
           <a:p>
-            <a:pPr algn="ctr" indent="0" marL="0">
+            <a:pPr marL="0" indent="0" algn="ctr">
               <a:buNone/>
             </a:pPr>
             <a:r>
@@ -3606,7 +3395,7 @@
           <a:bodyPr wrap="square" rtlCol="0" anchor="ctr"/>
           <a:lstStyle/>
           <a:p>
-            <a:pPr indent="0" marL="0">
+            <a:pPr marL="0" indent="0">
               <a:buNone/>
             </a:pPr>
             <a:r>
@@ -3645,6 +3434,13 @@
             <a:prstDash val="solid"/>
           </a:ln>
         </p:spPr>
+        <p:txBody>
+          <a:bodyPr/>
+          <a:lstStyle/>
+          <a:p>
+            <a:endParaRPr lang="en-US"/>
+          </a:p>
+        </p:txBody>
       </p:sp>
       <p:sp>
         <p:nvSpPr>
@@ -3667,7 +3463,7 @@
           <a:bodyPr wrap="square" rtlCol="0" anchor="ctr"/>
           <a:lstStyle/>
           <a:p>
-            <a:pPr indent="0" marL="0">
+            <a:pPr marL="0" indent="0">
               <a:buNone/>
             </a:pPr>
             <a:r>
@@ -3684,7 +3480,7 @@
             <a:endParaRPr lang="en-US" sz="1050" dirty="0"/>
           </a:p>
           <a:p>
-            <a:pPr indent="0" marL="0">
+            <a:pPr marL="0" indent="0">
               <a:buNone/>
             </a:pPr>
             <a:r>
@@ -3701,7 +3497,7 @@
             <a:endParaRPr lang="en-US" sz="1050" dirty="0"/>
           </a:p>
           <a:p>
-            <a:pPr indent="0" marL="0">
+            <a:pPr marL="0" indent="0">
               <a:buNone/>
             </a:pPr>
             <a:r>
@@ -3718,7 +3514,7 @@
             <a:endParaRPr lang="en-US" sz="1050" dirty="0"/>
           </a:p>
           <a:p>
-            <a:pPr indent="0" marL="0">
+            <a:pPr marL="0" indent="0">
               <a:buNone/>
             </a:pPr>
             <a:r>
@@ -3735,7 +3531,7 @@
             <a:endParaRPr lang="en-US" sz="1050" dirty="0"/>
           </a:p>
           <a:p>
-            <a:pPr indent="0" marL="0">
+            <a:pPr marL="0" indent="0">
               <a:buNone/>
             </a:pPr>
             <a:r>
@@ -3752,7 +3548,7 @@
             <a:endParaRPr lang="en-US" sz="1050" dirty="0"/>
           </a:p>
           <a:p>
-            <a:pPr indent="0" marL="0">
+            <a:pPr marL="0" indent="0">
               <a:buNone/>
             </a:pPr>
             <a:r>
@@ -3794,13 +3590,20 @@
             <a:prstDash val="solid"/>
           </a:ln>
           <a:effectLst>
-            <a:outerShdw sx="100000" sy="100000" kx="0" ky="0" algn="bl" rotWithShape="0" blurRad="101600" dist="25400" dir="8100000">
+            <a:outerShdw blurRad="101600" dist="25400" dir="8100000" algn="bl" rotWithShape="0">
               <a:srgbClr val="000000">
                 <a:alpha val="10000"/>
               </a:srgbClr>
             </a:outerShdw>
           </a:effectLst>
         </p:spPr>
+        <p:txBody>
+          <a:bodyPr/>
+          <a:lstStyle/>
+          <a:p>
+            <a:endParaRPr lang="en-US"/>
+          </a:p>
+        </p:txBody>
       </p:sp>
       <p:sp>
         <p:nvSpPr>
@@ -3826,6 +3629,13 @@
             <a:prstDash val="solid"/>
           </a:ln>
         </p:spPr>
+        <p:txBody>
+          <a:bodyPr/>
+          <a:lstStyle/>
+          <a:p>
+            <a:endParaRPr lang="en-US"/>
+          </a:p>
+        </p:txBody>
       </p:sp>
       <p:sp>
         <p:nvSpPr>
@@ -3848,7 +3658,7 @@
           <a:bodyPr wrap="square" rtlCol="0" anchor="ctr"/>
           <a:lstStyle/>
           <a:p>
-            <a:pPr algn="ctr" indent="0" marL="0">
+            <a:pPr marL="0" indent="0" algn="ctr">
               <a:buNone/>
             </a:pPr>
             <a:r>
@@ -3884,7 +3694,7 @@
           <a:bodyPr wrap="square" rtlCol="0" anchor="ctr"/>
           <a:lstStyle/>
           <a:p>
-            <a:pPr algn="ctr" indent="0" marL="0">
+            <a:pPr marL="0" indent="0" algn="ctr">
               <a:buNone/>
             </a:pPr>
             <a:r>
@@ -3920,7 +3730,7 @@
           <a:bodyPr wrap="square" rtlCol="0" anchor="ctr"/>
           <a:lstStyle/>
           <a:p>
-            <a:pPr indent="0" marL="0">
+            <a:pPr marL="0" indent="0">
               <a:buNone/>
             </a:pPr>
             <a:r>
@@ -3959,6 +3769,13 @@
             <a:prstDash val="solid"/>
           </a:ln>
         </p:spPr>
+        <p:txBody>
+          <a:bodyPr/>
+          <a:lstStyle/>
+          <a:p>
+            <a:endParaRPr lang="en-US"/>
+          </a:p>
+        </p:txBody>
       </p:sp>
       <p:sp>
         <p:nvSpPr>
@@ -3981,7 +3798,7 @@
           <a:bodyPr wrap="square" rtlCol="0" anchor="ctr"/>
           <a:lstStyle/>
           <a:p>
-            <a:pPr indent="0" marL="0">
+            <a:pPr marL="0" indent="0">
               <a:buNone/>
             </a:pPr>
             <a:r>
@@ -3998,7 +3815,7 @@
             <a:endParaRPr lang="en-US" sz="1050" dirty="0"/>
           </a:p>
           <a:p>
-            <a:pPr indent="0" marL="0">
+            <a:pPr marL="0" indent="0">
               <a:buNone/>
             </a:pPr>
             <a:r>
@@ -4015,13 +3832,13 @@
             <a:endParaRPr lang="en-US" sz="1050" dirty="0"/>
           </a:p>
           <a:p>
-            <a:pPr indent="0" marL="0">
+            <a:pPr marL="0" indent="0">
               <a:buNone/>
             </a:pPr>
             <a:endParaRPr lang="en-US" sz="1050" dirty="0"/>
           </a:p>
           <a:p>
-            <a:pPr indent="0" marL="0">
+            <a:pPr marL="0" indent="0">
               <a:buNone/>
             </a:pPr>
             <a:r>
@@ -4055,6 +3872,7 @@
         <a:solidFill>
           <a:srgbClr val="F8F9FA"/>
         </a:solidFill>
+        <a:effectLst/>
       </p:bgPr>
     </p:bg>
     <p:spTree>
@@ -4095,6 +3913,13 @@
             <a:prstDash val="solid"/>
           </a:ln>
         </p:spPr>
+        <p:txBody>
+          <a:bodyPr/>
+          <a:lstStyle/>
+          <a:p>
+            <a:endParaRPr lang="en-US"/>
+          </a:p>
+        </p:txBody>
       </p:sp>
       <p:sp>
         <p:nvSpPr>
@@ -4117,7 +3942,7 @@
           <a:bodyPr wrap="square" lIns="0" tIns="0" rIns="0" bIns="0" rtlCol="0" anchor="ctr"/>
           <a:lstStyle/>
           <a:p>
-            <a:pPr indent="0" marL="0">
+            <a:pPr marL="0" indent="0">
               <a:buNone/>
             </a:pPr>
             <a:r>
@@ -4153,7 +3978,7 @@
           <a:bodyPr wrap="square" lIns="0" tIns="0" rIns="0" bIns="0" rtlCol="0" anchor="ctr"/>
           <a:lstStyle/>
           <a:p>
-            <a:pPr algn="ctr" indent="0" marL="0">
+            <a:pPr marL="0" indent="0" algn="ctr">
               <a:buNone/>
             </a:pPr>
             <a:r>
@@ -4189,7 +4014,7 @@
           <a:bodyPr wrap="square" rtlCol="0" anchor="ctr"/>
           <a:lstStyle/>
           <a:p>
-            <a:pPr indent="0" marL="0">
+            <a:pPr marL="0" indent="0">
               <a:buNone/>
             </a:pPr>
             <a:r>
@@ -4225,7 +4050,7 @@
           <a:bodyPr wrap="square" rtlCol="0" anchor="ctr"/>
           <a:lstStyle/>
           <a:p>
-            <a:pPr indent="0" marL="0">
+            <a:pPr marL="0" indent="0">
               <a:buNone/>
             </a:pPr>
             <a:r>
@@ -4261,7 +4086,7 @@
           <a:bodyPr wrap="square" rtlCol="0" anchor="ctr"/>
           <a:lstStyle/>
           <a:p>
-            <a:pPr indent="0" marL="0">
+            <a:pPr marL="0" indent="0">
               <a:buNone/>
             </a:pPr>
             <a:r>
@@ -4297,7 +4122,7 @@
           <a:bodyPr wrap="square" rtlCol="0" anchor="ctr"/>
           <a:lstStyle/>
           <a:p>
-            <a:pPr indent="0" marL="0">
+            <a:pPr marL="0" indent="0">
               <a:buNone/>
             </a:pPr>
             <a:r>
@@ -4333,7 +4158,7 @@
           <a:bodyPr wrap="square" rtlCol="0" anchor="ctr"/>
           <a:lstStyle/>
           <a:p>
-            <a:pPr indent="0" marL="0">
+            <a:pPr marL="0" indent="0">
               <a:buNone/>
             </a:pPr>
             <a:r>
@@ -4369,7 +4194,7 @@
           <a:bodyPr wrap="square" rtlCol="0" anchor="ctr"/>
           <a:lstStyle/>
           <a:p>
-            <a:pPr indent="0" marL="0">
+            <a:pPr marL="0" indent="0">
               <a:buNone/>
             </a:pPr>
             <a:r>
@@ -4405,7 +4230,7 @@
           <a:bodyPr wrap="square" rtlCol="0" anchor="ctr"/>
           <a:lstStyle/>
           <a:p>
-            <a:pPr indent="0" marL="0">
+            <a:pPr marL="0" indent="0">
               <a:buNone/>
             </a:pPr>
             <a:r>
@@ -4444,13 +4269,20 @@
             <a:prstDash val="solid"/>
           </a:ln>
           <a:effectLst>
-            <a:outerShdw sx="100000" sy="100000" kx="0" ky="0" algn="bl" rotWithShape="0" blurRad="101600" dist="25400" dir="8100000">
+            <a:outerShdw blurRad="101600" dist="25400" dir="8100000" algn="bl" rotWithShape="0">
               <a:srgbClr val="000000">
                 <a:alpha val="10000"/>
               </a:srgbClr>
             </a:outerShdw>
           </a:effectLst>
         </p:spPr>
+        <p:txBody>
+          <a:bodyPr/>
+          <a:lstStyle/>
+          <a:p>
+            <a:endParaRPr lang="en-US"/>
+          </a:p>
+        </p:txBody>
       </p:sp>
       <p:sp>
         <p:nvSpPr>
@@ -4473,7 +4305,7 @@
           <a:bodyPr wrap="square" rtlCol="0" anchor="ctr"/>
           <a:lstStyle/>
           <a:p>
-            <a:pPr indent="0" marL="0">
+            <a:pPr marL="0" indent="0">
               <a:buNone/>
             </a:pPr>
             <a:r>
@@ -4511,6 +4343,13 @@
             <a:tailEnd type="arrow"/>
           </a:ln>
         </p:spPr>
+        <p:txBody>
+          <a:bodyPr/>
+          <a:lstStyle/>
+          <a:p>
+            <a:endParaRPr lang="en-US"/>
+          </a:p>
+        </p:txBody>
       </p:sp>
       <p:sp>
         <p:nvSpPr>
@@ -4536,13 +4375,20 @@
             <a:prstDash val="solid"/>
           </a:ln>
           <a:effectLst>
-            <a:outerShdw sx="100000" sy="100000" kx="0" ky="0" algn="bl" rotWithShape="0" blurRad="101600" dist="25400" dir="8100000">
+            <a:outerShdw blurRad="101600" dist="25400" dir="8100000" algn="bl" rotWithShape="0">
               <a:srgbClr val="000000">
                 <a:alpha val="10000"/>
               </a:srgbClr>
             </a:outerShdw>
           </a:effectLst>
         </p:spPr>
+        <p:txBody>
+          <a:bodyPr/>
+          <a:lstStyle/>
+          <a:p>
+            <a:endParaRPr lang="en-US"/>
+          </a:p>
+        </p:txBody>
       </p:sp>
       <p:sp>
         <p:nvSpPr>
@@ -4565,7 +4411,7 @@
           <a:bodyPr wrap="square" rtlCol="0" anchor="ctr"/>
           <a:lstStyle/>
           <a:p>
-            <a:pPr indent="0" marL="0">
+            <a:pPr marL="0" indent="0">
               <a:buNone/>
             </a:pPr>
             <a:r>
@@ -4603,6 +4449,13 @@
             <a:tailEnd type="arrow"/>
           </a:ln>
         </p:spPr>
+        <p:txBody>
+          <a:bodyPr/>
+          <a:lstStyle/>
+          <a:p>
+            <a:endParaRPr lang="en-US"/>
+          </a:p>
+        </p:txBody>
       </p:sp>
       <p:sp>
         <p:nvSpPr>
@@ -4628,13 +4481,20 @@
             <a:prstDash val="solid"/>
           </a:ln>
           <a:effectLst>
-            <a:outerShdw sx="100000" sy="100000" kx="0" ky="0" algn="bl" rotWithShape="0" blurRad="101600" dist="25400" dir="8100000">
+            <a:outerShdw blurRad="101600" dist="25400" dir="8100000" algn="bl" rotWithShape="0">
               <a:srgbClr val="000000">
                 <a:alpha val="10000"/>
               </a:srgbClr>
             </a:outerShdw>
           </a:effectLst>
         </p:spPr>
+        <p:txBody>
+          <a:bodyPr/>
+          <a:lstStyle/>
+          <a:p>
+            <a:endParaRPr lang="en-US"/>
+          </a:p>
+        </p:txBody>
       </p:sp>
       <p:sp>
         <p:nvSpPr>
@@ -4657,7 +4517,7 @@
           <a:bodyPr wrap="square" rtlCol="0" anchor="ctr"/>
           <a:lstStyle/>
           <a:p>
-            <a:pPr indent="0" marL="0">
+            <a:pPr marL="0" indent="0">
               <a:buNone/>
             </a:pPr>
             <a:r>
@@ -4695,6 +4555,13 @@
             <a:tailEnd type="arrow"/>
           </a:ln>
         </p:spPr>
+        <p:txBody>
+          <a:bodyPr/>
+          <a:lstStyle/>
+          <a:p>
+            <a:endParaRPr lang="en-US"/>
+          </a:p>
+        </p:txBody>
       </p:sp>
       <p:sp>
         <p:nvSpPr>
@@ -4720,13 +4587,20 @@
             <a:prstDash val="solid"/>
           </a:ln>
           <a:effectLst>
-            <a:outerShdw sx="100000" sy="100000" kx="0" ky="0" algn="bl" rotWithShape="0" blurRad="101600" dist="25400" dir="8100000">
+            <a:outerShdw blurRad="101600" dist="25400" dir="8100000" algn="bl" rotWithShape="0">
               <a:srgbClr val="000000">
                 <a:alpha val="10000"/>
               </a:srgbClr>
             </a:outerShdw>
           </a:effectLst>
         </p:spPr>
+        <p:txBody>
+          <a:bodyPr/>
+          <a:lstStyle/>
+          <a:p>
+            <a:endParaRPr lang="en-US"/>
+          </a:p>
+        </p:txBody>
       </p:sp>
       <p:sp>
         <p:nvSpPr>
@@ -4749,7 +4623,7 @@
           <a:bodyPr wrap="square" rtlCol="0" anchor="ctr"/>
           <a:lstStyle/>
           <a:p>
-            <a:pPr indent="0" marL="0">
+            <a:pPr marL="0" indent="0">
               <a:buNone/>
             </a:pPr>
             <a:r>
@@ -4787,6 +4661,13 @@
             <a:tailEnd type="arrow"/>
           </a:ln>
         </p:spPr>
+        <p:txBody>
+          <a:bodyPr/>
+          <a:lstStyle/>
+          <a:p>
+            <a:endParaRPr lang="en-US"/>
+          </a:p>
+        </p:txBody>
       </p:sp>
       <p:sp>
         <p:nvSpPr>
@@ -4812,13 +4693,20 @@
             <a:prstDash val="solid"/>
           </a:ln>
           <a:effectLst>
-            <a:outerShdw sx="100000" sy="100000" kx="0" ky="0" algn="bl" rotWithShape="0" blurRad="101600" dist="25400" dir="8100000">
+            <a:outerShdw blurRad="101600" dist="25400" dir="8100000" algn="bl" rotWithShape="0">
               <a:srgbClr val="000000">
                 <a:alpha val="10000"/>
               </a:srgbClr>
             </a:outerShdw>
           </a:effectLst>
         </p:spPr>
+        <p:txBody>
+          <a:bodyPr/>
+          <a:lstStyle/>
+          <a:p>
+            <a:endParaRPr lang="en-US"/>
+          </a:p>
+        </p:txBody>
       </p:sp>
       <p:sp>
         <p:nvSpPr>
@@ -4841,7 +4729,7 @@
           <a:bodyPr wrap="square" rtlCol="0" anchor="ctr"/>
           <a:lstStyle/>
           <a:p>
-            <a:pPr indent="0" marL="0">
+            <a:pPr marL="0" indent="0">
               <a:buNone/>
             </a:pPr>
             <a:r>
@@ -4879,6 +4767,13 @@
             <a:tailEnd type="arrow"/>
           </a:ln>
         </p:spPr>
+        <p:txBody>
+          <a:bodyPr/>
+          <a:lstStyle/>
+          <a:p>
+            <a:endParaRPr lang="en-US"/>
+          </a:p>
+        </p:txBody>
       </p:sp>
       <p:sp>
         <p:nvSpPr>
@@ -4904,13 +4799,20 @@
             <a:prstDash val="solid"/>
           </a:ln>
           <a:effectLst>
-            <a:outerShdw sx="100000" sy="100000" kx="0" ky="0" algn="bl" rotWithShape="0" blurRad="101600" dist="25400" dir="8100000">
+            <a:outerShdw blurRad="101600" dist="25400" dir="8100000" algn="bl" rotWithShape="0">
               <a:srgbClr val="000000">
                 <a:alpha val="10000"/>
               </a:srgbClr>
             </a:outerShdw>
           </a:effectLst>
         </p:spPr>
+        <p:txBody>
+          <a:bodyPr/>
+          <a:lstStyle/>
+          <a:p>
+            <a:endParaRPr lang="en-US"/>
+          </a:p>
+        </p:txBody>
       </p:sp>
       <p:sp>
         <p:nvSpPr>
@@ -4933,7 +4835,7 @@
           <a:bodyPr wrap="square" rtlCol="0" anchor="ctr"/>
           <a:lstStyle/>
           <a:p>
-            <a:pPr indent="0" marL="0">
+            <a:pPr marL="0" indent="0">
               <a:buNone/>
             </a:pPr>
             <a:r>
@@ -4964,6 +4866,7 @@
         <a:solidFill>
           <a:srgbClr val="1A1A2E"/>
         </a:solidFill>
+        <a:effectLst/>
       </p:bgPr>
     </p:bg>
     <p:spTree>
@@ -5004,6 +4907,13 @@
             <a:prstDash val="solid"/>
           </a:ln>
         </p:spPr>
+        <p:txBody>
+          <a:bodyPr/>
+          <a:lstStyle/>
+          <a:p>
+            <a:endParaRPr lang="en-US"/>
+          </a:p>
+        </p:txBody>
       </p:sp>
       <p:sp>
         <p:nvSpPr>
@@ -5029,6 +4939,13 @@
             <a:prstDash val="solid"/>
           </a:ln>
         </p:spPr>
+        <p:txBody>
+          <a:bodyPr/>
+          <a:lstStyle/>
+          <a:p>
+            <a:endParaRPr lang="en-US"/>
+          </a:p>
+        </p:txBody>
       </p:sp>
       <p:sp>
         <p:nvSpPr>
@@ -5051,7 +4968,7 @@
           <a:bodyPr wrap="square" rtlCol="0" anchor="ctr"/>
           <a:lstStyle/>
           <a:p>
-            <a:pPr algn="ctr" indent="0" marL="0">
+            <a:pPr marL="0" indent="0" algn="ctr">
               <a:buNone/>
             </a:pPr>
             <a:r>
@@ -5087,7 +5004,7 @@
           <a:bodyPr wrap="square" rtlCol="0" anchor="ctr"/>
           <a:lstStyle/>
           <a:p>
-            <a:pPr algn="ctr" indent="0" marL="0">
+            <a:pPr marL="0" indent="0" algn="ctr">
               <a:buNone/>
             </a:pPr>
             <a:r>
@@ -5118,6 +5035,7 @@
         <a:solidFill>
           <a:srgbClr val="1A1A2E"/>
         </a:solidFill>
+        <a:effectLst/>
       </p:bgPr>
     </p:bg>
     <p:spTree>
@@ -5155,7 +5073,7 @@
           <a:bodyPr wrap="square" rtlCol="0" anchor="ctr"/>
           <a:lstStyle/>
           <a:p>
-            <a:pPr algn="ctr" indent="0" marL="0">
+            <a:pPr marL="0" indent="0" algn="ctr">
               <a:buNone/>
             </a:pPr>
             <a:r>
@@ -5194,6 +5112,13 @@
             <a:prstDash val="solid"/>
           </a:ln>
         </p:spPr>
+        <p:txBody>
+          <a:bodyPr/>
+          <a:lstStyle/>
+          <a:p>
+            <a:endParaRPr lang="en-US"/>
+          </a:p>
+        </p:txBody>
       </p:sp>
       <p:sp>
         <p:nvSpPr>
@@ -5216,7 +5141,7 @@
           <a:bodyPr wrap="square" lIns="0" tIns="0" rIns="0" bIns="0" rtlCol="0" anchor="ctr"/>
           <a:lstStyle/>
           <a:p>
-            <a:pPr algn="ctr" indent="0" marL="0">
+            <a:pPr marL="0" indent="0" algn="ctr">
               <a:buNone/>
             </a:pPr>
             <a:r>
@@ -5252,7 +5177,7 @@
           <a:bodyPr wrap="square" rtlCol="0" anchor="ctr"/>
           <a:lstStyle/>
           <a:p>
-            <a:pPr algn="ctr" indent="0" marL="0">
+            <a:pPr marL="0" indent="0" algn="ctr">
               <a:buNone/>
             </a:pPr>
             <a:r>
@@ -5288,7 +5213,7 @@
           <a:bodyPr wrap="square" rtlCol="0" anchor="ctr"/>
           <a:lstStyle/>
           <a:p>
-            <a:pPr indent="0" marL="0">
+            <a:pPr marL="0" indent="0">
               <a:buNone/>
             </a:pPr>
             <a:r>
@@ -5327,6 +5252,13 @@
             <a:prstDash val="solid"/>
           </a:ln>
         </p:spPr>
+        <p:txBody>
+          <a:bodyPr/>
+          <a:lstStyle/>
+          <a:p>
+            <a:endParaRPr lang="en-US"/>
+          </a:p>
+        </p:txBody>
       </p:sp>
       <p:sp>
         <p:nvSpPr>
@@ -5349,7 +5281,7 @@
           <a:bodyPr wrap="square" lIns="0" tIns="0" rIns="0" bIns="0" rtlCol="0" anchor="ctr"/>
           <a:lstStyle/>
           <a:p>
-            <a:pPr algn="ctr" indent="0" marL="0">
+            <a:pPr marL="0" indent="0" algn="ctr">
               <a:buNone/>
             </a:pPr>
             <a:r>
@@ -5385,7 +5317,7 @@
           <a:bodyPr wrap="square" rtlCol="0" anchor="ctr"/>
           <a:lstStyle/>
           <a:p>
-            <a:pPr algn="ctr" indent="0" marL="0">
+            <a:pPr marL="0" indent="0" algn="ctr">
               <a:buNone/>
             </a:pPr>
             <a:r>
@@ -5421,7 +5353,7 @@
           <a:bodyPr wrap="square" rtlCol="0" anchor="ctr"/>
           <a:lstStyle/>
           <a:p>
-            <a:pPr indent="0" marL="0">
+            <a:pPr marL="0" indent="0">
               <a:buNone/>
             </a:pPr>
             <a:r>
@@ -5460,6 +5392,13 @@
             <a:prstDash val="solid"/>
           </a:ln>
         </p:spPr>
+        <p:txBody>
+          <a:bodyPr/>
+          <a:lstStyle/>
+          <a:p>
+            <a:endParaRPr lang="en-US"/>
+          </a:p>
+        </p:txBody>
       </p:sp>
       <p:sp>
         <p:nvSpPr>
@@ -5482,7 +5421,7 @@
           <a:bodyPr wrap="square" lIns="0" tIns="0" rIns="0" bIns="0" rtlCol="0" anchor="ctr"/>
           <a:lstStyle/>
           <a:p>
-            <a:pPr algn="ctr" indent="0" marL="0">
+            <a:pPr marL="0" indent="0" algn="ctr">
               <a:buNone/>
             </a:pPr>
             <a:r>
@@ -5518,7 +5457,7 @@
           <a:bodyPr wrap="square" rtlCol="0" anchor="ctr"/>
           <a:lstStyle/>
           <a:p>
-            <a:pPr algn="ctr" indent="0" marL="0">
+            <a:pPr marL="0" indent="0" algn="ctr">
               <a:buNone/>
             </a:pPr>
             <a:r>
@@ -5554,7 +5493,7 @@
           <a:bodyPr wrap="square" rtlCol="0" anchor="ctr"/>
           <a:lstStyle/>
           <a:p>
-            <a:pPr indent="0" marL="0">
+            <a:pPr marL="0" indent="0">
               <a:buNone/>
             </a:pPr>
             <a:r>
@@ -5593,6 +5532,13 @@
             <a:prstDash val="solid"/>
           </a:ln>
         </p:spPr>
+        <p:txBody>
+          <a:bodyPr/>
+          <a:lstStyle/>
+          <a:p>
+            <a:endParaRPr lang="en-US"/>
+          </a:p>
+        </p:txBody>
       </p:sp>
       <p:sp>
         <p:nvSpPr>
@@ -5615,7 +5561,7 @@
           <a:bodyPr wrap="square" lIns="0" tIns="0" rIns="0" bIns="0" rtlCol="0" anchor="ctr"/>
           <a:lstStyle/>
           <a:p>
-            <a:pPr algn="ctr" indent="0" marL="0">
+            <a:pPr marL="0" indent="0" algn="ctr">
               <a:buNone/>
             </a:pPr>
             <a:r>
@@ -5651,7 +5597,7 @@
           <a:bodyPr wrap="square" rtlCol="0" anchor="ctr"/>
           <a:lstStyle/>
           <a:p>
-            <a:pPr algn="ctr" indent="0" marL="0">
+            <a:pPr marL="0" indent="0" algn="ctr">
               <a:buNone/>
             </a:pPr>
             <a:r>
@@ -5687,7 +5633,7 @@
           <a:bodyPr wrap="square" rtlCol="0" anchor="ctr"/>
           <a:lstStyle/>
           <a:p>
-            <a:pPr indent="0" marL="0">
+            <a:pPr marL="0" indent="0">
               <a:buNone/>
             </a:pPr>
             <a:r>
@@ -5723,7 +5669,7 @@
           <a:bodyPr wrap="square" rtlCol="0" anchor="ctr"/>
           <a:lstStyle/>
           <a:p>
-            <a:pPr algn="ctr" indent="0" marL="0">
+            <a:pPr marL="0" indent="0" algn="ctr">
               <a:buNone/>
             </a:pPr>
             <a:r>
@@ -5754,6 +5700,7 @@
         <a:solidFill>
           <a:srgbClr val="F8F9FA"/>
         </a:solidFill>
+        <a:effectLst/>
       </p:bgPr>
     </p:bg>
     <p:spTree>
@@ -5794,6 +5741,13 @@
             <a:prstDash val="solid"/>
           </a:ln>
         </p:spPr>
+        <p:txBody>
+          <a:bodyPr/>
+          <a:lstStyle/>
+          <a:p>
+            <a:endParaRPr lang="en-US"/>
+          </a:p>
+        </p:txBody>
       </p:sp>
       <p:sp>
         <p:nvSpPr>
@@ -5816,7 +5770,7 @@
           <a:bodyPr wrap="square" lIns="0" tIns="0" rIns="0" bIns="0" rtlCol="0" anchor="ctr"/>
           <a:lstStyle/>
           <a:p>
-            <a:pPr indent="0" marL="0">
+            <a:pPr marL="0" indent="0">
               <a:buNone/>
             </a:pPr>
             <a:r>
@@ -5852,7 +5806,7 @@
           <a:bodyPr wrap="square" lIns="0" tIns="0" rIns="0" bIns="0" rtlCol="0" anchor="ctr"/>
           <a:lstStyle/>
           <a:p>
-            <a:pPr algn="ctr" indent="0" marL="0">
+            <a:pPr marL="0" indent="0" algn="ctr">
               <a:buNone/>
             </a:pPr>
             <a:r>
@@ -5891,6 +5845,13 @@
             <a:prstDash val="solid"/>
           </a:ln>
         </p:spPr>
+        <p:txBody>
+          <a:bodyPr/>
+          <a:lstStyle/>
+          <a:p>
+            <a:endParaRPr lang="en-US"/>
+          </a:p>
+        </p:txBody>
       </p:sp>
       <p:sp>
         <p:nvSpPr>
@@ -5916,6 +5877,13 @@
             <a:prstDash val="solid"/>
           </a:ln>
         </p:spPr>
+        <p:txBody>
+          <a:bodyPr/>
+          <a:lstStyle/>
+          <a:p>
+            <a:endParaRPr lang="en-US"/>
+          </a:p>
+        </p:txBody>
       </p:sp>
       <p:sp>
         <p:nvSpPr>
@@ -5938,7 +5906,7 @@
           <a:bodyPr wrap="square" rtlCol="0" anchor="ctr"/>
           <a:lstStyle/>
           <a:p>
-            <a:pPr algn="ctr" indent="0" marL="0">
+            <a:pPr marL="0" indent="0" algn="ctr">
               <a:buNone/>
             </a:pPr>
             <a:r>
@@ -5974,7 +5942,7 @@
           <a:bodyPr wrap="square" rtlCol="0" anchor="ctr"/>
           <a:lstStyle/>
           <a:p>
-            <a:pPr indent="0" marL="0">
+            <a:pPr marL="0" indent="0">
               <a:buNone/>
             </a:pPr>
             <a:r>
@@ -6013,6 +5981,13 @@
             <a:prstDash val="solid"/>
           </a:ln>
         </p:spPr>
+        <p:txBody>
+          <a:bodyPr/>
+          <a:lstStyle/>
+          <a:p>
+            <a:endParaRPr lang="en-US"/>
+          </a:p>
+        </p:txBody>
       </p:sp>
       <p:sp>
         <p:nvSpPr>
@@ -6035,7 +6010,7 @@
           <a:bodyPr wrap="square" lIns="0" tIns="0" rIns="0" bIns="0" rtlCol="0" anchor="ctr"/>
           <a:lstStyle/>
           <a:p>
-            <a:pPr algn="ctr" indent="0" marL="0">
+            <a:pPr marL="0" indent="0" algn="ctr">
               <a:buNone/>
             </a:pPr>
             <a:r>
@@ -6073,6 +6048,13 @@
             <a:tailEnd type="arrow"/>
           </a:ln>
         </p:spPr>
+        <p:txBody>
+          <a:bodyPr/>
+          <a:lstStyle/>
+          <a:p>
+            <a:endParaRPr lang="en-US"/>
+          </a:p>
+        </p:txBody>
       </p:sp>
       <p:sp>
         <p:nvSpPr>
@@ -6098,6 +6080,13 @@
             <a:prstDash val="solid"/>
           </a:ln>
         </p:spPr>
+        <p:txBody>
+          <a:bodyPr/>
+          <a:lstStyle/>
+          <a:p>
+            <a:endParaRPr lang="en-US"/>
+          </a:p>
+        </p:txBody>
       </p:sp>
       <p:sp>
         <p:nvSpPr>
@@ -6123,6 +6112,13 @@
             <a:prstDash val="solid"/>
           </a:ln>
         </p:spPr>
+        <p:txBody>
+          <a:bodyPr/>
+          <a:lstStyle/>
+          <a:p>
+            <a:endParaRPr lang="en-US"/>
+          </a:p>
+        </p:txBody>
       </p:sp>
       <p:sp>
         <p:nvSpPr>
@@ -6145,7 +6141,7 @@
           <a:bodyPr wrap="square" rtlCol="0" anchor="ctr"/>
           <a:lstStyle/>
           <a:p>
-            <a:pPr algn="ctr" indent="0" marL="0">
+            <a:pPr marL="0" indent="0" algn="ctr">
               <a:buNone/>
             </a:pPr>
             <a:r>
@@ -6181,7 +6177,7 @@
           <a:bodyPr wrap="square" rtlCol="0" anchor="ctr"/>
           <a:lstStyle/>
           <a:p>
-            <a:pPr indent="0" marL="0">
+            <a:pPr marL="0" indent="0">
               <a:buNone/>
             </a:pPr>
             <a:r>
@@ -6220,6 +6216,13 @@
             <a:prstDash val="solid"/>
           </a:ln>
         </p:spPr>
+        <p:txBody>
+          <a:bodyPr/>
+          <a:lstStyle/>
+          <a:p>
+            <a:endParaRPr lang="en-US"/>
+          </a:p>
+        </p:txBody>
       </p:sp>
       <p:sp>
         <p:nvSpPr>
@@ -6242,7 +6245,7 @@
           <a:bodyPr wrap="square" lIns="0" tIns="0" rIns="0" bIns="0" rtlCol="0" anchor="ctr"/>
           <a:lstStyle/>
           <a:p>
-            <a:pPr algn="ctr" indent="0" marL="0">
+            <a:pPr marL="0" indent="0" algn="ctr">
               <a:buNone/>
             </a:pPr>
             <a:r>
@@ -6280,6 +6283,13 @@
             <a:tailEnd type="arrow"/>
           </a:ln>
         </p:spPr>
+        <p:txBody>
+          <a:bodyPr/>
+          <a:lstStyle/>
+          <a:p>
+            <a:endParaRPr lang="en-US"/>
+          </a:p>
+        </p:txBody>
       </p:sp>
       <p:sp>
         <p:nvSpPr>
@@ -6305,6 +6315,13 @@
             <a:prstDash val="solid"/>
           </a:ln>
         </p:spPr>
+        <p:txBody>
+          <a:bodyPr/>
+          <a:lstStyle/>
+          <a:p>
+            <a:endParaRPr lang="en-US"/>
+          </a:p>
+        </p:txBody>
       </p:sp>
       <p:sp>
         <p:nvSpPr>
@@ -6330,6 +6347,13 @@
             <a:prstDash val="solid"/>
           </a:ln>
         </p:spPr>
+        <p:txBody>
+          <a:bodyPr/>
+          <a:lstStyle/>
+          <a:p>
+            <a:endParaRPr lang="en-US"/>
+          </a:p>
+        </p:txBody>
       </p:sp>
       <p:sp>
         <p:nvSpPr>
@@ -6352,7 +6376,7 @@
           <a:bodyPr wrap="square" rtlCol="0" anchor="ctr"/>
           <a:lstStyle/>
           <a:p>
-            <a:pPr algn="ctr" indent="0" marL="0">
+            <a:pPr marL="0" indent="0" algn="ctr">
               <a:buNone/>
             </a:pPr>
             <a:r>
@@ -6388,7 +6412,7 @@
           <a:bodyPr wrap="square" rtlCol="0" anchor="ctr"/>
           <a:lstStyle/>
           <a:p>
-            <a:pPr indent="0" marL="0">
+            <a:pPr marL="0" indent="0">
               <a:buNone/>
             </a:pPr>
             <a:r>
@@ -6427,6 +6451,13 @@
             <a:prstDash val="solid"/>
           </a:ln>
         </p:spPr>
+        <p:txBody>
+          <a:bodyPr/>
+          <a:lstStyle/>
+          <a:p>
+            <a:endParaRPr lang="en-US"/>
+          </a:p>
+        </p:txBody>
       </p:sp>
       <p:sp>
         <p:nvSpPr>
@@ -6449,7 +6480,7 @@
           <a:bodyPr wrap="square" lIns="0" tIns="0" rIns="0" bIns="0" rtlCol="0" anchor="ctr"/>
           <a:lstStyle/>
           <a:p>
-            <a:pPr algn="ctr" indent="0" marL="0">
+            <a:pPr marL="0" indent="0" algn="ctr">
               <a:buNone/>
             </a:pPr>
             <a:r>
@@ -6487,6 +6518,13 @@
             <a:tailEnd type="arrow"/>
           </a:ln>
         </p:spPr>
+        <p:txBody>
+          <a:bodyPr/>
+          <a:lstStyle/>
+          <a:p>
+            <a:endParaRPr lang="en-US"/>
+          </a:p>
+        </p:txBody>
       </p:sp>
       <p:sp>
         <p:nvSpPr>
@@ -6512,6 +6550,13 @@
             <a:prstDash val="solid"/>
           </a:ln>
         </p:spPr>
+        <p:txBody>
+          <a:bodyPr/>
+          <a:lstStyle/>
+          <a:p>
+            <a:endParaRPr lang="en-US"/>
+          </a:p>
+        </p:txBody>
       </p:sp>
       <p:sp>
         <p:nvSpPr>
@@ -6537,6 +6582,13 @@
             <a:prstDash val="solid"/>
           </a:ln>
         </p:spPr>
+        <p:txBody>
+          <a:bodyPr/>
+          <a:lstStyle/>
+          <a:p>
+            <a:endParaRPr lang="en-US"/>
+          </a:p>
+        </p:txBody>
       </p:sp>
       <p:sp>
         <p:nvSpPr>
@@ -6559,7 +6611,7 @@
           <a:bodyPr wrap="square" rtlCol="0" anchor="ctr"/>
           <a:lstStyle/>
           <a:p>
-            <a:pPr algn="ctr" indent="0" marL="0">
+            <a:pPr marL="0" indent="0" algn="ctr">
               <a:buNone/>
             </a:pPr>
             <a:r>
@@ -6595,7 +6647,7 @@
           <a:bodyPr wrap="square" rtlCol="0" anchor="ctr"/>
           <a:lstStyle/>
           <a:p>
-            <a:pPr indent="0" marL="0">
+            <a:pPr marL="0" indent="0">
               <a:buNone/>
             </a:pPr>
             <a:r>
@@ -6634,6 +6686,13 @@
             <a:prstDash val="solid"/>
           </a:ln>
         </p:spPr>
+        <p:txBody>
+          <a:bodyPr/>
+          <a:lstStyle/>
+          <a:p>
+            <a:endParaRPr lang="en-US"/>
+          </a:p>
+        </p:txBody>
       </p:sp>
       <p:sp>
         <p:nvSpPr>
@@ -6656,7 +6715,7 @@
           <a:bodyPr wrap="square" lIns="0" tIns="0" rIns="0" bIns="0" rtlCol="0" anchor="ctr"/>
           <a:lstStyle/>
           <a:p>
-            <a:pPr algn="ctr" indent="0" marL="0">
+            <a:pPr marL="0" indent="0" algn="ctr">
               <a:buNone/>
             </a:pPr>
             <a:r>
@@ -6694,6 +6753,13 @@
             <a:tailEnd type="arrow"/>
           </a:ln>
         </p:spPr>
+        <p:txBody>
+          <a:bodyPr/>
+          <a:lstStyle/>
+          <a:p>
+            <a:endParaRPr lang="en-US"/>
+          </a:p>
+        </p:txBody>
       </p:sp>
       <p:sp>
         <p:nvSpPr>
@@ -6719,6 +6785,13 @@
             <a:prstDash val="solid"/>
           </a:ln>
         </p:spPr>
+        <p:txBody>
+          <a:bodyPr/>
+          <a:lstStyle/>
+          <a:p>
+            <a:endParaRPr lang="en-US"/>
+          </a:p>
+        </p:txBody>
       </p:sp>
       <p:sp>
         <p:nvSpPr>
@@ -6744,6 +6817,13 @@
             <a:prstDash val="solid"/>
           </a:ln>
         </p:spPr>
+        <p:txBody>
+          <a:bodyPr/>
+          <a:lstStyle/>
+          <a:p>
+            <a:endParaRPr lang="en-US"/>
+          </a:p>
+        </p:txBody>
       </p:sp>
       <p:sp>
         <p:nvSpPr>
@@ -6766,7 +6846,7 @@
           <a:bodyPr wrap="square" rtlCol="0" anchor="ctr"/>
           <a:lstStyle/>
           <a:p>
-            <a:pPr algn="ctr" indent="0" marL="0">
+            <a:pPr marL="0" indent="0" algn="ctr">
               <a:buNone/>
             </a:pPr>
             <a:r>
@@ -6802,7 +6882,7 @@
           <a:bodyPr wrap="square" rtlCol="0" anchor="ctr"/>
           <a:lstStyle/>
           <a:p>
-            <a:pPr indent="0" marL="0">
+            <a:pPr marL="0" indent="0">
               <a:buNone/>
             </a:pPr>
             <a:r>
@@ -6841,6 +6921,13 @@
             <a:prstDash val="solid"/>
           </a:ln>
         </p:spPr>
+        <p:txBody>
+          <a:bodyPr/>
+          <a:lstStyle/>
+          <a:p>
+            <a:endParaRPr lang="en-US"/>
+          </a:p>
+        </p:txBody>
       </p:sp>
       <p:sp>
         <p:nvSpPr>
@@ -6863,7 +6950,7 @@
           <a:bodyPr wrap="square" lIns="0" tIns="0" rIns="0" bIns="0" rtlCol="0" anchor="ctr"/>
           <a:lstStyle/>
           <a:p>
-            <a:pPr algn="ctr" indent="0" marL="0">
+            <a:pPr marL="0" indent="0" algn="ctr">
               <a:buNone/>
             </a:pPr>
             <a:r>
@@ -6901,6 +6988,13 @@
             <a:tailEnd type="arrow"/>
           </a:ln>
         </p:spPr>
+        <p:txBody>
+          <a:bodyPr/>
+          <a:lstStyle/>
+          <a:p>
+            <a:endParaRPr lang="en-US"/>
+          </a:p>
+        </p:txBody>
       </p:sp>
       <p:sp>
         <p:nvSpPr>
@@ -6926,6 +7020,13 @@
             <a:prstDash val="solid"/>
           </a:ln>
         </p:spPr>
+        <p:txBody>
+          <a:bodyPr/>
+          <a:lstStyle/>
+          <a:p>
+            <a:endParaRPr lang="en-US"/>
+          </a:p>
+        </p:txBody>
       </p:sp>
       <p:sp>
         <p:nvSpPr>
@@ -6951,6 +7052,13 @@
             <a:prstDash val="solid"/>
           </a:ln>
         </p:spPr>
+        <p:txBody>
+          <a:bodyPr/>
+          <a:lstStyle/>
+          <a:p>
+            <a:endParaRPr lang="en-US"/>
+          </a:p>
+        </p:txBody>
       </p:sp>
       <p:sp>
         <p:nvSpPr>
@@ -6973,7 +7081,7 @@
           <a:bodyPr wrap="square" rtlCol="0" anchor="ctr"/>
           <a:lstStyle/>
           <a:p>
-            <a:pPr algn="ctr" indent="0" marL="0">
+            <a:pPr marL="0" indent="0" algn="ctr">
               <a:buNone/>
             </a:pPr>
             <a:r>
@@ -7009,7 +7117,7 @@
           <a:bodyPr wrap="square" rtlCol="0" anchor="ctr"/>
           <a:lstStyle/>
           <a:p>
-            <a:pPr indent="0" marL="0">
+            <a:pPr marL="0" indent="0">
               <a:buNone/>
             </a:pPr>
             <a:r>
@@ -7048,6 +7156,13 @@
             <a:prstDash val="solid"/>
           </a:ln>
         </p:spPr>
+        <p:txBody>
+          <a:bodyPr/>
+          <a:lstStyle/>
+          <a:p>
+            <a:endParaRPr lang="en-US"/>
+          </a:p>
+        </p:txBody>
       </p:sp>
       <p:sp>
         <p:nvSpPr>
@@ -7070,7 +7185,7 @@
           <a:bodyPr wrap="square" lIns="0" tIns="0" rIns="0" bIns="0" rtlCol="0" anchor="ctr"/>
           <a:lstStyle/>
           <a:p>
-            <a:pPr algn="ctr" indent="0" marL="0">
+            <a:pPr marL="0" indent="0" algn="ctr">
               <a:buNone/>
             </a:pPr>
             <a:r>
@@ -7108,6 +7223,13 @@
             <a:tailEnd type="arrow"/>
           </a:ln>
         </p:spPr>
+        <p:txBody>
+          <a:bodyPr/>
+          <a:lstStyle/>
+          <a:p>
+            <a:endParaRPr lang="en-US"/>
+          </a:p>
+        </p:txBody>
       </p:sp>
       <p:sp>
         <p:nvSpPr>
@@ -7133,6 +7255,13 @@
             <a:prstDash val="solid"/>
           </a:ln>
         </p:spPr>
+        <p:txBody>
+          <a:bodyPr/>
+          <a:lstStyle/>
+          <a:p>
+            <a:endParaRPr lang="en-US"/>
+          </a:p>
+        </p:txBody>
       </p:sp>
       <p:sp>
         <p:nvSpPr>
@@ -7158,6 +7287,13 @@
             <a:prstDash val="solid"/>
           </a:ln>
         </p:spPr>
+        <p:txBody>
+          <a:bodyPr/>
+          <a:lstStyle/>
+          <a:p>
+            <a:endParaRPr lang="en-US"/>
+          </a:p>
+        </p:txBody>
       </p:sp>
       <p:sp>
         <p:nvSpPr>
@@ -7180,7 +7316,7 @@
           <a:bodyPr wrap="square" rtlCol="0" anchor="ctr"/>
           <a:lstStyle/>
           <a:p>
-            <a:pPr algn="ctr" indent="0" marL="0">
+            <a:pPr marL="0" indent="0" algn="ctr">
               <a:buNone/>
             </a:pPr>
             <a:r>
@@ -7216,7 +7352,7 @@
           <a:bodyPr wrap="square" rtlCol="0" anchor="ctr"/>
           <a:lstStyle/>
           <a:p>
-            <a:pPr indent="0" marL="0">
+            <a:pPr marL="0" indent="0">
               <a:buNone/>
             </a:pPr>
             <a:r>
@@ -7255,6 +7391,13 @@
             <a:prstDash val="solid"/>
           </a:ln>
         </p:spPr>
+        <p:txBody>
+          <a:bodyPr/>
+          <a:lstStyle/>
+          <a:p>
+            <a:endParaRPr lang="en-US"/>
+          </a:p>
+        </p:txBody>
       </p:sp>
       <p:sp>
         <p:nvSpPr>
@@ -7277,7 +7420,7 @@
           <a:bodyPr wrap="square" lIns="0" tIns="0" rIns="0" bIns="0" rtlCol="0" anchor="ctr"/>
           <a:lstStyle/>
           <a:p>
-            <a:pPr algn="ctr" indent="0" marL="0">
+            <a:pPr marL="0" indent="0" algn="ctr">
               <a:buNone/>
             </a:pPr>
             <a:r>
@@ -7315,6 +7458,13 @@
             <a:tailEnd type="arrow"/>
           </a:ln>
         </p:spPr>
+        <p:txBody>
+          <a:bodyPr/>
+          <a:lstStyle/>
+          <a:p>
+            <a:endParaRPr lang="en-US"/>
+          </a:p>
+        </p:txBody>
       </p:sp>
       <p:sp>
         <p:nvSpPr>
@@ -7340,6 +7490,13 @@
             <a:prstDash val="solid"/>
           </a:ln>
         </p:spPr>
+        <p:txBody>
+          <a:bodyPr/>
+          <a:lstStyle/>
+          <a:p>
+            <a:endParaRPr lang="en-US"/>
+          </a:p>
+        </p:txBody>
       </p:sp>
       <p:sp>
         <p:nvSpPr>
@@ -7365,6 +7522,13 @@
             <a:prstDash val="solid"/>
           </a:ln>
         </p:spPr>
+        <p:txBody>
+          <a:bodyPr/>
+          <a:lstStyle/>
+          <a:p>
+            <a:endParaRPr lang="en-US"/>
+          </a:p>
+        </p:txBody>
       </p:sp>
       <p:sp>
         <p:nvSpPr>
@@ -7387,7 +7551,7 @@
           <a:bodyPr wrap="square" rtlCol="0" anchor="ctr"/>
           <a:lstStyle/>
           <a:p>
-            <a:pPr algn="ctr" indent="0" marL="0">
+            <a:pPr marL="0" indent="0" algn="ctr">
               <a:buNone/>
             </a:pPr>
             <a:r>
@@ -7423,7 +7587,7 @@
           <a:bodyPr wrap="square" rtlCol="0" anchor="ctr"/>
           <a:lstStyle/>
           <a:p>
-            <a:pPr indent="0" marL="0">
+            <a:pPr marL="0" indent="0">
               <a:buNone/>
             </a:pPr>
             <a:r>
@@ -7462,6 +7626,13 @@
             <a:prstDash val="solid"/>
           </a:ln>
         </p:spPr>
+        <p:txBody>
+          <a:bodyPr/>
+          <a:lstStyle/>
+          <a:p>
+            <a:endParaRPr lang="en-US"/>
+          </a:p>
+        </p:txBody>
       </p:sp>
       <p:sp>
         <p:nvSpPr>
@@ -7484,7 +7655,7 @@
           <a:bodyPr wrap="square" lIns="0" tIns="0" rIns="0" bIns="0" rtlCol="0" anchor="ctr"/>
           <a:lstStyle/>
           <a:p>
-            <a:pPr algn="ctr" indent="0" marL="0">
+            <a:pPr marL="0" indent="0" algn="ctr">
               <a:buNone/>
             </a:pPr>
             <a:r>
@@ -7523,6 +7694,13 @@
             <a:prstDash val="solid"/>
           </a:ln>
         </p:spPr>
+        <p:txBody>
+          <a:bodyPr/>
+          <a:lstStyle/>
+          <a:p>
+            <a:endParaRPr lang="en-US"/>
+          </a:p>
+        </p:txBody>
       </p:sp>
       <p:sp>
         <p:nvSpPr>
@@ -7545,7 +7723,7 @@
           <a:bodyPr wrap="square" lIns="0" tIns="0" rIns="0" bIns="0" rtlCol="0" anchor="ctr"/>
           <a:lstStyle/>
           <a:p>
-            <a:pPr algn="ctr" indent="0" marL="0">
+            <a:pPr marL="0" indent="0" algn="ctr">
               <a:buNone/>
             </a:pPr>
             <a:r>
@@ -7584,6 +7762,13 @@
             <a:prstDash val="solid"/>
           </a:ln>
         </p:spPr>
+        <p:txBody>
+          <a:bodyPr/>
+          <a:lstStyle/>
+          <a:p>
+            <a:endParaRPr lang="en-US"/>
+          </a:p>
+        </p:txBody>
       </p:sp>
       <p:sp>
         <p:nvSpPr>
@@ -7606,7 +7791,7 @@
           <a:bodyPr wrap="square" lIns="0" tIns="0" rIns="0" bIns="0" rtlCol="0" anchor="ctr"/>
           <a:lstStyle/>
           <a:p>
-            <a:pPr algn="ctr" indent="0" marL="0">
+            <a:pPr marL="0" indent="0" algn="ctr">
               <a:buNone/>
             </a:pPr>
             <a:r>
@@ -7645,6 +7830,13 @@
             <a:prstDash val="solid"/>
           </a:ln>
         </p:spPr>
+        <p:txBody>
+          <a:bodyPr/>
+          <a:lstStyle/>
+          <a:p>
+            <a:endParaRPr lang="en-US"/>
+          </a:p>
+        </p:txBody>
       </p:sp>
       <p:sp>
         <p:nvSpPr>
@@ -7670,6 +7862,13 @@
             <a:prstDash val="solid"/>
           </a:ln>
         </p:spPr>
+        <p:txBody>
+          <a:bodyPr/>
+          <a:lstStyle/>
+          <a:p>
+            <a:endParaRPr lang="en-US"/>
+          </a:p>
+        </p:txBody>
       </p:sp>
       <p:sp>
         <p:nvSpPr>
@@ -7692,7 +7891,7 @@
           <a:bodyPr wrap="square" rtlCol="0" anchor="ctr"/>
           <a:lstStyle/>
           <a:p>
-            <a:pPr indent="0" marL="0">
+            <a:pPr marL="0" indent="0">
               <a:buNone/>
             </a:pPr>
             <a:r>
@@ -7731,6 +7930,13 @@
             <a:prstDash val="solid"/>
           </a:ln>
         </p:spPr>
+        <p:txBody>
+          <a:bodyPr/>
+          <a:lstStyle/>
+          <a:p>
+            <a:endParaRPr lang="en-US"/>
+          </a:p>
+        </p:txBody>
       </p:sp>
       <p:sp>
         <p:nvSpPr>
@@ -7753,7 +7959,7 @@
           <a:bodyPr wrap="square" rtlCol="0" anchor="ctr"/>
           <a:lstStyle/>
           <a:p>
-            <a:pPr indent="0" marL="0">
+            <a:pPr marL="0" indent="0">
               <a:buNone/>
             </a:pPr>
             <a:r>
@@ -7789,7 +7995,7 @@
           <a:bodyPr wrap="square" rtlCol="0" anchor="ctr"/>
           <a:lstStyle/>
           <a:p>
-            <a:pPr indent="0" marL="0">
+            <a:pPr marL="0" indent="0">
               <a:buNone/>
             </a:pPr>
             <a:r>
@@ -7828,6 +8034,13 @@
             <a:prstDash val="solid"/>
           </a:ln>
         </p:spPr>
+        <p:txBody>
+          <a:bodyPr/>
+          <a:lstStyle/>
+          <a:p>
+            <a:endParaRPr lang="en-US"/>
+          </a:p>
+        </p:txBody>
       </p:sp>
       <p:sp>
         <p:nvSpPr>
@@ -7850,7 +8063,7 @@
           <a:bodyPr wrap="square" rtlCol="0" anchor="ctr"/>
           <a:lstStyle/>
           <a:p>
-            <a:pPr indent="0" marL="0">
+            <a:pPr marL="0" indent="0">
               <a:buNone/>
             </a:pPr>
             <a:r>
@@ -7886,7 +8099,7 @@
           <a:bodyPr wrap="square" rtlCol="0" anchor="ctr"/>
           <a:lstStyle/>
           <a:p>
-            <a:pPr indent="0" marL="0">
+            <a:pPr marL="0" indent="0">
               <a:buNone/>
             </a:pPr>
             <a:r>
@@ -7925,6 +8138,13 @@
             <a:prstDash val="solid"/>
           </a:ln>
         </p:spPr>
+        <p:txBody>
+          <a:bodyPr/>
+          <a:lstStyle/>
+          <a:p>
+            <a:endParaRPr lang="en-US"/>
+          </a:p>
+        </p:txBody>
       </p:sp>
       <p:sp>
         <p:nvSpPr>
@@ -7947,7 +8167,7 @@
           <a:bodyPr wrap="square" rtlCol="0" anchor="ctr"/>
           <a:lstStyle/>
           <a:p>
-            <a:pPr indent="0" marL="0">
+            <a:pPr marL="0" indent="0">
               <a:buNone/>
             </a:pPr>
             <a:r>
@@ -7983,7 +8203,7 @@
           <a:bodyPr wrap="square" rtlCol="0" anchor="ctr"/>
           <a:lstStyle/>
           <a:p>
-            <a:pPr indent="0" marL="0">
+            <a:pPr marL="0" indent="0">
               <a:buNone/>
             </a:pPr>
             <a:r>
@@ -8022,6 +8242,13 @@
             <a:prstDash val="solid"/>
           </a:ln>
         </p:spPr>
+        <p:txBody>
+          <a:bodyPr/>
+          <a:lstStyle/>
+          <a:p>
+            <a:endParaRPr lang="en-US"/>
+          </a:p>
+        </p:txBody>
       </p:sp>
       <p:sp>
         <p:nvSpPr>
@@ -8044,7 +8271,7 @@
           <a:bodyPr wrap="square" rtlCol="0" anchor="ctr"/>
           <a:lstStyle/>
           <a:p>
-            <a:pPr indent="0" marL="0">
+            <a:pPr marL="0" indent="0">
               <a:buNone/>
             </a:pPr>
             <a:r>
@@ -8080,7 +8307,7 @@
           <a:bodyPr wrap="square" rtlCol="0" anchor="ctr"/>
           <a:lstStyle/>
           <a:p>
-            <a:pPr indent="0" marL="0">
+            <a:pPr marL="0" indent="0">
               <a:buNone/>
             </a:pPr>
             <a:r>
@@ -8119,6 +8346,13 @@
             <a:prstDash val="solid"/>
           </a:ln>
         </p:spPr>
+        <p:txBody>
+          <a:bodyPr/>
+          <a:lstStyle/>
+          <a:p>
+            <a:endParaRPr lang="en-US"/>
+          </a:p>
+        </p:txBody>
       </p:sp>
       <p:sp>
         <p:nvSpPr>
@@ -8141,7 +8375,7 @@
           <a:bodyPr wrap="square" rtlCol="0" anchor="ctr"/>
           <a:lstStyle/>
           <a:p>
-            <a:pPr indent="0" marL="0">
+            <a:pPr marL="0" indent="0">
               <a:buNone/>
             </a:pPr>
             <a:r>
@@ -8177,7 +8411,7 @@
           <a:bodyPr wrap="square" rtlCol="0" anchor="ctr"/>
           <a:lstStyle/>
           <a:p>
-            <a:pPr indent="0" marL="0">
+            <a:pPr marL="0" indent="0">
               <a:buNone/>
             </a:pPr>
             <a:r>
@@ -8216,6 +8450,13 @@
             <a:prstDash val="solid"/>
           </a:ln>
         </p:spPr>
+        <p:txBody>
+          <a:bodyPr/>
+          <a:lstStyle/>
+          <a:p>
+            <a:endParaRPr lang="en-US"/>
+          </a:p>
+        </p:txBody>
       </p:sp>
       <p:sp>
         <p:nvSpPr>
@@ -8238,7 +8479,7 @@
           <a:bodyPr wrap="square" rtlCol="0" anchor="ctr"/>
           <a:lstStyle/>
           <a:p>
-            <a:pPr indent="0" marL="0">
+            <a:pPr marL="0" indent="0">
               <a:buNone/>
             </a:pPr>
             <a:r>
@@ -8274,7 +8515,7 @@
           <a:bodyPr wrap="square" rtlCol="0" anchor="ctr"/>
           <a:lstStyle/>
           <a:p>
-            <a:pPr indent="0" marL="0">
+            <a:pPr marL="0" indent="0">
               <a:buNone/>
             </a:pPr>
             <a:r>
@@ -8313,6 +8554,13 @@
             <a:prstDash val="solid"/>
           </a:ln>
         </p:spPr>
+        <p:txBody>
+          <a:bodyPr/>
+          <a:lstStyle/>
+          <a:p>
+            <a:endParaRPr lang="en-US"/>
+          </a:p>
+        </p:txBody>
       </p:sp>
       <p:sp>
         <p:nvSpPr>
@@ -8335,7 +8583,7 @@
           <a:bodyPr wrap="square" rtlCol="0" anchor="ctr"/>
           <a:lstStyle/>
           <a:p>
-            <a:pPr indent="0" marL="0">
+            <a:pPr marL="0" indent="0">
               <a:buNone/>
             </a:pPr>
             <a:r>
@@ -8371,7 +8619,7 @@
           <a:bodyPr wrap="square" rtlCol="0" anchor="ctr"/>
           <a:lstStyle/>
           <a:p>
-            <a:pPr indent="0" marL="0">
+            <a:pPr marL="0" indent="0">
               <a:buNone/>
             </a:pPr>
             <a:r>
@@ -8410,6 +8658,13 @@
             <a:prstDash val="solid"/>
           </a:ln>
         </p:spPr>
+        <p:txBody>
+          <a:bodyPr/>
+          <a:lstStyle/>
+          <a:p>
+            <a:endParaRPr lang="en-US"/>
+          </a:p>
+        </p:txBody>
       </p:sp>
       <p:sp>
         <p:nvSpPr>
@@ -8432,7 +8687,7 @@
           <a:bodyPr wrap="square" lIns="0" tIns="0" rIns="0" bIns="0" rtlCol="0" anchor="ctr"/>
           <a:lstStyle/>
           <a:p>
-            <a:pPr indent="0" marL="0">
+            <a:pPr marL="0" indent="0">
               <a:buNone/>
             </a:pPr>
             <a:r>
@@ -8463,6 +8718,7 @@
         <a:solidFill>
           <a:srgbClr val="1A1A2E"/>
         </a:solidFill>
+        <a:effectLst/>
       </p:bgPr>
     </p:bg>
     <p:spTree>
@@ -8503,6 +8759,13 @@
             <a:prstDash val="solid"/>
           </a:ln>
         </p:spPr>
+        <p:txBody>
+          <a:bodyPr/>
+          <a:lstStyle/>
+          <a:p>
+            <a:endParaRPr lang="en-US"/>
+          </a:p>
+        </p:txBody>
       </p:sp>
       <p:sp>
         <p:nvSpPr>
@@ -8528,6 +8791,13 @@
             <a:prstDash val="solid"/>
           </a:ln>
         </p:spPr>
+        <p:txBody>
+          <a:bodyPr/>
+          <a:lstStyle/>
+          <a:p>
+            <a:endParaRPr lang="en-US"/>
+          </a:p>
+        </p:txBody>
       </p:sp>
       <p:sp>
         <p:nvSpPr>
@@ -8550,7 +8820,7 @@
           <a:bodyPr wrap="square" rtlCol="0" anchor="ctr"/>
           <a:lstStyle/>
           <a:p>
-            <a:pPr algn="ctr" indent="0" marL="0">
+            <a:pPr marL="0" indent="0" algn="ctr">
               <a:buNone/>
             </a:pPr>
             <a:r>
@@ -8586,7 +8856,7 @@
           <a:bodyPr wrap="square" rtlCol="0" anchor="ctr"/>
           <a:lstStyle/>
           <a:p>
-            <a:pPr algn="ctr" indent="0" marL="0">
+            <a:pPr marL="0" indent="0" algn="ctr">
               <a:buNone/>
             </a:pPr>
             <a:r>
@@ -8617,6 +8887,7 @@
         <a:solidFill>
           <a:srgbClr val="F8F9FA"/>
         </a:solidFill>
+        <a:effectLst/>
       </p:bgPr>
     </p:bg>
     <p:spTree>
@@ -8657,6 +8928,13 @@
             <a:prstDash val="solid"/>
           </a:ln>
         </p:spPr>
+        <p:txBody>
+          <a:bodyPr/>
+          <a:lstStyle/>
+          <a:p>
+            <a:endParaRPr lang="en-US"/>
+          </a:p>
+        </p:txBody>
       </p:sp>
       <p:sp>
         <p:nvSpPr>
@@ -8679,7 +8957,7 @@
           <a:bodyPr wrap="square" lIns="0" tIns="0" rIns="0" bIns="0" rtlCol="0" anchor="ctr"/>
           <a:lstStyle/>
           <a:p>
-            <a:pPr indent="0" marL="0">
+            <a:pPr marL="0" indent="0">
               <a:buNone/>
             </a:pPr>
             <a:r>
@@ -8715,7 +8993,7 @@
           <a:bodyPr wrap="square" lIns="0" tIns="0" rIns="0" bIns="0" rtlCol="0" anchor="ctr"/>
           <a:lstStyle/>
           <a:p>
-            <a:pPr algn="ctr" indent="0" marL="0">
+            <a:pPr marL="0" indent="0" algn="ctr">
               <a:buNone/>
             </a:pPr>
             <a:r>
@@ -8754,6 +9032,13 @@
             <a:prstDash val="solid"/>
           </a:ln>
         </p:spPr>
+        <p:txBody>
+          <a:bodyPr/>
+          <a:lstStyle/>
+          <a:p>
+            <a:endParaRPr lang="en-US"/>
+          </a:p>
+        </p:txBody>
       </p:sp>
       <p:sp>
         <p:nvSpPr>
@@ -8779,6 +9064,13 @@
             <a:prstDash val="solid"/>
           </a:ln>
         </p:spPr>
+        <p:txBody>
+          <a:bodyPr/>
+          <a:lstStyle/>
+          <a:p>
+            <a:endParaRPr lang="en-US"/>
+          </a:p>
+        </p:txBody>
       </p:sp>
       <p:sp>
         <p:nvSpPr>
@@ -8801,7 +9093,7 @@
           <a:bodyPr wrap="square" rtlCol="0" anchor="ctr"/>
           <a:lstStyle/>
           <a:p>
-            <a:pPr indent="0" marL="0">
+            <a:pPr marL="0" indent="0">
               <a:buNone/>
             </a:pPr>
             <a:r>
@@ -8838,6 +9130,13 @@
             <a:prstDash val="solid"/>
           </a:ln>
         </p:spPr>
+        <p:txBody>
+          <a:bodyPr/>
+          <a:lstStyle/>
+          <a:p>
+            <a:endParaRPr lang="en-US"/>
+          </a:p>
+        </p:txBody>
       </p:sp>
       <p:sp>
         <p:nvSpPr>
@@ -8860,7 +9159,7 @@
           <a:bodyPr wrap="square" rtlCol="0" anchor="ctr"/>
           <a:lstStyle/>
           <a:p>
-            <a:pPr indent="0" marL="0">
+            <a:pPr marL="0" indent="0">
               <a:buNone/>
             </a:pPr>
             <a:r>
@@ -8899,6 +9198,13 @@
             <a:prstDash val="solid"/>
           </a:ln>
         </p:spPr>
+        <p:txBody>
+          <a:bodyPr/>
+          <a:lstStyle/>
+          <a:p>
+            <a:endParaRPr lang="en-US"/>
+          </a:p>
+        </p:txBody>
       </p:sp>
       <p:sp>
         <p:nvSpPr>
@@ -8924,6 +9230,13 @@
             <a:prstDash val="solid"/>
           </a:ln>
         </p:spPr>
+        <p:txBody>
+          <a:bodyPr/>
+          <a:lstStyle/>
+          <a:p>
+            <a:endParaRPr lang="en-US"/>
+          </a:p>
+        </p:txBody>
       </p:sp>
       <p:sp>
         <p:nvSpPr>
@@ -8946,7 +9259,7 @@
           <a:bodyPr wrap="square" rtlCol="0" anchor="ctr"/>
           <a:lstStyle/>
           <a:p>
-            <a:pPr indent="0" marL="0">
+            <a:pPr marL="0" indent="0">
               <a:buNone/>
             </a:pPr>
             <a:r>
@@ -8983,6 +9296,13 @@
             <a:prstDash val="solid"/>
           </a:ln>
         </p:spPr>
+        <p:txBody>
+          <a:bodyPr/>
+          <a:lstStyle/>
+          <a:p>
+            <a:endParaRPr lang="en-US"/>
+          </a:p>
+        </p:txBody>
       </p:sp>
       <p:sp>
         <p:nvSpPr>
@@ -9005,7 +9325,7 @@
           <a:bodyPr wrap="square" rtlCol="0" anchor="ctr"/>
           <a:lstStyle/>
           <a:p>
-            <a:pPr indent="0" marL="0">
+            <a:pPr marL="0" indent="0">
               <a:buNone/>
             </a:pPr>
             <a:r>
@@ -9044,6 +9364,13 @@
             <a:prstDash val="solid"/>
           </a:ln>
         </p:spPr>
+        <p:txBody>
+          <a:bodyPr/>
+          <a:lstStyle/>
+          <a:p>
+            <a:endParaRPr lang="en-US"/>
+          </a:p>
+        </p:txBody>
       </p:sp>
       <p:sp>
         <p:nvSpPr>
@@ -9069,6 +9396,13 @@
             <a:prstDash val="solid"/>
           </a:ln>
         </p:spPr>
+        <p:txBody>
+          <a:bodyPr/>
+          <a:lstStyle/>
+          <a:p>
+            <a:endParaRPr lang="en-US"/>
+          </a:p>
+        </p:txBody>
       </p:sp>
       <p:sp>
         <p:nvSpPr>
@@ -9091,7 +9425,7 @@
           <a:bodyPr wrap="square" rtlCol="0" anchor="ctr"/>
           <a:lstStyle/>
           <a:p>
-            <a:pPr indent="0" marL="0">
+            <a:pPr marL="0" indent="0">
               <a:buNone/>
             </a:pPr>
             <a:r>
@@ -9128,6 +9462,13 @@
             <a:prstDash val="solid"/>
           </a:ln>
         </p:spPr>
+        <p:txBody>
+          <a:bodyPr/>
+          <a:lstStyle/>
+          <a:p>
+            <a:endParaRPr lang="en-US"/>
+          </a:p>
+        </p:txBody>
       </p:sp>
       <p:sp>
         <p:nvSpPr>
@@ -9150,7 +9491,7 @@
           <a:bodyPr wrap="square" rtlCol="0" anchor="ctr"/>
           <a:lstStyle/>
           <a:p>
-            <a:pPr indent="0" marL="0">
+            <a:pPr marL="0" indent="0">
               <a:buNone/>
             </a:pPr>
             <a:r>
@@ -9189,6 +9530,13 @@
             <a:prstDash val="solid"/>
           </a:ln>
         </p:spPr>
+        <p:txBody>
+          <a:bodyPr/>
+          <a:lstStyle/>
+          <a:p>
+            <a:endParaRPr lang="en-US"/>
+          </a:p>
+        </p:txBody>
       </p:sp>
       <p:sp>
         <p:nvSpPr>
@@ -9214,6 +9562,13 @@
             <a:prstDash val="solid"/>
           </a:ln>
         </p:spPr>
+        <p:txBody>
+          <a:bodyPr/>
+          <a:lstStyle/>
+          <a:p>
+            <a:endParaRPr lang="en-US"/>
+          </a:p>
+        </p:txBody>
       </p:sp>
       <p:sp>
         <p:nvSpPr>
@@ -9236,7 +9591,7 @@
           <a:bodyPr wrap="square" rtlCol="0" anchor="ctr"/>
           <a:lstStyle/>
           <a:p>
-            <a:pPr indent="0" marL="0">
+            <a:pPr marL="0" indent="0">
               <a:buNone/>
             </a:pPr>
             <a:r>
@@ -9273,6 +9628,13 @@
             <a:prstDash val="solid"/>
           </a:ln>
         </p:spPr>
+        <p:txBody>
+          <a:bodyPr/>
+          <a:lstStyle/>
+          <a:p>
+            <a:endParaRPr lang="en-US"/>
+          </a:p>
+        </p:txBody>
       </p:sp>
       <p:sp>
         <p:nvSpPr>
@@ -9295,7 +9657,7 @@
           <a:bodyPr wrap="square" rtlCol="0" anchor="ctr"/>
           <a:lstStyle/>
           <a:p>
-            <a:pPr indent="0" marL="0">
+            <a:pPr marL="0" indent="0">
               <a:buNone/>
             </a:pPr>
             <a:r>
@@ -9334,6 +9696,13 @@
             <a:prstDash val="solid"/>
           </a:ln>
         </p:spPr>
+        <p:txBody>
+          <a:bodyPr/>
+          <a:lstStyle/>
+          <a:p>
+            <a:endParaRPr lang="en-US"/>
+          </a:p>
+        </p:txBody>
       </p:sp>
       <p:sp>
         <p:nvSpPr>
@@ -9359,6 +9728,13 @@
             <a:prstDash val="solid"/>
           </a:ln>
         </p:spPr>
+        <p:txBody>
+          <a:bodyPr/>
+          <a:lstStyle/>
+          <a:p>
+            <a:endParaRPr lang="en-US"/>
+          </a:p>
+        </p:txBody>
       </p:sp>
       <p:sp>
         <p:nvSpPr>
@@ -9381,7 +9757,7 @@
           <a:bodyPr wrap="square" rtlCol="0" anchor="ctr"/>
           <a:lstStyle/>
           <a:p>
-            <a:pPr indent="0" marL="0">
+            <a:pPr marL="0" indent="0">
               <a:buNone/>
             </a:pPr>
             <a:r>
@@ -9418,6 +9794,13 @@
             <a:prstDash val="solid"/>
           </a:ln>
         </p:spPr>
+        <p:txBody>
+          <a:bodyPr/>
+          <a:lstStyle/>
+          <a:p>
+            <a:endParaRPr lang="en-US"/>
+          </a:p>
+        </p:txBody>
       </p:sp>
       <p:sp>
         <p:nvSpPr>
@@ -9440,7 +9823,7 @@
           <a:bodyPr wrap="square" rtlCol="0" anchor="ctr"/>
           <a:lstStyle/>
           <a:p>
-            <a:pPr indent="0" marL="0">
+            <a:pPr marL="0" indent="0">
               <a:buNone/>
             </a:pPr>
             <a:r>
@@ -9479,6 +9862,13 @@
             <a:prstDash val="solid"/>
           </a:ln>
         </p:spPr>
+        <p:txBody>
+          <a:bodyPr/>
+          <a:lstStyle/>
+          <a:p>
+            <a:endParaRPr lang="en-US"/>
+          </a:p>
+        </p:txBody>
       </p:sp>
       <p:sp>
         <p:nvSpPr>
@@ -9504,6 +9894,13 @@
             <a:prstDash val="solid"/>
           </a:ln>
         </p:spPr>
+        <p:txBody>
+          <a:bodyPr/>
+          <a:lstStyle/>
+          <a:p>
+            <a:endParaRPr lang="en-US"/>
+          </a:p>
+        </p:txBody>
       </p:sp>
       <p:sp>
         <p:nvSpPr>
@@ -9526,7 +9923,7 @@
           <a:bodyPr wrap="square" rtlCol="0" anchor="ctr"/>
           <a:lstStyle/>
           <a:p>
-            <a:pPr indent="0" marL="0">
+            <a:pPr marL="0" indent="0">
               <a:buNone/>
             </a:pPr>
             <a:r>
@@ -9563,6 +9960,13 @@
             <a:prstDash val="solid"/>
           </a:ln>
         </p:spPr>
+        <p:txBody>
+          <a:bodyPr/>
+          <a:lstStyle/>
+          <a:p>
+            <a:endParaRPr lang="en-US"/>
+          </a:p>
+        </p:txBody>
       </p:sp>
       <p:sp>
         <p:nvSpPr>
@@ -9585,7 +9989,7 @@
           <a:bodyPr wrap="square" rtlCol="0" anchor="ctr"/>
           <a:lstStyle/>
           <a:p>
-            <a:pPr indent="0" marL="0">
+            <a:pPr marL="0" indent="0">
               <a:buNone/>
             </a:pPr>
             <a:r>
@@ -9624,6 +10028,13 @@
             <a:prstDash val="solid"/>
           </a:ln>
         </p:spPr>
+        <p:txBody>
+          <a:bodyPr/>
+          <a:lstStyle/>
+          <a:p>
+            <a:endParaRPr lang="en-US"/>
+          </a:p>
+        </p:txBody>
       </p:sp>
       <p:sp>
         <p:nvSpPr>
@@ -9649,6 +10060,13 @@
             <a:prstDash val="solid"/>
           </a:ln>
         </p:spPr>
+        <p:txBody>
+          <a:bodyPr/>
+          <a:lstStyle/>
+          <a:p>
+            <a:endParaRPr lang="en-US"/>
+          </a:p>
+        </p:txBody>
       </p:sp>
       <p:sp>
         <p:nvSpPr>
@@ -9671,7 +10089,7 @@
           <a:bodyPr wrap="square" rtlCol="0" anchor="ctr"/>
           <a:lstStyle/>
           <a:p>
-            <a:pPr indent="0" marL="0">
+            <a:pPr marL="0" indent="0">
               <a:buNone/>
             </a:pPr>
             <a:r>
@@ -9708,6 +10126,13 @@
             <a:prstDash val="solid"/>
           </a:ln>
         </p:spPr>
+        <p:txBody>
+          <a:bodyPr/>
+          <a:lstStyle/>
+          <a:p>
+            <a:endParaRPr lang="en-US"/>
+          </a:p>
+        </p:txBody>
       </p:sp>
       <p:sp>
         <p:nvSpPr>
@@ -9730,7 +10155,7 @@
           <a:bodyPr wrap="square" rtlCol="0" anchor="ctr"/>
           <a:lstStyle/>
           <a:p>
-            <a:pPr indent="0" marL="0">
+            <a:pPr marL="0" indent="0">
               <a:buNone/>
             </a:pPr>
             <a:r>
@@ -9769,6 +10194,13 @@
             <a:prstDash val="solid"/>
           </a:ln>
         </p:spPr>
+        <p:txBody>
+          <a:bodyPr/>
+          <a:lstStyle/>
+          <a:p>
+            <a:endParaRPr lang="en-US"/>
+          </a:p>
+        </p:txBody>
       </p:sp>
       <p:sp>
         <p:nvSpPr>
@@ -9794,6 +10226,13 @@
             <a:prstDash val="solid"/>
           </a:ln>
         </p:spPr>
+        <p:txBody>
+          <a:bodyPr/>
+          <a:lstStyle/>
+          <a:p>
+            <a:endParaRPr lang="en-US"/>
+          </a:p>
+        </p:txBody>
       </p:sp>
       <p:sp>
         <p:nvSpPr>
@@ -9816,7 +10255,7 @@
           <a:bodyPr wrap="square" rtlCol="0" anchor="ctr"/>
           <a:lstStyle/>
           <a:p>
-            <a:pPr indent="0" marL="0">
+            <a:pPr marL="0" indent="0">
               <a:buNone/>
             </a:pPr>
             <a:r>
@@ -9853,6 +10292,13 @@
             <a:prstDash val="solid"/>
           </a:ln>
         </p:spPr>
+        <p:txBody>
+          <a:bodyPr/>
+          <a:lstStyle/>
+          <a:p>
+            <a:endParaRPr lang="en-US"/>
+          </a:p>
+        </p:txBody>
       </p:sp>
       <p:sp>
         <p:nvSpPr>
@@ -9875,7 +10321,7 @@
           <a:bodyPr wrap="square" rtlCol="0" anchor="ctr"/>
           <a:lstStyle/>
           <a:p>
-            <a:pPr indent="0" marL="0">
+            <a:pPr marL="0" indent="0">
               <a:buNone/>
             </a:pPr>
             <a:r>
@@ -9906,6 +10352,7 @@
         <a:solidFill>
           <a:srgbClr val="F8F9FA"/>
         </a:solidFill>
+        <a:effectLst/>
       </p:bgPr>
     </p:bg>
     <p:spTree>
@@ -9946,6 +10393,13 @@
             <a:prstDash val="solid"/>
           </a:ln>
         </p:spPr>
+        <p:txBody>
+          <a:bodyPr/>
+          <a:lstStyle/>
+          <a:p>
+            <a:endParaRPr lang="en-US"/>
+          </a:p>
+        </p:txBody>
       </p:sp>
       <p:sp>
         <p:nvSpPr>
@@ -9968,7 +10422,7 @@
           <a:bodyPr wrap="square" lIns="0" tIns="0" rIns="0" bIns="0" rtlCol="0" anchor="ctr"/>
           <a:lstStyle/>
           <a:p>
-            <a:pPr indent="0" marL="0">
+            <a:pPr marL="0" indent="0">
               <a:buNone/>
             </a:pPr>
             <a:r>
@@ -10004,7 +10458,7 @@
           <a:bodyPr wrap="square" lIns="0" tIns="0" rIns="0" bIns="0" rtlCol="0" anchor="ctr"/>
           <a:lstStyle/>
           <a:p>
-            <a:pPr algn="ctr" indent="0" marL="0">
+            <a:pPr marL="0" indent="0" algn="ctr">
               <a:buNone/>
             </a:pPr>
             <a:r>
@@ -10043,6 +10497,13 @@
             <a:prstDash val="solid"/>
           </a:ln>
         </p:spPr>
+        <p:txBody>
+          <a:bodyPr/>
+          <a:lstStyle/>
+          <a:p>
+            <a:endParaRPr lang="en-US"/>
+          </a:p>
+        </p:txBody>
       </p:sp>
       <p:sp>
         <p:nvSpPr>
@@ -10065,7 +10526,7 @@
           <a:bodyPr wrap="square" lIns="0" tIns="0" rIns="0" bIns="0" rtlCol="0" anchor="ctr"/>
           <a:lstStyle/>
           <a:p>
-            <a:pPr algn="ctr" indent="0" marL="0">
+            <a:pPr marL="0" indent="0" algn="ctr">
               <a:buNone/>
             </a:pPr>
             <a:r>
@@ -10101,7 +10562,7 @@
           <a:bodyPr wrap="square" rtlCol="0" anchor="ctr"/>
           <a:lstStyle/>
           <a:p>
-            <a:pPr indent="0" marL="0">
+            <a:pPr marL="0" indent="0">
               <a:buNone/>
             </a:pPr>
             <a:r>
@@ -10140,6 +10601,13 @@
             <a:prstDash val="solid"/>
           </a:ln>
         </p:spPr>
+        <p:txBody>
+          <a:bodyPr/>
+          <a:lstStyle/>
+          <a:p>
+            <a:endParaRPr lang="en-US"/>
+          </a:p>
+        </p:txBody>
       </p:sp>
       <p:sp>
         <p:nvSpPr>
@@ -10162,7 +10630,7 @@
           <a:bodyPr wrap="square" lIns="0" tIns="0" rIns="0" bIns="0" rtlCol="0" anchor="ctr"/>
           <a:lstStyle/>
           <a:p>
-            <a:pPr algn="ctr" indent="0" marL="0">
+            <a:pPr marL="0" indent="0" algn="ctr">
               <a:buNone/>
             </a:pPr>
             <a:r>
@@ -10198,7 +10666,7 @@
           <a:bodyPr wrap="square" rtlCol="0" anchor="ctr"/>
           <a:lstStyle/>
           <a:p>
-            <a:pPr indent="0" marL="0">
+            <a:pPr marL="0" indent="0">
               <a:buNone/>
             </a:pPr>
             <a:r>
@@ -10237,6 +10705,13 @@
             <a:prstDash val="solid"/>
           </a:ln>
         </p:spPr>
+        <p:txBody>
+          <a:bodyPr/>
+          <a:lstStyle/>
+          <a:p>
+            <a:endParaRPr lang="en-US"/>
+          </a:p>
+        </p:txBody>
       </p:sp>
       <p:sp>
         <p:nvSpPr>
@@ -10259,7 +10734,7 @@
           <a:bodyPr wrap="square" lIns="0" tIns="0" rIns="0" bIns="0" rtlCol="0" anchor="ctr"/>
           <a:lstStyle/>
           <a:p>
-            <a:pPr algn="ctr" indent="0" marL="0">
+            <a:pPr marL="0" indent="0" algn="ctr">
               <a:buNone/>
             </a:pPr>
             <a:r>
@@ -10295,7 +10770,7 @@
           <a:bodyPr wrap="square" rtlCol="0" anchor="ctr"/>
           <a:lstStyle/>
           <a:p>
-            <a:pPr indent="0" marL="0">
+            <a:pPr marL="0" indent="0">
               <a:buNone/>
             </a:pPr>
             <a:r>
@@ -10334,6 +10809,13 @@
             <a:prstDash val="solid"/>
           </a:ln>
         </p:spPr>
+        <p:txBody>
+          <a:bodyPr/>
+          <a:lstStyle/>
+          <a:p>
+            <a:endParaRPr lang="en-US"/>
+          </a:p>
+        </p:txBody>
       </p:sp>
       <p:sp>
         <p:nvSpPr>
@@ -10356,7 +10838,7 @@
           <a:bodyPr wrap="square" lIns="0" tIns="0" rIns="0" bIns="0" rtlCol="0" anchor="ctr"/>
           <a:lstStyle/>
           <a:p>
-            <a:pPr algn="ctr" indent="0" marL="0">
+            <a:pPr marL="0" indent="0" algn="ctr">
               <a:buNone/>
             </a:pPr>
             <a:r>
@@ -10392,7 +10874,7 @@
           <a:bodyPr wrap="square" rtlCol="0" anchor="ctr"/>
           <a:lstStyle/>
           <a:p>
-            <a:pPr indent="0" marL="0">
+            <a:pPr marL="0" indent="0">
               <a:buNone/>
             </a:pPr>
             <a:r>
@@ -10431,6 +10913,13 @@
             <a:prstDash val="solid"/>
           </a:ln>
         </p:spPr>
+        <p:txBody>
+          <a:bodyPr/>
+          <a:lstStyle/>
+          <a:p>
+            <a:endParaRPr lang="en-US"/>
+          </a:p>
+        </p:txBody>
       </p:sp>
       <p:sp>
         <p:nvSpPr>
@@ -10453,7 +10942,7 @@
           <a:bodyPr wrap="square" lIns="0" tIns="0" rIns="0" bIns="0" rtlCol="0" anchor="ctr"/>
           <a:lstStyle/>
           <a:p>
-            <a:pPr algn="ctr" indent="0" marL="0">
+            <a:pPr marL="0" indent="0" algn="ctr">
               <a:buNone/>
             </a:pPr>
             <a:r>
@@ -10489,7 +10978,7 @@
           <a:bodyPr wrap="square" rtlCol="0" anchor="ctr"/>
           <a:lstStyle/>
           <a:p>
-            <a:pPr indent="0" marL="0">
+            <a:pPr marL="0" indent="0">
               <a:buNone/>
             </a:pPr>
             <a:r>
@@ -10520,6 +11009,7 @@
         <a:solidFill>
           <a:srgbClr val="F8F9FA"/>
         </a:solidFill>
+        <a:effectLst/>
       </p:bgPr>
     </p:bg>
     <p:spTree>
@@ -10560,6 +11050,13 @@
             <a:prstDash val="solid"/>
           </a:ln>
         </p:spPr>
+        <p:txBody>
+          <a:bodyPr/>
+          <a:lstStyle/>
+          <a:p>
+            <a:endParaRPr lang="en-US"/>
+          </a:p>
+        </p:txBody>
       </p:sp>
       <p:sp>
         <p:nvSpPr>
@@ -10582,7 +11079,7 @@
           <a:bodyPr wrap="square" lIns="0" tIns="0" rIns="0" bIns="0" rtlCol="0" anchor="ctr"/>
           <a:lstStyle/>
           <a:p>
-            <a:pPr indent="0" marL="0">
+            <a:pPr marL="0" indent="0">
               <a:buNone/>
             </a:pPr>
             <a:r>
@@ -10618,7 +11115,7 @@
           <a:bodyPr wrap="square" lIns="0" tIns="0" rIns="0" bIns="0" rtlCol="0" anchor="ctr"/>
           <a:lstStyle/>
           <a:p>
-            <a:pPr algn="ctr" indent="0" marL="0">
+            <a:pPr marL="0" indent="0" algn="ctr">
               <a:buNone/>
             </a:pPr>
             <a:r>
@@ -10657,13 +11154,20 @@
             <a:prstDash val="solid"/>
           </a:ln>
           <a:effectLst>
-            <a:outerShdw sx="100000" sy="100000" kx="0" ky="0" algn="bl" rotWithShape="0" blurRad="101600" dist="25400" dir="8100000">
+            <a:outerShdw blurRad="101600" dist="25400" dir="8100000" algn="bl" rotWithShape="0">
               <a:srgbClr val="000000">
                 <a:alpha val="10000"/>
               </a:srgbClr>
             </a:outerShdw>
           </a:effectLst>
         </p:spPr>
+        <p:txBody>
+          <a:bodyPr/>
+          <a:lstStyle/>
+          <a:p>
+            <a:endParaRPr lang="en-US"/>
+          </a:p>
+        </p:txBody>
       </p:sp>
       <p:sp>
         <p:nvSpPr>
@@ -10689,6 +11193,13 @@
             <a:prstDash val="solid"/>
           </a:ln>
         </p:spPr>
+        <p:txBody>
+          <a:bodyPr/>
+          <a:lstStyle/>
+          <a:p>
+            <a:endParaRPr lang="en-US"/>
+          </a:p>
+        </p:txBody>
       </p:sp>
       <p:sp>
         <p:nvSpPr>
@@ -10711,7 +11222,7 @@
           <a:bodyPr wrap="square" rtlCol="0" anchor="ctr"/>
           <a:lstStyle/>
           <a:p>
-            <a:pPr indent="0" marL="0">
+            <a:pPr marL="0" indent="0">
               <a:buNone/>
             </a:pPr>
             <a:r>
@@ -10747,7 +11258,7 @@
           <a:bodyPr wrap="square" rtlCol="0" anchor="ctr"/>
           <a:lstStyle/>
           <a:p>
-            <a:pPr indent="0" marL="0">
+            <a:pPr marL="0" indent="0">
               <a:buNone/>
             </a:pPr>
             <a:r>
@@ -10755,6 +11266,7 @@
                 <a:solidFill>
                   <a:srgbClr val="3B82F6"/>
                 </a:solidFill>
+                <a:hlinkClick r:id="rId3"/>
               </a:rPr>
               <a:t>docs.aws.amazon.com/step-functions/</a:t>
             </a:r>
@@ -10786,13 +11298,20 @@
             <a:prstDash val="solid"/>
           </a:ln>
           <a:effectLst>
-            <a:outerShdw sx="100000" sy="100000" kx="0" ky="0" algn="bl" rotWithShape="0" blurRad="101600" dist="25400" dir="8100000">
+            <a:outerShdw blurRad="101600" dist="25400" dir="8100000" algn="bl" rotWithShape="0">
               <a:srgbClr val="000000">
                 <a:alpha val="10000"/>
               </a:srgbClr>
             </a:outerShdw>
           </a:effectLst>
         </p:spPr>
+        <p:txBody>
+          <a:bodyPr/>
+          <a:lstStyle/>
+          <a:p>
+            <a:endParaRPr lang="en-US"/>
+          </a:p>
+        </p:txBody>
       </p:sp>
       <p:sp>
         <p:nvSpPr>
@@ -10818,6 +11337,13 @@
             <a:prstDash val="solid"/>
           </a:ln>
         </p:spPr>
+        <p:txBody>
+          <a:bodyPr/>
+          <a:lstStyle/>
+          <a:p>
+            <a:endParaRPr lang="en-US"/>
+          </a:p>
+        </p:txBody>
       </p:sp>
       <p:sp>
         <p:nvSpPr>
@@ -10840,7 +11366,7 @@
           <a:bodyPr wrap="square" rtlCol="0" anchor="ctr"/>
           <a:lstStyle/>
           <a:p>
-            <a:pPr indent="0" marL="0">
+            <a:pPr marL="0" indent="0">
               <a:buNone/>
             </a:pPr>
             <a:r>
@@ -10876,7 +11402,7 @@
           <a:bodyPr wrap="square" rtlCol="0" anchor="ctr"/>
           <a:lstStyle/>
           <a:p>
-            <a:pPr indent="0" marL="0">
+            <a:pPr marL="0" indent="0">
               <a:buNone/>
             </a:pPr>
             <a:r>
@@ -10884,6 +11410,7 @@
                 <a:solidFill>
                   <a:srgbClr val="3B82F6"/>
                 </a:solidFill>
+                <a:hlinkClick r:id="rId4"/>
               </a:rPr>
               <a:t>docs.aws.amazon.com/cdk/api/v2/docs/aws-cdk-lib.aws_stepfunctions-readme.html</a:t>
             </a:r>
@@ -10915,13 +11442,20 @@
             <a:prstDash val="solid"/>
           </a:ln>
           <a:effectLst>
-            <a:outerShdw sx="100000" sy="100000" kx="0" ky="0" algn="bl" rotWithShape="0" blurRad="101600" dist="25400" dir="8100000">
+            <a:outerShdw blurRad="101600" dist="25400" dir="8100000" algn="bl" rotWithShape="0">
               <a:srgbClr val="000000">
                 <a:alpha val="10000"/>
               </a:srgbClr>
             </a:outerShdw>
           </a:effectLst>
         </p:spPr>
+        <p:txBody>
+          <a:bodyPr/>
+          <a:lstStyle/>
+          <a:p>
+            <a:endParaRPr lang="en-US"/>
+          </a:p>
+        </p:txBody>
       </p:sp>
       <p:sp>
         <p:nvSpPr>
@@ -10947,6 +11481,13 @@
             <a:prstDash val="solid"/>
           </a:ln>
         </p:spPr>
+        <p:txBody>
+          <a:bodyPr/>
+          <a:lstStyle/>
+          <a:p>
+            <a:endParaRPr lang="en-US"/>
+          </a:p>
+        </p:txBody>
       </p:sp>
       <p:sp>
         <p:nvSpPr>
@@ -10969,7 +11510,7 @@
           <a:bodyPr wrap="square" rtlCol="0" anchor="ctr"/>
           <a:lstStyle/>
           <a:p>
-            <a:pPr indent="0" marL="0">
+            <a:pPr marL="0" indent="0">
               <a:buNone/>
             </a:pPr>
             <a:r>
@@ -11005,7 +11546,7 @@
           <a:bodyPr wrap="square" rtlCol="0" anchor="ctr"/>
           <a:lstStyle/>
           <a:p>
-            <a:pPr indent="0" marL="0">
+            <a:pPr marL="0" indent="0">
               <a:buNone/>
             </a:pPr>
             <a:r>
@@ -11013,6 +11554,7 @@
                 <a:solidFill>
                   <a:srgbClr val="3B82F6"/>
                 </a:solidFill>
+                <a:hlinkClick r:id="rId5"/>
               </a:rPr>
               <a:t>states-language.net/spec.html</a:t>
             </a:r>
@@ -11044,13 +11586,20 @@
             <a:prstDash val="solid"/>
           </a:ln>
           <a:effectLst>
-            <a:outerShdw sx="100000" sy="100000" kx="0" ky="0" algn="bl" rotWithShape="0" blurRad="101600" dist="25400" dir="8100000">
+            <a:outerShdw blurRad="101600" dist="25400" dir="8100000" algn="bl" rotWithShape="0">
               <a:srgbClr val="000000">
                 <a:alpha val="10000"/>
               </a:srgbClr>
             </a:outerShdw>
           </a:effectLst>
         </p:spPr>
+        <p:txBody>
+          <a:bodyPr/>
+          <a:lstStyle/>
+          <a:p>
+            <a:endParaRPr lang="en-US"/>
+          </a:p>
+        </p:txBody>
       </p:sp>
       <p:sp>
         <p:nvSpPr>
@@ -11076,6 +11625,13 @@
             <a:prstDash val="solid"/>
           </a:ln>
         </p:spPr>
+        <p:txBody>
+          <a:bodyPr/>
+          <a:lstStyle/>
+          <a:p>
+            <a:endParaRPr lang="en-US"/>
+          </a:p>
+        </p:txBody>
       </p:sp>
       <p:sp>
         <p:nvSpPr>
@@ -11098,7 +11654,7 @@
           <a:bodyPr wrap="square" rtlCol="0" anchor="ctr"/>
           <a:lstStyle/>
           <a:p>
-            <a:pPr indent="0" marL="0">
+            <a:pPr marL="0" indent="0">
               <a:buNone/>
             </a:pPr>
             <a:r>
@@ -11134,7 +11690,7 @@
           <a:bodyPr wrap="square" rtlCol="0" anchor="ctr"/>
           <a:lstStyle/>
           <a:p>
-            <a:pPr indent="0" marL="0">
+            <a:pPr marL="0" indent="0">
               <a:buNone/>
             </a:pPr>
             <a:r>
@@ -11142,6 +11698,7 @@
                 <a:solidFill>
                   <a:srgbClr val="3B82F6"/>
                 </a:solidFill>
+                <a:hlinkClick r:id="rId6"/>
               </a:rPr>
               <a:t>catalog.workshops.aws/stepfunctions/</a:t>
             </a:r>
@@ -11173,13 +11730,20 @@
             <a:prstDash val="solid"/>
           </a:ln>
           <a:effectLst>
-            <a:outerShdw sx="100000" sy="100000" kx="0" ky="0" algn="bl" rotWithShape="0" blurRad="101600" dist="25400" dir="8100000">
+            <a:outerShdw blurRad="101600" dist="25400" dir="8100000" algn="bl" rotWithShape="0">
               <a:srgbClr val="000000">
                 <a:alpha val="10000"/>
               </a:srgbClr>
             </a:outerShdw>
           </a:effectLst>
         </p:spPr>
+        <p:txBody>
+          <a:bodyPr/>
+          <a:lstStyle/>
+          <a:p>
+            <a:endParaRPr lang="en-US"/>
+          </a:p>
+        </p:txBody>
       </p:sp>
       <p:sp>
         <p:nvSpPr>
@@ -11205,6 +11769,13 @@
             <a:prstDash val="solid"/>
           </a:ln>
         </p:spPr>
+        <p:txBody>
+          <a:bodyPr/>
+          <a:lstStyle/>
+          <a:p>
+            <a:endParaRPr lang="en-US"/>
+          </a:p>
+        </p:txBody>
       </p:sp>
       <p:sp>
         <p:nvSpPr>
@@ -11227,7 +11798,7 @@
           <a:bodyPr wrap="square" rtlCol="0" anchor="ctr"/>
           <a:lstStyle/>
           <a:p>
-            <a:pPr indent="0" marL="0">
+            <a:pPr marL="0" indent="0">
               <a:buNone/>
             </a:pPr>
             <a:r>
@@ -11263,7 +11834,7 @@
           <a:bodyPr wrap="square" rtlCol="0" anchor="ctr"/>
           <a:lstStyle/>
           <a:p>
-            <a:pPr indent="0" marL="0">
+            <a:pPr marL="0" indent="0">
               <a:buNone/>
             </a:pPr>
             <a:r>
@@ -11271,85 +11842,15 @@
                 <a:solidFill>
                   <a:srgbClr val="3B82F6"/>
                 </a:solidFill>
-              </a:rPr>
-              <a:t>github.com/budoudoh/aws-step-snooze-protocol</a:t>
-            </a:r>
-            <a:endParaRPr lang="en-US" sz="1000" dirty="0"/>
-          </a:p>
-        </p:txBody>
-      </p:sp>
-      <p:sp>
-        <p:nvSpPr>
-          <p:cNvPr id="25" name="Shape 23"/>
-          <p:cNvSpPr/>
-          <p:nvPr/>
-        </p:nvSpPr>
-        <p:spPr>
-          <a:xfrm>
-            <a:off x="7635240" y="841248"/>
-            <a:ext cx="1325880" cy="1325880"/>
-          </a:xfrm>
-          <a:prstGeom prst="rect">
-            <a:avLst/>
-          </a:prstGeom>
-          <a:solidFill>
-            <a:srgbClr val="1A1A2E"/>
-          </a:solidFill>
-          <a:ln w="38100">
-            <a:solidFill>
-              <a:srgbClr val="F5A623"/>
-            </a:solidFill>
-            <a:prstDash val="solid"/>
-          </a:ln>
-        </p:spPr>
-      </p:sp>
-      <p:sp>
-        <p:nvSpPr>
-          <p:cNvPr id="26" name="Text 24"/>
-          <p:cNvSpPr/>
-          <p:nvPr/>
-        </p:nvSpPr>
-        <p:spPr>
-          <a:xfrm>
-            <a:off x="7635240" y="841248"/>
-            <a:ext cx="1325880" cy="1325880"/>
-          </a:xfrm>
-          <a:prstGeom prst="rect">
-            <a:avLst/>
-          </a:prstGeom>
-          <a:noFill/>
-          <a:ln/>
-        </p:spPr>
-        <p:txBody>
-          <a:bodyPr wrap="square" rtlCol="0" anchor="ctr"/>
-          <a:lstStyle/>
-          <a:p>
-            <a:pPr algn="ctr" indent="0" marL="0">
-              <a:buNone/>
-            </a:pPr>
-            <a:r>
-              <a:rPr lang="en-US" sz="1600" b="1" dirty="0">
-                <a:solidFill>
-                  <a:srgbClr val="F5A623"/>
-                </a:solidFill>
-              </a:rPr>
-              <a:t>QR</a:t>
-            </a:r>
-            <a:endParaRPr lang="en-US" sz="1600" dirty="0"/>
-          </a:p>
-          <a:p>
-            <a:pPr algn="ctr" indent="0" marL="0">
-              <a:buNone/>
-            </a:pPr>
-            <a:r>
-              <a:rPr lang="en-US" sz="1600" b="1" dirty="0">
-                <a:solidFill>
-                  <a:srgbClr val="F5A623"/>
-                </a:solidFill>
-              </a:rPr>
-              <a:t>Code</a:t>
-            </a:r>
-            <a:endParaRPr lang="en-US" sz="1600" dirty="0"/>
+                <a:hlinkClick r:id="rId7"/>
+              </a:rPr>
+              <a:t>github.com/budoudoh/aws-step-function-demo</a:t>
+            </a:r>
+            <a:endParaRPr lang="en-US" sz="1000" i="1" dirty="0">
+              <a:solidFill>
+                <a:srgbClr val="3B82F6"/>
+              </a:solidFill>
+            </a:endParaRPr>
           </a:p>
         </p:txBody>
       </p:sp>
@@ -11374,7 +11875,7 @@
           <a:bodyPr wrap="square" rtlCol="0" anchor="ctr"/>
           <a:lstStyle/>
           <a:p>
-            <a:pPr algn="ctr" indent="0" marL="0">
+            <a:pPr marL="0" indent="0" algn="ctr">
               <a:buNone/>
             </a:pPr>
             <a:r>
@@ -11389,7 +11890,42 @@
           </a:p>
         </p:txBody>
       </p:sp>
+      <p:pic>
+        <p:nvPicPr>
+          <p:cNvPr id="29" name="Picture 28">
+            <a:extLst>
+              <a:ext uri="{FF2B5EF4-FFF2-40B4-BE49-F238E27FC236}">
+                <a16:creationId xmlns:a16="http://schemas.microsoft.com/office/drawing/2014/main" id="{5ADD3EDF-CABF-5A77-35C8-D94E0A776F02}"/>
+              </a:ext>
+            </a:extLst>
+          </p:cNvPr>
+          <p:cNvPicPr>
+            <a:picLocks/>
+          </p:cNvPicPr>
+          <p:nvPr/>
+        </p:nvPicPr>
+        <p:blipFill>
+          <a:blip r:embed="rId8"/>
+          <a:stretch>
+            <a:fillRect/>
+          </a:stretch>
+        </p:blipFill>
+        <p:spPr>
+          <a:xfrm>
+            <a:off x="7632700" y="838200"/>
+            <a:ext cx="1320800" cy="1320800"/>
+          </a:xfrm>
+          <a:prstGeom prst="rect">
+            <a:avLst/>
+          </a:prstGeom>
+        </p:spPr>
+      </p:pic>
     </p:spTree>
+    <p:extLst>
+      <p:ext uri="{BB962C8B-B14F-4D97-AF65-F5344CB8AC3E}">
+        <p14:creationId xmlns:p14="http://schemas.microsoft.com/office/powerpoint/2010/main" val="3061827952"/>
+      </p:ext>
+    </p:extLst>
   </p:cSld>
   <p:clrMapOvr>
     <a:masterClrMapping/>
@@ -11405,6 +11941,7 @@
         <a:solidFill>
           <a:srgbClr val="1A1A2E"/>
         </a:solidFill>
+        <a:effectLst/>
       </p:bgPr>
     </p:bg>
     <p:spTree>
@@ -11445,6 +11982,13 @@
             <a:prstDash val="solid"/>
           </a:ln>
         </p:spPr>
+        <p:txBody>
+          <a:bodyPr/>
+          <a:lstStyle/>
+          <a:p>
+            <a:endParaRPr lang="en-US"/>
+          </a:p>
+        </p:txBody>
       </p:sp>
       <p:sp>
         <p:nvSpPr>
@@ -11470,6 +12014,13 @@
             <a:prstDash val="solid"/>
           </a:ln>
         </p:spPr>
+        <p:txBody>
+          <a:bodyPr/>
+          <a:lstStyle/>
+          <a:p>
+            <a:endParaRPr lang="en-US"/>
+          </a:p>
+        </p:txBody>
       </p:sp>
       <p:sp>
         <p:nvSpPr>
@@ -11492,7 +12043,7 @@
           <a:bodyPr wrap="square" rtlCol="0" anchor="ctr"/>
           <a:lstStyle/>
           <a:p>
-            <a:pPr algn="ctr" indent="0" marL="0">
+            <a:pPr marL="0" indent="0" algn="ctr">
               <a:buNone/>
             </a:pPr>
             <a:r>
@@ -11531,6 +12082,13 @@
             <a:prstDash val="solid"/>
           </a:ln>
         </p:spPr>
+        <p:txBody>
+          <a:bodyPr/>
+          <a:lstStyle/>
+          <a:p>
+            <a:endParaRPr lang="en-US"/>
+          </a:p>
+        </p:txBody>
       </p:sp>
       <p:sp>
         <p:nvSpPr>
@@ -11553,7 +12111,7 @@
           <a:bodyPr wrap="square" lIns="0" tIns="0" rIns="0" bIns="0" rtlCol="0" anchor="ctr"/>
           <a:lstStyle/>
           <a:p>
-            <a:pPr algn="ctr" indent="0" marL="0">
+            <a:pPr marL="0" indent="0" algn="ctr">
               <a:buNone/>
             </a:pPr>
             <a:r>
@@ -11589,7 +12147,7 @@
           <a:bodyPr wrap="square" rtlCol="0" anchor="ctr"/>
           <a:lstStyle/>
           <a:p>
-            <a:pPr algn="ctr" indent="0" marL="0">
+            <a:pPr marL="0" indent="0" algn="ctr">
               <a:buNone/>
             </a:pPr>
             <a:r>
@@ -11628,6 +12186,13 @@
             <a:prstDash val="solid"/>
           </a:ln>
         </p:spPr>
+        <p:txBody>
+          <a:bodyPr/>
+          <a:lstStyle/>
+          <a:p>
+            <a:endParaRPr lang="en-US"/>
+          </a:p>
+        </p:txBody>
       </p:sp>
       <p:sp>
         <p:nvSpPr>
@@ -11650,7 +12215,7 @@
           <a:bodyPr wrap="square" lIns="0" tIns="0" rIns="0" bIns="0" rtlCol="0" anchor="ctr"/>
           <a:lstStyle/>
           <a:p>
-            <a:pPr algn="ctr" indent="0" marL="0">
+            <a:pPr marL="0" indent="0" algn="ctr">
               <a:buNone/>
             </a:pPr>
             <a:r>
@@ -11686,7 +12251,7 @@
           <a:bodyPr wrap="square" rtlCol="0" anchor="ctr"/>
           <a:lstStyle/>
           <a:p>
-            <a:pPr algn="ctr" indent="0" marL="0">
+            <a:pPr marL="0" indent="0" algn="ctr">
               <a:buNone/>
             </a:pPr>
             <a:r>
@@ -11725,6 +12290,13 @@
             <a:prstDash val="solid"/>
           </a:ln>
         </p:spPr>
+        <p:txBody>
+          <a:bodyPr/>
+          <a:lstStyle/>
+          <a:p>
+            <a:endParaRPr lang="en-US"/>
+          </a:p>
+        </p:txBody>
       </p:sp>
       <p:sp>
         <p:nvSpPr>
@@ -11747,7 +12319,7 @@
           <a:bodyPr wrap="square" lIns="0" tIns="0" rIns="0" bIns="0" rtlCol="0" anchor="ctr"/>
           <a:lstStyle/>
           <a:p>
-            <a:pPr algn="ctr" indent="0" marL="0">
+            <a:pPr marL="0" indent="0" algn="ctr">
               <a:buNone/>
             </a:pPr>
             <a:r>
@@ -11783,7 +12355,7 @@
           <a:bodyPr wrap="square" rtlCol="0" anchor="ctr"/>
           <a:lstStyle/>
           <a:p>
-            <a:pPr algn="ctr" indent="0" marL="0">
+            <a:pPr marL="0" indent="0" algn="ctr">
               <a:buNone/>
             </a:pPr>
             <a:r>
@@ -11822,6 +12394,13 @@
             <a:prstDash val="solid"/>
           </a:ln>
         </p:spPr>
+        <p:txBody>
+          <a:bodyPr/>
+          <a:lstStyle/>
+          <a:p>
+            <a:endParaRPr lang="en-US"/>
+          </a:p>
+        </p:txBody>
       </p:sp>
       <p:sp>
         <p:nvSpPr>
@@ -11844,7 +12423,7 @@
           <a:bodyPr wrap="square" lIns="0" tIns="0" rIns="0" bIns="0" rtlCol="0" anchor="ctr"/>
           <a:lstStyle/>
           <a:p>
-            <a:pPr algn="ctr" indent="0" marL="0">
+            <a:pPr marL="0" indent="0" algn="ctr">
               <a:buNone/>
             </a:pPr>
             <a:r>
@@ -11880,7 +12459,7 @@
           <a:bodyPr wrap="square" rtlCol="0" anchor="ctr"/>
           <a:lstStyle/>
           <a:p>
-            <a:pPr algn="ctr" indent="0" marL="0">
+            <a:pPr marL="0" indent="0" algn="ctr">
               <a:buNone/>
             </a:pPr>
             <a:r>
@@ -11917,6 +12496,13 @@
             <a:prstDash val="solid"/>
           </a:ln>
         </p:spPr>
+        <p:txBody>
+          <a:bodyPr/>
+          <a:lstStyle/>
+          <a:p>
+            <a:endParaRPr lang="en-US"/>
+          </a:p>
+        </p:txBody>
       </p:sp>
       <p:sp>
         <p:nvSpPr>
@@ -11939,7 +12525,7 @@
           <a:bodyPr wrap="square" rtlCol="0" anchor="ctr"/>
           <a:lstStyle/>
           <a:p>
-            <a:pPr algn="ctr" indent="0" marL="0">
+            <a:pPr marL="0" indent="0" algn="ctr">
               <a:buNone/>
             </a:pPr>
             <a:r>
@@ -11975,7 +12561,7 @@
           <a:bodyPr wrap="square" rtlCol="0" anchor="ctr"/>
           <a:lstStyle/>
           <a:p>
-            <a:pPr algn="ctr" indent="0" marL="0">
+            <a:pPr marL="0" indent="0" algn="ctr">
               <a:buNone/>
             </a:pPr>
             <a:r>
@@ -12011,7 +12597,7 @@
           <a:bodyPr wrap="square" rtlCol="0" anchor="ctr"/>
           <a:lstStyle/>
           <a:p>
-            <a:pPr algn="ctr" indent="0" marL="0">
+            <a:pPr marL="0" indent="0" algn="ctr">
               <a:buNone/>
             </a:pPr>
             <a:r>
@@ -12042,6 +12628,7 @@
         <a:solidFill>
           <a:srgbClr val="F8F9FA"/>
         </a:solidFill>
+        <a:effectLst/>
       </p:bgPr>
     </p:bg>
     <p:spTree>
@@ -12082,6 +12669,13 @@
             <a:prstDash val="solid"/>
           </a:ln>
         </p:spPr>
+        <p:txBody>
+          <a:bodyPr/>
+          <a:lstStyle/>
+          <a:p>
+            <a:endParaRPr lang="en-US"/>
+          </a:p>
+        </p:txBody>
       </p:sp>
       <p:sp>
         <p:nvSpPr>
@@ -12104,7 +12698,7 @@
           <a:bodyPr wrap="square" lIns="0" tIns="0" rIns="0" bIns="0" rtlCol="0" anchor="ctr"/>
           <a:lstStyle/>
           <a:p>
-            <a:pPr indent="0" marL="0">
+            <a:pPr marL="0" indent="0">
               <a:buNone/>
             </a:pPr>
             <a:r>
@@ -12140,7 +12734,7 @@
           <a:bodyPr wrap="square" lIns="0" tIns="0" rIns="0" bIns="0" rtlCol="0" anchor="ctr"/>
           <a:lstStyle/>
           <a:p>
-            <a:pPr algn="ctr" indent="0" marL="0">
+            <a:pPr marL="0" indent="0" algn="ctr">
               <a:buNone/>
             </a:pPr>
             <a:r>
@@ -12176,7 +12770,7 @@
           <a:bodyPr wrap="square" rtlCol="0" anchor="ctr"/>
           <a:lstStyle/>
           <a:p>
-            <a:pPr indent="0" marL="0">
+            <a:pPr marL="0" indent="0">
               <a:buNone/>
             </a:pPr>
             <a:r>
@@ -12212,7 +12806,7 @@
           <a:bodyPr wrap="square" rtlCol="0" anchor="t"/>
           <a:lstStyle/>
           <a:p>
-            <a:pPr indent="0" marL="0">
+            <a:pPr marL="0" indent="0">
               <a:buNone/>
             </a:pPr>
             <a:r>
@@ -12221,7 +12815,7 @@
                   <a:srgbClr val="1E293B"/>
                 </a:solidFill>
               </a:rPr>
-              <a:t>☁️  Cloud GTM Lead at Slalom — helping enterprises modernize on AWS</a:t>
+              <a:t>☁️  Cloud/Software GTM Lead at Slalom — helping enterprises migrate and modernize on the cloud (AWS, GCP, and Azure)</a:t>
             </a:r>
             <a:endParaRPr lang="en-US" sz="1300" dirty="0"/>
           </a:p>
@@ -12248,7 +12842,7 @@
           <a:bodyPr wrap="square" rtlCol="0" anchor="t"/>
           <a:lstStyle/>
           <a:p>
-            <a:pPr indent="0" marL="0">
+            <a:pPr marL="0" indent="0">
               <a:buNone/>
             </a:pPr>
             <a:r>
@@ -12284,7 +12878,7 @@
           <a:bodyPr wrap="square" rtlCol="0" anchor="t"/>
           <a:lstStyle/>
           <a:p>
-            <a:pPr indent="0" marL="0">
+            <a:pPr marL="0" indent="0">
               <a:buNone/>
             </a:pPr>
             <a:r>
@@ -12320,7 +12914,7 @@
           <a:bodyPr wrap="square" rtlCol="0" anchor="t"/>
           <a:lstStyle/>
           <a:p>
-            <a:pPr indent="0" marL="0">
+            <a:pPr marL="0" indent="0">
               <a:buNone/>
             </a:pPr>
             <a:r>
@@ -12356,7 +12950,7 @@
           <a:bodyPr wrap="square" rtlCol="0" anchor="t"/>
           <a:lstStyle/>
           <a:p>
-            <a:pPr indent="0" marL="0">
+            <a:pPr marL="0" indent="0">
               <a:buNone/>
             </a:pPr>
             <a:r>
@@ -12395,13 +12989,20 @@
             <a:prstDash val="solid"/>
           </a:ln>
           <a:effectLst>
-            <a:outerShdw sx="100000" sy="100000" kx="0" ky="0" algn="bl" rotWithShape="0" blurRad="101600" dist="25400" dir="8100000">
+            <a:outerShdw blurRad="101600" dist="25400" dir="8100000" algn="bl" rotWithShape="0">
               <a:srgbClr val="000000">
                 <a:alpha val="10000"/>
               </a:srgbClr>
             </a:outerShdw>
           </a:effectLst>
         </p:spPr>
+        <p:txBody>
+          <a:bodyPr/>
+          <a:lstStyle/>
+          <a:p>
+            <a:endParaRPr lang="en-US"/>
+          </a:p>
+        </p:txBody>
       </p:sp>
       <p:sp>
         <p:nvSpPr>
@@ -12427,6 +13028,13 @@
             <a:prstDash val="solid"/>
           </a:ln>
         </p:spPr>
+        <p:txBody>
+          <a:bodyPr/>
+          <a:lstStyle/>
+          <a:p>
+            <a:endParaRPr lang="en-US"/>
+          </a:p>
+        </p:txBody>
       </p:sp>
       <p:sp>
         <p:nvSpPr>
@@ -12449,7 +13057,7 @@
           <a:bodyPr wrap="square" rtlCol="0" anchor="ctr"/>
           <a:lstStyle/>
           <a:p>
-            <a:pPr algn="ctr" indent="0" marL="0">
+            <a:pPr marL="0" indent="0" algn="ctr">
               <a:buNone/>
             </a:pPr>
             <a:r>
@@ -12485,7 +13093,7 @@
           <a:bodyPr wrap="square" rtlCol="0" anchor="ctr"/>
           <a:lstStyle/>
           <a:p>
-            <a:pPr algn="ctr" indent="0" marL="0">
+            <a:pPr marL="0" indent="0" algn="ctr">
               <a:buNone/>
             </a:pPr>
             <a:r>
@@ -12521,7 +13129,7 @@
           <a:bodyPr wrap="square" rtlCol="0" anchor="ctr"/>
           <a:lstStyle/>
           <a:p>
-            <a:pPr algn="ctr" indent="0" marL="0">
+            <a:pPr marL="0" indent="0" algn="ctr">
               <a:buNone/>
             </a:pPr>
             <a:r>
@@ -12530,7 +13138,7 @@
                   <a:srgbClr val="F5A623"/>
                 </a:solidFill>
               </a:rPr>
-              <a:t>Cloud GTM Lead</a:t>
+              <a:t>Cloud/Software GTM Lead</a:t>
             </a:r>
             <a:endParaRPr lang="en-US" sz="1200" dirty="0"/>
           </a:p>
@@ -12557,7 +13165,7 @@
           <a:bodyPr wrap="square" rtlCol="0" anchor="ctr"/>
           <a:lstStyle/>
           <a:p>
-            <a:pPr algn="ctr" indent="0" marL="0">
+            <a:pPr marL="0" indent="0" algn="ctr">
               <a:buNone/>
             </a:pPr>
             <a:r>
@@ -12594,6 +13202,13 @@
             <a:prstDash val="solid"/>
           </a:ln>
         </p:spPr>
+        <p:txBody>
+          <a:bodyPr/>
+          <a:lstStyle/>
+          <a:p>
+            <a:endParaRPr lang="en-US"/>
+          </a:p>
+        </p:txBody>
       </p:sp>
       <p:sp>
         <p:nvSpPr>
@@ -12616,7 +13231,7 @@
           <a:bodyPr wrap="square" rtlCol="0" anchor="ctr"/>
           <a:lstStyle/>
           <a:p>
-            <a:pPr algn="ctr" indent="0" marL="0">
+            <a:pPr marL="0" indent="0" algn="ctr">
               <a:buNone/>
             </a:pPr>
             <a:r>
@@ -12631,6 +13246,36 @@
           </a:p>
         </p:txBody>
       </p:sp>
+      <p:pic>
+        <p:nvPicPr>
+          <p:cNvPr id="20" name="Picture 19">
+            <a:extLst>
+              <a:ext uri="{FF2B5EF4-FFF2-40B4-BE49-F238E27FC236}">
+                <a16:creationId xmlns:a16="http://schemas.microsoft.com/office/drawing/2014/main" id="{507DC901-CFB9-6079-D3A6-E057637D5170}"/>
+              </a:ext>
+            </a:extLst>
+          </p:cNvPr>
+          <p:cNvPicPr>
+            <a:picLocks noChangeAspect="1"/>
+          </p:cNvPicPr>
+          <p:nvPr/>
+        </p:nvPicPr>
+        <p:blipFill>
+          <a:blip r:embed="rId3"/>
+          <a:stretch>
+            <a:fillRect/>
+          </a:stretch>
+        </p:blipFill>
+        <p:spPr>
+          <a:xfrm>
+            <a:off x="6836446" y="1155410"/>
+            <a:ext cx="1551867" cy="1163900"/>
+          </a:xfrm>
+          <a:prstGeom prst="rect">
+            <a:avLst/>
+          </a:prstGeom>
+        </p:spPr>
+      </p:pic>
     </p:spTree>
   </p:cSld>
   <p:clrMapOvr>
@@ -12647,6 +13292,7 @@
         <a:solidFill>
           <a:srgbClr val="F8F9FA"/>
         </a:solidFill>
+        <a:effectLst/>
       </p:bgPr>
     </p:bg>
     <p:spTree>
@@ -12687,6 +13333,13 @@
             <a:prstDash val="solid"/>
           </a:ln>
         </p:spPr>
+        <p:txBody>
+          <a:bodyPr/>
+          <a:lstStyle/>
+          <a:p>
+            <a:endParaRPr lang="en-US"/>
+          </a:p>
+        </p:txBody>
       </p:sp>
       <p:sp>
         <p:nvSpPr>
@@ -12709,7 +13362,7 @@
           <a:bodyPr wrap="square" lIns="0" tIns="0" rIns="0" bIns="0" rtlCol="0" anchor="ctr"/>
           <a:lstStyle/>
           <a:p>
-            <a:pPr indent="0" marL="0">
+            <a:pPr marL="0" indent="0">
               <a:buNone/>
             </a:pPr>
             <a:r>
@@ -12745,7 +13398,7 @@
           <a:bodyPr wrap="square" lIns="0" tIns="0" rIns="0" bIns="0" rtlCol="0" anchor="ctr"/>
           <a:lstStyle/>
           <a:p>
-            <a:pPr algn="ctr" indent="0" marL="0">
+            <a:pPr marL="0" indent="0" algn="ctr">
               <a:buNone/>
             </a:pPr>
             <a:r>
@@ -12781,7 +13434,7 @@
           <a:bodyPr wrap="square" rtlCol="0" anchor="ctr"/>
           <a:lstStyle/>
           <a:p>
-            <a:pPr indent="0" marL="0">
+            <a:pPr marL="0" indent="0">
               <a:buNone/>
             </a:pPr>
             <a:r>
@@ -12820,13 +13473,20 @@
             <a:prstDash val="solid"/>
           </a:ln>
           <a:effectLst>
-            <a:outerShdw sx="100000" sy="100000" kx="0" ky="0" algn="bl" rotWithShape="0" blurRad="101600" dist="25400" dir="8100000">
+            <a:outerShdw blurRad="101600" dist="25400" dir="8100000" algn="bl" rotWithShape="0">
               <a:srgbClr val="000000">
                 <a:alpha val="10000"/>
               </a:srgbClr>
             </a:outerShdw>
           </a:effectLst>
         </p:spPr>
+        <p:txBody>
+          <a:bodyPr/>
+          <a:lstStyle/>
+          <a:p>
+            <a:endParaRPr lang="en-US"/>
+          </a:p>
+        </p:txBody>
       </p:sp>
       <p:sp>
         <p:nvSpPr>
@@ -12852,6 +13512,13 @@
             <a:prstDash val="solid"/>
           </a:ln>
         </p:spPr>
+        <p:txBody>
+          <a:bodyPr/>
+          <a:lstStyle/>
+          <a:p>
+            <a:endParaRPr lang="en-US"/>
+          </a:p>
+        </p:txBody>
       </p:sp>
       <p:sp>
         <p:nvSpPr>
@@ -12877,6 +13544,13 @@
             <a:prstDash val="solid"/>
           </a:ln>
         </p:spPr>
+        <p:txBody>
+          <a:bodyPr/>
+          <a:lstStyle/>
+          <a:p>
+            <a:endParaRPr lang="en-US"/>
+          </a:p>
+        </p:txBody>
       </p:sp>
       <p:sp>
         <p:nvSpPr>
@@ -12899,7 +13573,7 @@
           <a:bodyPr wrap="square" lIns="0" tIns="0" rIns="0" bIns="0" rtlCol="0" anchor="ctr"/>
           <a:lstStyle/>
           <a:p>
-            <a:pPr algn="ctr" indent="0" marL="0">
+            <a:pPr marL="0" indent="0" algn="ctr">
               <a:buNone/>
             </a:pPr>
             <a:r>
@@ -12935,7 +13609,7 @@
           <a:bodyPr wrap="square" rtlCol="0" anchor="t"/>
           <a:lstStyle/>
           <a:p>
-            <a:pPr indent="0" marL="0">
+            <a:pPr marL="0" indent="0">
               <a:buNone/>
             </a:pPr>
             <a:r>
@@ -12974,6 +13648,13 @@
             <a:prstDash val="solid"/>
           </a:ln>
         </p:spPr>
+        <p:txBody>
+          <a:bodyPr/>
+          <a:lstStyle/>
+          <a:p>
+            <a:endParaRPr lang="en-US"/>
+          </a:p>
+        </p:txBody>
       </p:sp>
       <p:sp>
         <p:nvSpPr>
@@ -12996,7 +13677,7 @@
           <a:bodyPr wrap="square" rtlCol="0" anchor="ctr"/>
           <a:lstStyle/>
           <a:p>
-            <a:pPr indent="0" marL="0">
+            <a:pPr marL="0" indent="0">
               <a:buNone/>
             </a:pPr>
             <a:r>
@@ -13035,6 +13716,13 @@
             <a:prstDash val="solid"/>
           </a:ln>
         </p:spPr>
+        <p:txBody>
+          <a:bodyPr/>
+          <a:lstStyle/>
+          <a:p>
+            <a:endParaRPr lang="en-US"/>
+          </a:p>
+        </p:txBody>
       </p:sp>
       <p:sp>
         <p:nvSpPr>
@@ -13057,7 +13745,7 @@
           <a:bodyPr wrap="square" rtlCol="0" anchor="ctr"/>
           <a:lstStyle/>
           <a:p>
-            <a:pPr indent="0" marL="0">
+            <a:pPr marL="0" indent="0">
               <a:buNone/>
             </a:pPr>
             <a:r>
@@ -13096,6 +13784,13 @@
             <a:prstDash val="solid"/>
           </a:ln>
         </p:spPr>
+        <p:txBody>
+          <a:bodyPr/>
+          <a:lstStyle/>
+          <a:p>
+            <a:endParaRPr lang="en-US"/>
+          </a:p>
+        </p:txBody>
       </p:sp>
       <p:sp>
         <p:nvSpPr>
@@ -13118,7 +13813,7 @@
           <a:bodyPr wrap="square" rtlCol="0" anchor="ctr"/>
           <a:lstStyle/>
           <a:p>
-            <a:pPr indent="0" marL="0">
+            <a:pPr marL="0" indent="0">
               <a:buNone/>
             </a:pPr>
             <a:r>
@@ -13157,6 +13852,13 @@
             <a:prstDash val="solid"/>
           </a:ln>
         </p:spPr>
+        <p:txBody>
+          <a:bodyPr/>
+          <a:lstStyle/>
+          <a:p>
+            <a:endParaRPr lang="en-US"/>
+          </a:p>
+        </p:txBody>
       </p:sp>
       <p:sp>
         <p:nvSpPr>
@@ -13179,7 +13881,7 @@
           <a:bodyPr wrap="square" rtlCol="0" anchor="ctr"/>
           <a:lstStyle/>
           <a:p>
-            <a:pPr indent="0" marL="0">
+            <a:pPr marL="0" indent="0">
               <a:buNone/>
             </a:pPr>
             <a:r>
@@ -13218,13 +13920,20 @@
             <a:prstDash val="solid"/>
           </a:ln>
           <a:effectLst>
-            <a:outerShdw sx="100000" sy="100000" kx="0" ky="0" algn="bl" rotWithShape="0" blurRad="101600" dist="25400" dir="8100000">
+            <a:outerShdw blurRad="101600" dist="25400" dir="8100000" algn="bl" rotWithShape="0">
               <a:srgbClr val="000000">
                 <a:alpha val="10000"/>
               </a:srgbClr>
             </a:outerShdw>
           </a:effectLst>
         </p:spPr>
+        <p:txBody>
+          <a:bodyPr/>
+          <a:lstStyle/>
+          <a:p>
+            <a:endParaRPr lang="en-US"/>
+          </a:p>
+        </p:txBody>
       </p:sp>
       <p:sp>
         <p:nvSpPr>
@@ -13250,6 +13959,13 @@
             <a:prstDash val="solid"/>
           </a:ln>
         </p:spPr>
+        <p:txBody>
+          <a:bodyPr/>
+          <a:lstStyle/>
+          <a:p>
+            <a:endParaRPr lang="en-US"/>
+          </a:p>
+        </p:txBody>
       </p:sp>
       <p:sp>
         <p:nvSpPr>
@@ -13275,6 +13991,13 @@
             <a:prstDash val="solid"/>
           </a:ln>
         </p:spPr>
+        <p:txBody>
+          <a:bodyPr/>
+          <a:lstStyle/>
+          <a:p>
+            <a:endParaRPr lang="en-US"/>
+          </a:p>
+        </p:txBody>
       </p:sp>
       <p:sp>
         <p:nvSpPr>
@@ -13297,7 +14020,7 @@
           <a:bodyPr wrap="square" lIns="0" tIns="0" rIns="0" bIns="0" rtlCol="0" anchor="ctr"/>
           <a:lstStyle/>
           <a:p>
-            <a:pPr algn="ctr" indent="0" marL="0">
+            <a:pPr marL="0" indent="0" algn="ctr">
               <a:buNone/>
             </a:pPr>
             <a:r>
@@ -13333,7 +14056,7 @@
           <a:bodyPr wrap="square" rtlCol="0" anchor="t"/>
           <a:lstStyle/>
           <a:p>
-            <a:pPr indent="0" marL="0">
+            <a:pPr marL="0" indent="0">
               <a:buNone/>
             </a:pPr>
             <a:r>
@@ -13372,6 +14095,13 @@
             <a:prstDash val="solid"/>
           </a:ln>
         </p:spPr>
+        <p:txBody>
+          <a:bodyPr/>
+          <a:lstStyle/>
+          <a:p>
+            <a:endParaRPr lang="en-US"/>
+          </a:p>
+        </p:txBody>
       </p:sp>
       <p:sp>
         <p:nvSpPr>
@@ -13394,7 +14124,7 @@
           <a:bodyPr wrap="square" rtlCol="0" anchor="ctr"/>
           <a:lstStyle/>
           <a:p>
-            <a:pPr indent="0" marL="0">
+            <a:pPr marL="0" indent="0">
               <a:buNone/>
             </a:pPr>
             <a:r>
@@ -13433,6 +14163,13 @@
             <a:prstDash val="solid"/>
           </a:ln>
         </p:spPr>
+        <p:txBody>
+          <a:bodyPr/>
+          <a:lstStyle/>
+          <a:p>
+            <a:endParaRPr lang="en-US"/>
+          </a:p>
+        </p:txBody>
       </p:sp>
       <p:sp>
         <p:nvSpPr>
@@ -13455,7 +14192,7 @@
           <a:bodyPr wrap="square" rtlCol="0" anchor="ctr"/>
           <a:lstStyle/>
           <a:p>
-            <a:pPr indent="0" marL="0">
+            <a:pPr marL="0" indent="0">
               <a:buNone/>
             </a:pPr>
             <a:r>
@@ -13494,6 +14231,13 @@
             <a:prstDash val="solid"/>
           </a:ln>
         </p:spPr>
+        <p:txBody>
+          <a:bodyPr/>
+          <a:lstStyle/>
+          <a:p>
+            <a:endParaRPr lang="en-US"/>
+          </a:p>
+        </p:txBody>
       </p:sp>
       <p:sp>
         <p:nvSpPr>
@@ -13516,7 +14260,7 @@
           <a:bodyPr wrap="square" rtlCol="0" anchor="ctr"/>
           <a:lstStyle/>
           <a:p>
-            <a:pPr indent="0" marL="0">
+            <a:pPr marL="0" indent="0">
               <a:buNone/>
             </a:pPr>
             <a:r>
@@ -13555,6 +14299,13 @@
             <a:prstDash val="solid"/>
           </a:ln>
         </p:spPr>
+        <p:txBody>
+          <a:bodyPr/>
+          <a:lstStyle/>
+          <a:p>
+            <a:endParaRPr lang="en-US"/>
+          </a:p>
+        </p:txBody>
       </p:sp>
       <p:sp>
         <p:nvSpPr>
@@ -13577,7 +14328,7 @@
           <a:bodyPr wrap="square" rtlCol="0" anchor="ctr"/>
           <a:lstStyle/>
           <a:p>
-            <a:pPr indent="0" marL="0">
+            <a:pPr marL="0" indent="0">
               <a:buNone/>
             </a:pPr>
             <a:r>
@@ -13616,13 +14367,20 @@
             <a:prstDash val="solid"/>
           </a:ln>
           <a:effectLst>
-            <a:outerShdw sx="100000" sy="100000" kx="0" ky="0" algn="bl" rotWithShape="0" blurRad="101600" dist="25400" dir="8100000">
+            <a:outerShdw blurRad="101600" dist="25400" dir="8100000" algn="bl" rotWithShape="0">
               <a:srgbClr val="000000">
                 <a:alpha val="10000"/>
               </a:srgbClr>
             </a:outerShdw>
           </a:effectLst>
         </p:spPr>
+        <p:txBody>
+          <a:bodyPr/>
+          <a:lstStyle/>
+          <a:p>
+            <a:endParaRPr lang="en-US"/>
+          </a:p>
+        </p:txBody>
       </p:sp>
       <p:sp>
         <p:nvSpPr>
@@ -13648,6 +14406,13 @@
             <a:prstDash val="solid"/>
           </a:ln>
         </p:spPr>
+        <p:txBody>
+          <a:bodyPr/>
+          <a:lstStyle/>
+          <a:p>
+            <a:endParaRPr lang="en-US"/>
+          </a:p>
+        </p:txBody>
       </p:sp>
       <p:sp>
         <p:nvSpPr>
@@ -13673,6 +14438,13 @@
             <a:prstDash val="solid"/>
           </a:ln>
         </p:spPr>
+        <p:txBody>
+          <a:bodyPr/>
+          <a:lstStyle/>
+          <a:p>
+            <a:endParaRPr lang="en-US"/>
+          </a:p>
+        </p:txBody>
       </p:sp>
       <p:sp>
         <p:nvSpPr>
@@ -13695,7 +14467,7 @@
           <a:bodyPr wrap="square" lIns="0" tIns="0" rIns="0" bIns="0" rtlCol="0" anchor="ctr"/>
           <a:lstStyle/>
           <a:p>
-            <a:pPr algn="ctr" indent="0" marL="0">
+            <a:pPr marL="0" indent="0" algn="ctr">
               <a:buNone/>
             </a:pPr>
             <a:r>
@@ -13731,7 +14503,7 @@
           <a:bodyPr wrap="square" rtlCol="0" anchor="t"/>
           <a:lstStyle/>
           <a:p>
-            <a:pPr indent="0" marL="0">
+            <a:pPr marL="0" indent="0">
               <a:buNone/>
             </a:pPr>
             <a:r>
@@ -13770,6 +14542,13 @@
             <a:prstDash val="solid"/>
           </a:ln>
         </p:spPr>
+        <p:txBody>
+          <a:bodyPr/>
+          <a:lstStyle/>
+          <a:p>
+            <a:endParaRPr lang="en-US"/>
+          </a:p>
+        </p:txBody>
       </p:sp>
       <p:sp>
         <p:nvSpPr>
@@ -13792,7 +14571,7 @@
           <a:bodyPr wrap="square" rtlCol="0" anchor="ctr"/>
           <a:lstStyle/>
           <a:p>
-            <a:pPr indent="0" marL="0">
+            <a:pPr marL="0" indent="0">
               <a:buNone/>
             </a:pPr>
             <a:r>
@@ -13831,6 +14610,13 @@
             <a:prstDash val="solid"/>
           </a:ln>
         </p:spPr>
+        <p:txBody>
+          <a:bodyPr/>
+          <a:lstStyle/>
+          <a:p>
+            <a:endParaRPr lang="en-US"/>
+          </a:p>
+        </p:txBody>
       </p:sp>
       <p:sp>
         <p:nvSpPr>
@@ -13853,7 +14639,7 @@
           <a:bodyPr wrap="square" rtlCol="0" anchor="ctr"/>
           <a:lstStyle/>
           <a:p>
-            <a:pPr indent="0" marL="0">
+            <a:pPr marL="0" indent="0">
               <a:buNone/>
             </a:pPr>
             <a:r>
@@ -13892,6 +14678,13 @@
             <a:prstDash val="solid"/>
           </a:ln>
         </p:spPr>
+        <p:txBody>
+          <a:bodyPr/>
+          <a:lstStyle/>
+          <a:p>
+            <a:endParaRPr lang="en-US"/>
+          </a:p>
+        </p:txBody>
       </p:sp>
       <p:sp>
         <p:nvSpPr>
@@ -13914,7 +14707,7 @@
           <a:bodyPr wrap="square" rtlCol="0" anchor="ctr"/>
           <a:lstStyle/>
           <a:p>
-            <a:pPr indent="0" marL="0">
+            <a:pPr marL="0" indent="0">
               <a:buNone/>
             </a:pPr>
             <a:r>
@@ -13953,6 +14746,13 @@
             <a:prstDash val="solid"/>
           </a:ln>
         </p:spPr>
+        <p:txBody>
+          <a:bodyPr/>
+          <a:lstStyle/>
+          <a:p>
+            <a:endParaRPr lang="en-US"/>
+          </a:p>
+        </p:txBody>
       </p:sp>
       <p:sp>
         <p:nvSpPr>
@@ -13975,7 +14775,7 @@
           <a:bodyPr wrap="square" rtlCol="0" anchor="ctr"/>
           <a:lstStyle/>
           <a:p>
-            <a:pPr indent="0" marL="0">
+            <a:pPr marL="0" indent="0">
               <a:buNone/>
             </a:pPr>
             <a:r>
@@ -14006,6 +14806,7 @@
         <a:solidFill>
           <a:srgbClr val="1A1A2E"/>
         </a:solidFill>
+        <a:effectLst/>
       </p:bgPr>
     </p:bg>
     <p:spTree>
@@ -14046,6 +14847,13 @@
             <a:prstDash val="solid"/>
           </a:ln>
         </p:spPr>
+        <p:txBody>
+          <a:bodyPr/>
+          <a:lstStyle/>
+          <a:p>
+            <a:endParaRPr lang="en-US"/>
+          </a:p>
+        </p:txBody>
       </p:sp>
       <p:sp>
         <p:nvSpPr>
@@ -14071,6 +14879,13 @@
             <a:prstDash val="solid"/>
           </a:ln>
         </p:spPr>
+        <p:txBody>
+          <a:bodyPr/>
+          <a:lstStyle/>
+          <a:p>
+            <a:endParaRPr lang="en-US"/>
+          </a:p>
+        </p:txBody>
       </p:sp>
       <p:sp>
         <p:nvSpPr>
@@ -14093,7 +14908,7 @@
           <a:bodyPr wrap="square" rtlCol="0" anchor="ctr"/>
           <a:lstStyle/>
           <a:p>
-            <a:pPr algn="ctr" indent="0" marL="0">
+            <a:pPr marL="0" indent="0" algn="ctr">
               <a:buNone/>
             </a:pPr>
             <a:r>
@@ -14129,7 +14944,7 @@
           <a:bodyPr wrap="square" rtlCol="0" anchor="ctr"/>
           <a:lstStyle/>
           <a:p>
-            <a:pPr algn="ctr" indent="0" marL="0">
+            <a:pPr marL="0" indent="0" algn="ctr">
               <a:buNone/>
             </a:pPr>
             <a:r>
@@ -14160,6 +14975,7 @@
         <a:solidFill>
           <a:srgbClr val="F8F9FA"/>
         </a:solidFill>
+        <a:effectLst/>
       </p:bgPr>
     </p:bg>
     <p:spTree>
@@ -14200,6 +15016,13 @@
             <a:prstDash val="solid"/>
           </a:ln>
         </p:spPr>
+        <p:txBody>
+          <a:bodyPr/>
+          <a:lstStyle/>
+          <a:p>
+            <a:endParaRPr lang="en-US"/>
+          </a:p>
+        </p:txBody>
       </p:sp>
       <p:sp>
         <p:nvSpPr>
@@ -14222,7 +15045,7 @@
           <a:bodyPr wrap="square" lIns="0" tIns="0" rIns="0" bIns="0" rtlCol="0" anchor="ctr"/>
           <a:lstStyle/>
           <a:p>
-            <a:pPr indent="0" marL="0">
+            <a:pPr marL="0" indent="0">
               <a:buNone/>
             </a:pPr>
             <a:r>
@@ -14231,7 +15054,7 @@
                   <a:srgbClr val="FFFFFF"/>
                 </a:solidFill>
               </a:rPr>
-              <a:t>OK, so what IS AWS Step Functions?</a:t>
+              <a:t>OK, so what is “AWS Step Functions”?</a:t>
             </a:r>
             <a:endParaRPr lang="en-US" sz="2200" dirty="0"/>
           </a:p>
@@ -14258,7 +15081,7 @@
           <a:bodyPr wrap="square" lIns="0" tIns="0" rIns="0" bIns="0" rtlCol="0" anchor="ctr"/>
           <a:lstStyle/>
           <a:p>
-            <a:pPr algn="ctr" indent="0" marL="0">
+            <a:pPr marL="0" indent="0" algn="ctr">
               <a:buNone/>
             </a:pPr>
             <a:r>
@@ -14297,13 +15120,20 @@
             <a:prstDash val="solid"/>
           </a:ln>
           <a:effectLst>
-            <a:outerShdw sx="100000" sy="100000" kx="0" ky="0" algn="bl" rotWithShape="0" blurRad="101600" dist="25400" dir="8100000">
+            <a:outerShdw blurRad="101600" dist="25400" dir="8100000" algn="bl" rotWithShape="0">
               <a:srgbClr val="000000">
                 <a:alpha val="10000"/>
               </a:srgbClr>
             </a:outerShdw>
           </a:effectLst>
         </p:spPr>
+        <p:txBody>
+          <a:bodyPr/>
+          <a:lstStyle/>
+          <a:p>
+            <a:endParaRPr lang="en-US"/>
+          </a:p>
+        </p:txBody>
       </p:sp>
       <p:sp>
         <p:nvSpPr>
@@ -14329,6 +15159,13 @@
             <a:prstDash val="solid"/>
           </a:ln>
         </p:spPr>
+        <p:txBody>
+          <a:bodyPr/>
+          <a:lstStyle/>
+          <a:p>
+            <a:endParaRPr lang="en-US"/>
+          </a:p>
+        </p:txBody>
       </p:sp>
       <p:sp>
         <p:nvSpPr>
@@ -14351,7 +15188,7 @@
           <a:bodyPr wrap="square" rtlCol="0" anchor="ctr"/>
           <a:lstStyle/>
           <a:p>
-            <a:pPr indent="0" marL="0">
+            <a:pPr marL="0" indent="0">
               <a:buNone/>
             </a:pPr>
             <a:r>
@@ -14360,7 +15197,7 @@
                   <a:srgbClr val="FFFFFF"/>
                 </a:solidFill>
               </a:rPr>
-              <a:t>AWS Step Functions is a fully managed serverless orchestration service that lets you coordinate distributed applications and microservices using visual workflows — called state machines — defined in the Amazon States Language (ASL).</a:t>
+              <a:t>“AWS Step Functions” is a fully managed serverless orchestration service that lets you coordinate distributed applications and microservices using visual workflows — called state machines — defined in the Amazon States Language (ASL).</a:t>
             </a:r>
             <a:endParaRPr lang="en-US" sz="1450" dirty="0"/>
           </a:p>
@@ -14390,13 +15227,20 @@
             <a:prstDash val="solid"/>
           </a:ln>
           <a:effectLst>
-            <a:outerShdw sx="100000" sy="100000" kx="0" ky="0" algn="bl" rotWithShape="0" blurRad="101600" dist="25400" dir="8100000">
+            <a:outerShdw blurRad="101600" dist="25400" dir="8100000" algn="bl" rotWithShape="0">
               <a:srgbClr val="000000">
                 <a:alpha val="10000"/>
               </a:srgbClr>
             </a:outerShdw>
           </a:effectLst>
         </p:spPr>
+        <p:txBody>
+          <a:bodyPr/>
+          <a:lstStyle/>
+          <a:p>
+            <a:endParaRPr lang="en-US"/>
+          </a:p>
+        </p:txBody>
       </p:sp>
       <p:sp>
         <p:nvSpPr>
@@ -14419,7 +15263,7 @@
           <a:bodyPr wrap="square" rtlCol="0" anchor="ctr"/>
           <a:lstStyle/>
           <a:p>
-            <a:pPr algn="ctr" indent="0" marL="0">
+            <a:pPr marL="0" indent="0" algn="ctr">
               <a:buNone/>
             </a:pPr>
             <a:r>
@@ -14455,7 +15299,7 @@
           <a:bodyPr wrap="square" rtlCol="0" anchor="ctr"/>
           <a:lstStyle/>
           <a:p>
-            <a:pPr algn="ctr" indent="0" marL="0">
+            <a:pPr marL="0" indent="0" algn="ctr">
               <a:buNone/>
             </a:pPr>
             <a:r>
@@ -14491,7 +15335,7 @@
           <a:bodyPr wrap="square" rtlCol="0" anchor="ctr"/>
           <a:lstStyle/>
           <a:p>
-            <a:pPr algn="ctr" indent="0" marL="0">
+            <a:pPr marL="0" indent="0" algn="ctr">
               <a:buNone/>
             </a:pPr>
             <a:r>
@@ -14530,13 +15374,20 @@
             <a:prstDash val="solid"/>
           </a:ln>
           <a:effectLst>
-            <a:outerShdw sx="100000" sy="100000" kx="0" ky="0" algn="bl" rotWithShape="0" blurRad="101600" dist="25400" dir="8100000">
+            <a:outerShdw blurRad="101600" dist="25400" dir="8100000" algn="bl" rotWithShape="0">
               <a:srgbClr val="000000">
                 <a:alpha val="10000"/>
               </a:srgbClr>
             </a:outerShdw>
           </a:effectLst>
         </p:spPr>
+        <p:txBody>
+          <a:bodyPr/>
+          <a:lstStyle/>
+          <a:p>
+            <a:endParaRPr lang="en-US"/>
+          </a:p>
+        </p:txBody>
       </p:sp>
       <p:sp>
         <p:nvSpPr>
@@ -14559,7 +15410,7 @@
           <a:bodyPr wrap="square" rtlCol="0" anchor="ctr"/>
           <a:lstStyle/>
           <a:p>
-            <a:pPr algn="ctr" indent="0" marL="0">
+            <a:pPr marL="0" indent="0" algn="ctr">
               <a:buNone/>
             </a:pPr>
             <a:r>
@@ -14595,7 +15446,7 @@
           <a:bodyPr wrap="square" rtlCol="0" anchor="ctr"/>
           <a:lstStyle/>
           <a:p>
-            <a:pPr algn="ctr" indent="0" marL="0">
+            <a:pPr marL="0" indent="0" algn="ctr">
               <a:buNone/>
             </a:pPr>
             <a:r>
@@ -14631,7 +15482,7 @@
           <a:bodyPr wrap="square" rtlCol="0" anchor="ctr"/>
           <a:lstStyle/>
           <a:p>
-            <a:pPr algn="ctr" indent="0" marL="0">
+            <a:pPr marL="0" indent="0" algn="ctr">
               <a:buNone/>
             </a:pPr>
             <a:r>
@@ -14670,13 +15521,20 @@
             <a:prstDash val="solid"/>
           </a:ln>
           <a:effectLst>
-            <a:outerShdw sx="100000" sy="100000" kx="0" ky="0" algn="bl" rotWithShape="0" blurRad="101600" dist="25400" dir="8100000">
+            <a:outerShdw blurRad="101600" dist="25400" dir="8100000" algn="bl" rotWithShape="0">
               <a:srgbClr val="000000">
                 <a:alpha val="10000"/>
               </a:srgbClr>
             </a:outerShdw>
           </a:effectLst>
         </p:spPr>
+        <p:txBody>
+          <a:bodyPr/>
+          <a:lstStyle/>
+          <a:p>
+            <a:endParaRPr lang="en-US"/>
+          </a:p>
+        </p:txBody>
       </p:sp>
       <p:sp>
         <p:nvSpPr>
@@ -14699,7 +15557,7 @@
           <a:bodyPr wrap="square" rtlCol="0" anchor="ctr"/>
           <a:lstStyle/>
           <a:p>
-            <a:pPr algn="ctr" indent="0" marL="0">
+            <a:pPr marL="0" indent="0" algn="ctr">
               <a:buNone/>
             </a:pPr>
             <a:r>
@@ -14735,7 +15593,7 @@
           <a:bodyPr wrap="square" rtlCol="0" anchor="ctr"/>
           <a:lstStyle/>
           <a:p>
-            <a:pPr algn="ctr" indent="0" marL="0">
+            <a:pPr marL="0" indent="0" algn="ctr">
               <a:buNone/>
             </a:pPr>
             <a:r>
@@ -14771,7 +15629,7 @@
           <a:bodyPr wrap="square" rtlCol="0" anchor="ctr"/>
           <a:lstStyle/>
           <a:p>
-            <a:pPr algn="ctr" indent="0" marL="0">
+            <a:pPr marL="0" indent="0" algn="ctr">
               <a:buNone/>
             </a:pPr>
             <a:r>
@@ -14802,6 +15660,7 @@
         <a:solidFill>
           <a:srgbClr val="F8F9FA"/>
         </a:solidFill>
+        <a:effectLst/>
       </p:bgPr>
     </p:bg>
     <p:spTree>
@@ -14842,6 +15701,13 @@
             <a:prstDash val="solid"/>
           </a:ln>
         </p:spPr>
+        <p:txBody>
+          <a:bodyPr/>
+          <a:lstStyle/>
+          <a:p>
+            <a:endParaRPr lang="en-US"/>
+          </a:p>
+        </p:txBody>
       </p:sp>
       <p:sp>
         <p:nvSpPr>
@@ -14864,7 +15730,7 @@
           <a:bodyPr wrap="square" lIns="0" tIns="0" rIns="0" bIns="0" rtlCol="0" anchor="ctr"/>
           <a:lstStyle/>
           <a:p>
-            <a:pPr indent="0" marL="0">
+            <a:pPr marL="0" indent="0">
               <a:buNone/>
             </a:pPr>
             <a:r>
@@ -14900,7 +15766,7 @@
           <a:bodyPr wrap="square" lIns="0" tIns="0" rIns="0" bIns="0" rtlCol="0" anchor="ctr"/>
           <a:lstStyle/>
           <a:p>
-            <a:pPr algn="ctr" indent="0" marL="0">
+            <a:pPr marL="0" indent="0" algn="ctr">
               <a:buNone/>
             </a:pPr>
             <a:r>
@@ -14939,13 +15805,20 @@
             <a:prstDash val="solid"/>
           </a:ln>
           <a:effectLst>
-            <a:outerShdw sx="100000" sy="100000" kx="0" ky="0" algn="bl" rotWithShape="0" blurRad="101600" dist="25400" dir="8100000">
+            <a:outerShdw blurRad="101600" dist="25400" dir="8100000" algn="bl" rotWithShape="0">
               <a:srgbClr val="000000">
                 <a:alpha val="10000"/>
               </a:srgbClr>
             </a:outerShdw>
           </a:effectLst>
         </p:spPr>
+        <p:txBody>
+          <a:bodyPr/>
+          <a:lstStyle/>
+          <a:p>
+            <a:endParaRPr lang="en-US"/>
+          </a:p>
+        </p:txBody>
       </p:sp>
       <p:sp>
         <p:nvSpPr>
@@ -14971,6 +15844,13 @@
             <a:prstDash val="solid"/>
           </a:ln>
         </p:spPr>
+        <p:txBody>
+          <a:bodyPr/>
+          <a:lstStyle/>
+          <a:p>
+            <a:endParaRPr lang="en-US"/>
+          </a:p>
+        </p:txBody>
       </p:sp>
       <p:sp>
         <p:nvSpPr>
@@ -14993,7 +15873,7 @@
           <a:bodyPr wrap="square" lIns="0" tIns="0" rIns="0" bIns="0" rtlCol="0" anchor="ctr"/>
           <a:lstStyle/>
           <a:p>
-            <a:pPr algn="ctr" indent="0" marL="0">
+            <a:pPr marL="0" indent="0" algn="ctr">
               <a:buNone/>
             </a:pPr>
             <a:r>
@@ -15032,6 +15912,13 @@
             <a:prstDash val="solid"/>
           </a:ln>
         </p:spPr>
+        <p:txBody>
+          <a:bodyPr/>
+          <a:lstStyle/>
+          <a:p>
+            <a:endParaRPr lang="en-US"/>
+          </a:p>
+        </p:txBody>
       </p:sp>
       <p:sp>
         <p:nvSpPr>
@@ -15054,7 +15941,7 @@
           <a:bodyPr wrap="square" rtlCol="0" anchor="ctr"/>
           <a:lstStyle/>
           <a:p>
-            <a:pPr indent="0" marL="0">
+            <a:pPr marL="0" indent="0">
               <a:buNone/>
             </a:pPr>
             <a:r>
@@ -15093,6 +15980,13 @@
             <a:prstDash val="solid"/>
           </a:ln>
         </p:spPr>
+        <p:txBody>
+          <a:bodyPr/>
+          <a:lstStyle/>
+          <a:p>
+            <a:endParaRPr lang="en-US"/>
+          </a:p>
+        </p:txBody>
       </p:sp>
       <p:sp>
         <p:nvSpPr>
@@ -15115,7 +16009,7 @@
           <a:bodyPr wrap="square" rtlCol="0" anchor="ctr"/>
           <a:lstStyle/>
           <a:p>
-            <a:pPr indent="0" marL="0">
+            <a:pPr marL="0" indent="0">
               <a:buNone/>
             </a:pPr>
             <a:r>
@@ -15154,6 +16048,13 @@
             <a:prstDash val="solid"/>
           </a:ln>
         </p:spPr>
+        <p:txBody>
+          <a:bodyPr/>
+          <a:lstStyle/>
+          <a:p>
+            <a:endParaRPr lang="en-US"/>
+          </a:p>
+        </p:txBody>
       </p:sp>
       <p:sp>
         <p:nvSpPr>
@@ -15176,7 +16077,7 @@
           <a:bodyPr wrap="square" rtlCol="0" anchor="ctr"/>
           <a:lstStyle/>
           <a:p>
-            <a:pPr indent="0" marL="0">
+            <a:pPr marL="0" indent="0">
               <a:buNone/>
             </a:pPr>
             <a:r>
@@ -15215,6 +16116,13 @@
             <a:prstDash val="solid"/>
           </a:ln>
         </p:spPr>
+        <p:txBody>
+          <a:bodyPr/>
+          <a:lstStyle/>
+          <a:p>
+            <a:endParaRPr lang="en-US"/>
+          </a:p>
+        </p:txBody>
       </p:sp>
       <p:sp>
         <p:nvSpPr>
@@ -15237,7 +16145,7 @@
           <a:bodyPr wrap="square" rtlCol="0" anchor="ctr"/>
           <a:lstStyle/>
           <a:p>
-            <a:pPr indent="0" marL="0">
+            <a:pPr marL="0" indent="0">
               <a:buNone/>
             </a:pPr>
             <a:r>
@@ -15276,6 +16184,13 @@
             <a:prstDash val="solid"/>
           </a:ln>
         </p:spPr>
+        <p:txBody>
+          <a:bodyPr/>
+          <a:lstStyle/>
+          <a:p>
+            <a:endParaRPr lang="en-US"/>
+          </a:p>
+        </p:txBody>
       </p:sp>
       <p:sp>
         <p:nvSpPr>
@@ -15298,7 +16213,7 @@
           <a:bodyPr wrap="square" rtlCol="0" anchor="ctr"/>
           <a:lstStyle/>
           <a:p>
-            <a:pPr indent="0" marL="0">
+            <a:pPr marL="0" indent="0">
               <a:buNone/>
             </a:pPr>
             <a:r>
@@ -15337,6 +16252,13 @@
             <a:prstDash val="solid"/>
           </a:ln>
         </p:spPr>
+        <p:txBody>
+          <a:bodyPr/>
+          <a:lstStyle/>
+          <a:p>
+            <a:endParaRPr lang="en-US"/>
+          </a:p>
+        </p:txBody>
       </p:sp>
       <p:sp>
         <p:nvSpPr>
@@ -15359,7 +16281,7 @@
           <a:bodyPr wrap="square" rtlCol="0" anchor="ctr"/>
           <a:lstStyle/>
           <a:p>
-            <a:pPr indent="0" marL="0">
+            <a:pPr marL="0" indent="0">
               <a:buNone/>
             </a:pPr>
             <a:r>
@@ -15398,13 +16320,20 @@
             <a:prstDash val="solid"/>
           </a:ln>
           <a:effectLst>
-            <a:outerShdw sx="100000" sy="100000" kx="0" ky="0" algn="bl" rotWithShape="0" blurRad="101600" dist="25400" dir="8100000">
+            <a:outerShdw blurRad="101600" dist="25400" dir="8100000" algn="bl" rotWithShape="0">
               <a:srgbClr val="000000">
                 <a:alpha val="10000"/>
               </a:srgbClr>
             </a:outerShdw>
           </a:effectLst>
         </p:spPr>
+        <p:txBody>
+          <a:bodyPr/>
+          <a:lstStyle/>
+          <a:p>
+            <a:endParaRPr lang="en-US"/>
+          </a:p>
+        </p:txBody>
       </p:sp>
       <p:sp>
         <p:nvSpPr>
@@ -15430,6 +16359,13 @@
             <a:prstDash val="solid"/>
           </a:ln>
         </p:spPr>
+        <p:txBody>
+          <a:bodyPr/>
+          <a:lstStyle/>
+          <a:p>
+            <a:endParaRPr lang="en-US"/>
+          </a:p>
+        </p:txBody>
       </p:sp>
       <p:sp>
         <p:nvSpPr>
@@ -15452,7 +16388,7 @@
           <a:bodyPr wrap="square" lIns="0" tIns="0" rIns="0" bIns="0" rtlCol="0" anchor="ctr"/>
           <a:lstStyle/>
           <a:p>
-            <a:pPr algn="ctr" indent="0" marL="0">
+            <a:pPr marL="0" indent="0" algn="ctr">
               <a:buNone/>
             </a:pPr>
             <a:r>
@@ -15491,6 +16427,13 @@
             <a:prstDash val="solid"/>
           </a:ln>
         </p:spPr>
+        <p:txBody>
+          <a:bodyPr/>
+          <a:lstStyle/>
+          <a:p>
+            <a:endParaRPr lang="en-US"/>
+          </a:p>
+        </p:txBody>
       </p:sp>
       <p:sp>
         <p:nvSpPr>
@@ -15513,7 +16456,7 @@
           <a:bodyPr wrap="square" rtlCol="0" anchor="ctr"/>
           <a:lstStyle/>
           <a:p>
-            <a:pPr indent="0" marL="0">
+            <a:pPr marL="0" indent="0">
               <a:buNone/>
             </a:pPr>
             <a:r>
@@ -15552,6 +16495,13 @@
             <a:prstDash val="solid"/>
           </a:ln>
         </p:spPr>
+        <p:txBody>
+          <a:bodyPr/>
+          <a:lstStyle/>
+          <a:p>
+            <a:endParaRPr lang="en-US"/>
+          </a:p>
+        </p:txBody>
       </p:sp>
       <p:sp>
         <p:nvSpPr>
@@ -15574,7 +16524,7 @@
           <a:bodyPr wrap="square" rtlCol="0" anchor="ctr"/>
           <a:lstStyle/>
           <a:p>
-            <a:pPr indent="0" marL="0">
+            <a:pPr marL="0" indent="0">
               <a:buNone/>
             </a:pPr>
             <a:r>
@@ -15613,6 +16563,13 @@
             <a:prstDash val="solid"/>
           </a:ln>
         </p:spPr>
+        <p:txBody>
+          <a:bodyPr/>
+          <a:lstStyle/>
+          <a:p>
+            <a:endParaRPr lang="en-US"/>
+          </a:p>
+        </p:txBody>
       </p:sp>
       <p:sp>
         <p:nvSpPr>
@@ -15635,7 +16592,7 @@
           <a:bodyPr wrap="square" rtlCol="0" anchor="ctr"/>
           <a:lstStyle/>
           <a:p>
-            <a:pPr indent="0" marL="0">
+            <a:pPr marL="0" indent="0">
               <a:buNone/>
             </a:pPr>
             <a:r>
@@ -15674,6 +16631,13 @@
             <a:prstDash val="solid"/>
           </a:ln>
         </p:spPr>
+        <p:txBody>
+          <a:bodyPr/>
+          <a:lstStyle/>
+          <a:p>
+            <a:endParaRPr lang="en-US"/>
+          </a:p>
+        </p:txBody>
       </p:sp>
       <p:sp>
         <p:nvSpPr>
@@ -15696,7 +16660,7 @@
           <a:bodyPr wrap="square" rtlCol="0" anchor="ctr"/>
           <a:lstStyle/>
           <a:p>
-            <a:pPr indent="0" marL="0">
+            <a:pPr marL="0" indent="0">
               <a:buNone/>
             </a:pPr>
             <a:r>
@@ -15735,6 +16699,13 @@
             <a:prstDash val="solid"/>
           </a:ln>
         </p:spPr>
+        <p:txBody>
+          <a:bodyPr/>
+          <a:lstStyle/>
+          <a:p>
+            <a:endParaRPr lang="en-US"/>
+          </a:p>
+        </p:txBody>
       </p:sp>
       <p:sp>
         <p:nvSpPr>
@@ -15757,7 +16728,7 @@
           <a:bodyPr wrap="square" rtlCol="0" anchor="ctr"/>
           <a:lstStyle/>
           <a:p>
-            <a:pPr indent="0" marL="0">
+            <a:pPr marL="0" indent="0">
               <a:buNone/>
             </a:pPr>
             <a:r>
@@ -15796,6 +16767,13 @@
             <a:prstDash val="solid"/>
           </a:ln>
         </p:spPr>
+        <p:txBody>
+          <a:bodyPr/>
+          <a:lstStyle/>
+          <a:p>
+            <a:endParaRPr lang="en-US"/>
+          </a:p>
+        </p:txBody>
       </p:sp>
       <p:sp>
         <p:nvSpPr>
@@ -15818,7 +16796,7 @@
           <a:bodyPr wrap="square" rtlCol="0" anchor="ctr"/>
           <a:lstStyle/>
           <a:p>
-            <a:pPr indent="0" marL="0">
+            <a:pPr marL="0" indent="0">
               <a:buNone/>
             </a:pPr>
             <a:r>
@@ -15857,6 +16835,13 @@
             <a:prstDash val="solid"/>
           </a:ln>
         </p:spPr>
+        <p:txBody>
+          <a:bodyPr/>
+          <a:lstStyle/>
+          <a:p>
+            <a:endParaRPr lang="en-US"/>
+          </a:p>
+        </p:txBody>
       </p:sp>
       <p:sp>
         <p:nvSpPr>
@@ -15879,7 +16864,7 @@
           <a:bodyPr wrap="square" lIns="0" tIns="0" rIns="0" bIns="0" rtlCol="0" anchor="ctr"/>
           <a:lstStyle/>
           <a:p>
-            <a:pPr algn="ctr" indent="0" marL="0">
+            <a:pPr marL="0" indent="0" algn="ctr">
               <a:buNone/>
             </a:pPr>
             <a:r>
@@ -15910,6 +16895,7 @@
         <a:solidFill>
           <a:srgbClr val="F8F9FA"/>
         </a:solidFill>
+        <a:effectLst/>
       </p:bgPr>
     </p:bg>
     <p:spTree>
@@ -15950,6 +16936,13 @@
             <a:prstDash val="solid"/>
           </a:ln>
         </p:spPr>
+        <p:txBody>
+          <a:bodyPr/>
+          <a:lstStyle/>
+          <a:p>
+            <a:endParaRPr lang="en-US"/>
+          </a:p>
+        </p:txBody>
       </p:sp>
       <p:sp>
         <p:nvSpPr>
@@ -15972,7 +16965,7 @@
           <a:bodyPr wrap="square" lIns="0" tIns="0" rIns="0" bIns="0" rtlCol="0" anchor="ctr"/>
           <a:lstStyle/>
           <a:p>
-            <a:pPr indent="0" marL="0">
+            <a:pPr marL="0" indent="0">
               <a:buNone/>
             </a:pPr>
             <a:r>
@@ -16008,7 +17001,7 @@
           <a:bodyPr wrap="square" lIns="0" tIns="0" rIns="0" bIns="0" rtlCol="0" anchor="ctr"/>
           <a:lstStyle/>
           <a:p>
-            <a:pPr algn="ctr" indent="0" marL="0">
+            <a:pPr marL="0" indent="0" algn="ctr">
               <a:buNone/>
             </a:pPr>
             <a:r>
@@ -16047,13 +17040,20 @@
             <a:prstDash val="solid"/>
           </a:ln>
           <a:effectLst>
-            <a:outerShdw sx="100000" sy="100000" kx="0" ky="0" algn="bl" rotWithShape="0" blurRad="101600" dist="25400" dir="8100000">
+            <a:outerShdw blurRad="101600" dist="25400" dir="8100000" algn="bl" rotWithShape="0">
               <a:srgbClr val="000000">
                 <a:alpha val="10000"/>
               </a:srgbClr>
             </a:outerShdw>
           </a:effectLst>
         </p:spPr>
+        <p:txBody>
+          <a:bodyPr/>
+          <a:lstStyle/>
+          <a:p>
+            <a:endParaRPr lang="en-US"/>
+          </a:p>
+        </p:txBody>
       </p:sp>
       <p:sp>
         <p:nvSpPr>
@@ -16079,6 +17079,13 @@
             <a:prstDash val="solid"/>
           </a:ln>
         </p:spPr>
+        <p:txBody>
+          <a:bodyPr/>
+          <a:lstStyle/>
+          <a:p>
+            <a:endParaRPr lang="en-US"/>
+          </a:p>
+        </p:txBody>
       </p:sp>
       <p:sp>
         <p:nvSpPr>
@@ -16101,7 +17108,7 @@
           <a:bodyPr wrap="square" lIns="0" tIns="0" rIns="0" bIns="0" rtlCol="0" anchor="ctr"/>
           <a:lstStyle/>
           <a:p>
-            <a:pPr algn="ctr" indent="0" marL="0">
+            <a:pPr marL="0" indent="0" algn="ctr">
               <a:buNone/>
             </a:pPr>
             <a:r>
@@ -16137,7 +17144,7 @@
           <a:bodyPr wrap="square" rtlCol="0" anchor="ctr"/>
           <a:lstStyle/>
           <a:p>
-            <a:pPr algn="ctr" indent="0" marL="0">
+            <a:pPr marL="0" indent="0" algn="ctr">
               <a:buNone/>
             </a:pPr>
             <a:r>
@@ -16173,7 +17180,7 @@
           <a:bodyPr wrap="square" rtlCol="0" anchor="ctr"/>
           <a:lstStyle/>
           <a:p>
-            <a:pPr algn="ctr" indent="0" marL="0">
+            <a:pPr marL="0" indent="0" algn="ctr">
               <a:buNone/>
             </a:pPr>
             <a:r>
@@ -16209,7 +17216,7 @@
           <a:bodyPr wrap="square" rtlCol="0" anchor="ctr"/>
           <a:lstStyle/>
           <a:p>
-            <a:pPr algn="ctr" indent="0" marL="0">
+            <a:pPr marL="0" indent="0" algn="ctr">
               <a:buNone/>
             </a:pPr>
             <a:r>
@@ -16245,7 +17252,7 @@
           <a:bodyPr wrap="square" rtlCol="0" anchor="ctr"/>
           <a:lstStyle/>
           <a:p>
-            <a:pPr algn="ctr" indent="0" marL="0">
+            <a:pPr marL="0" indent="0" algn="ctr">
               <a:buNone/>
             </a:pPr>
             <a:r>
@@ -16254,7 +17261,7 @@
                   <a:srgbClr val="FFFFFF"/>
                 </a:solidFill>
               </a:rPr>
-              <a:t>Write your workflow as a JSON state machine — or use CDK/SAM to generate it from TypeScript. States, transitions, retries, and error handling all live here.</a:t>
+              <a:t>Write your workflow as a JSON state machine — or use CDK/SAM to generate it from TypeScript or Python. States, transitions, retries, and error handling all live here.</a:t>
             </a:r>
             <a:endParaRPr lang="en-US" sz="1200" dirty="0"/>
           </a:p>
@@ -16283,6 +17290,13 @@
             <a:tailEnd type="arrow"/>
           </a:ln>
         </p:spPr>
+        <p:txBody>
+          <a:bodyPr/>
+          <a:lstStyle/>
+          <a:p>
+            <a:endParaRPr lang="en-US"/>
+          </a:p>
+        </p:txBody>
       </p:sp>
       <p:sp>
         <p:nvSpPr>
@@ -16308,13 +17322,20 @@
             <a:prstDash val="solid"/>
           </a:ln>
           <a:effectLst>
-            <a:outerShdw sx="100000" sy="100000" kx="0" ky="0" algn="bl" rotWithShape="0" blurRad="101600" dist="25400" dir="8100000">
+            <a:outerShdw blurRad="101600" dist="25400" dir="8100000" algn="bl" rotWithShape="0">
               <a:srgbClr val="000000">
                 <a:alpha val="10000"/>
               </a:srgbClr>
             </a:outerShdw>
           </a:effectLst>
         </p:spPr>
+        <p:txBody>
+          <a:bodyPr/>
+          <a:lstStyle/>
+          <a:p>
+            <a:endParaRPr lang="en-US"/>
+          </a:p>
+        </p:txBody>
       </p:sp>
       <p:sp>
         <p:nvSpPr>
@@ -16340,6 +17361,13 @@
             <a:prstDash val="solid"/>
           </a:ln>
         </p:spPr>
+        <p:txBody>
+          <a:bodyPr/>
+          <a:lstStyle/>
+          <a:p>
+            <a:endParaRPr lang="en-US"/>
+          </a:p>
+        </p:txBody>
       </p:sp>
       <p:sp>
         <p:nvSpPr>
@@ -16362,7 +17390,7 @@
           <a:bodyPr wrap="square" lIns="0" tIns="0" rIns="0" bIns="0" rtlCol="0" anchor="ctr"/>
           <a:lstStyle/>
           <a:p>
-            <a:pPr algn="ctr" indent="0" marL="0">
+            <a:pPr marL="0" indent="0" algn="ctr">
               <a:buNone/>
             </a:pPr>
             <a:r>
@@ -16398,7 +17426,7 @@
           <a:bodyPr wrap="square" rtlCol="0" anchor="ctr"/>
           <a:lstStyle/>
           <a:p>
-            <a:pPr algn="ctr" indent="0" marL="0">
+            <a:pPr marL="0" indent="0" algn="ctr">
               <a:buNone/>
             </a:pPr>
             <a:r>
@@ -16434,7 +17462,7 @@
           <a:bodyPr wrap="square" rtlCol="0" anchor="ctr"/>
           <a:lstStyle/>
           <a:p>
-            <a:pPr algn="ctr" indent="0" marL="0">
+            <a:pPr marL="0" indent="0" algn="ctr">
               <a:buNone/>
             </a:pPr>
             <a:r>
@@ -16470,7 +17498,7 @@
           <a:bodyPr wrap="square" rtlCol="0" anchor="ctr"/>
           <a:lstStyle/>
           <a:p>
-            <a:pPr algn="ctr" indent="0" marL="0">
+            <a:pPr marL="0" indent="0" algn="ctr">
               <a:buNone/>
             </a:pPr>
             <a:r>
@@ -16506,7 +17534,7 @@
           <a:bodyPr wrap="square" rtlCol="0" anchor="ctr"/>
           <a:lstStyle/>
           <a:p>
-            <a:pPr algn="ctr" indent="0" marL="0">
+            <a:pPr marL="0" indent="0" algn="ctr">
               <a:buNone/>
             </a:pPr>
             <a:r>
@@ -16515,7 +17543,7 @@
                   <a:srgbClr val="FFFFFF"/>
                 </a:solidFill>
               </a:rPr>
-              <a:t>Step Functions hosts your state machine. The console renders it visually, tracks every execution, and stores the full history of each run.</a:t>
+              <a:t>The Step Functions service hosts your state machine. The console renders it visually, tracks every execution, and stores the full history of each run.</a:t>
             </a:r>
             <a:endParaRPr lang="en-US" sz="1200" dirty="0"/>
           </a:p>
@@ -16544,6 +17572,13 @@
             <a:tailEnd type="arrow"/>
           </a:ln>
         </p:spPr>
+        <p:txBody>
+          <a:bodyPr/>
+          <a:lstStyle/>
+          <a:p>
+            <a:endParaRPr lang="en-US"/>
+          </a:p>
+        </p:txBody>
       </p:sp>
       <p:sp>
         <p:nvSpPr>
@@ -16569,13 +17604,20 @@
             <a:prstDash val="solid"/>
           </a:ln>
           <a:effectLst>
-            <a:outerShdw sx="100000" sy="100000" kx="0" ky="0" algn="bl" rotWithShape="0" blurRad="101600" dist="25400" dir="8100000">
+            <a:outerShdw blurRad="101600" dist="25400" dir="8100000" algn="bl" rotWithShape="0">
               <a:srgbClr val="000000">
                 <a:alpha val="10000"/>
               </a:srgbClr>
             </a:outerShdw>
           </a:effectLst>
         </p:spPr>
+        <p:txBody>
+          <a:bodyPr/>
+          <a:lstStyle/>
+          <a:p>
+            <a:endParaRPr lang="en-US"/>
+          </a:p>
+        </p:txBody>
       </p:sp>
       <p:sp>
         <p:nvSpPr>
@@ -16601,6 +17643,13 @@
             <a:prstDash val="solid"/>
           </a:ln>
         </p:spPr>
+        <p:txBody>
+          <a:bodyPr/>
+          <a:lstStyle/>
+          <a:p>
+            <a:endParaRPr lang="en-US"/>
+          </a:p>
+        </p:txBody>
       </p:sp>
       <p:sp>
         <p:nvSpPr>
@@ -16623,7 +17672,7 @@
           <a:bodyPr wrap="square" lIns="0" tIns="0" rIns="0" bIns="0" rtlCol="0" anchor="ctr"/>
           <a:lstStyle/>
           <a:p>
-            <a:pPr algn="ctr" indent="0" marL="0">
+            <a:pPr marL="0" indent="0" algn="ctr">
               <a:buNone/>
             </a:pPr>
             <a:r>
@@ -16659,7 +17708,7 @@
           <a:bodyPr wrap="square" rtlCol="0" anchor="ctr"/>
           <a:lstStyle/>
           <a:p>
-            <a:pPr algn="ctr" indent="0" marL="0">
+            <a:pPr marL="0" indent="0" algn="ctr">
               <a:buNone/>
             </a:pPr>
             <a:r>
@@ -16695,7 +17744,7 @@
           <a:bodyPr wrap="square" rtlCol="0" anchor="ctr"/>
           <a:lstStyle/>
           <a:p>
-            <a:pPr algn="ctr" indent="0" marL="0">
+            <a:pPr marL="0" indent="0" algn="ctr">
               <a:buNone/>
             </a:pPr>
             <a:r>
@@ -16731,7 +17780,7 @@
           <a:bodyPr wrap="square" rtlCol="0" anchor="ctr"/>
           <a:lstStyle/>
           <a:p>
-            <a:pPr algn="ctr" indent="0" marL="0">
+            <a:pPr marL="0" indent="0" algn="ctr">
               <a:buNone/>
             </a:pPr>
             <a:r>
@@ -16767,7 +17816,7 @@
           <a:bodyPr wrap="square" rtlCol="0" anchor="ctr"/>
           <a:lstStyle/>
           <a:p>
-            <a:pPr algn="ctr" indent="0" marL="0">
+            <a:pPr marL="0" indent="0" algn="ctr">
               <a:buNone/>
             </a:pPr>
             <a:r>
@@ -16776,7 +17825,23 @@
                   <a:srgbClr val="FFFFFF"/>
                 </a:solidFill>
               </a:rPr>
-              <a:t>Trigger via API, EventBridge, API Gateway, or SDK. Watch each state transition in real-time — with inputs, outputs, and timing for every step.</a:t>
+              <a:t>Trigger via </a:t>
+            </a:r>
+            <a:r>
+              <a:rPr lang="en-US" sz="1200" dirty="0" err="1">
+                <a:solidFill>
+                  <a:srgbClr val="FFFFFF"/>
+                </a:solidFill>
+              </a:rPr>
+              <a:t>EventBridge</a:t>
+            </a:r>
+            <a:r>
+              <a:rPr lang="en-US" sz="1200" dirty="0">
+                <a:solidFill>
+                  <a:srgbClr val="FFFFFF"/>
+                </a:solidFill>
+              </a:rPr>
+              <a:t>, API Gateway, or SDK. Watch each state transition in real-time — with inputs, outputs, and timing for every step.</a:t>
             </a:r>
             <a:endParaRPr lang="en-US" sz="1200" dirty="0"/>
           </a:p>
@@ -16798,6 +17863,7 @@
         <a:solidFill>
           <a:srgbClr val="F8F9FA"/>
         </a:solidFill>
+        <a:effectLst/>
       </p:bgPr>
     </p:bg>
     <p:spTree>
@@ -16838,6 +17904,13 @@
             <a:prstDash val="solid"/>
           </a:ln>
         </p:spPr>
+        <p:txBody>
+          <a:bodyPr/>
+          <a:lstStyle/>
+          <a:p>
+            <a:endParaRPr lang="en-US"/>
+          </a:p>
+        </p:txBody>
       </p:sp>
       <p:sp>
         <p:nvSpPr>
@@ -16860,7 +17933,7 @@
           <a:bodyPr wrap="square" lIns="0" tIns="0" rIns="0" bIns="0" rtlCol="0" anchor="ctr"/>
           <a:lstStyle/>
           <a:p>
-            <a:pPr indent="0" marL="0">
+            <a:pPr marL="0" indent="0">
               <a:buNone/>
             </a:pPr>
             <a:r>
@@ -16896,7 +17969,7 @@
           <a:bodyPr wrap="square" lIns="0" tIns="0" rIns="0" bIns="0" rtlCol="0" anchor="ctr"/>
           <a:lstStyle/>
           <a:p>
-            <a:pPr algn="ctr" indent="0" marL="0">
+            <a:pPr marL="0" indent="0" algn="ctr">
               <a:buNone/>
             </a:pPr>
             <a:r>
@@ -16935,13 +18008,20 @@
             <a:prstDash val="solid"/>
           </a:ln>
           <a:effectLst>
-            <a:outerShdw sx="100000" sy="100000" kx="0" ky="0" algn="bl" rotWithShape="0" blurRad="101600" dist="25400" dir="8100000">
+            <a:outerShdw blurRad="101600" dist="25400" dir="8100000" algn="bl" rotWithShape="0">
               <a:srgbClr val="000000">
                 <a:alpha val="10000"/>
               </a:srgbClr>
             </a:outerShdw>
           </a:effectLst>
         </p:spPr>
+        <p:txBody>
+          <a:bodyPr/>
+          <a:lstStyle/>
+          <a:p>
+            <a:endParaRPr lang="en-US"/>
+          </a:p>
+        </p:txBody>
       </p:sp>
       <p:sp>
         <p:nvSpPr>
@@ -16967,6 +18047,13 @@
             <a:prstDash val="solid"/>
           </a:ln>
         </p:spPr>
+        <p:txBody>
+          <a:bodyPr/>
+          <a:lstStyle/>
+          <a:p>
+            <a:endParaRPr lang="en-US"/>
+          </a:p>
+        </p:txBody>
       </p:sp>
       <p:sp>
         <p:nvSpPr>
@@ -16989,7 +18076,7 @@
           <a:bodyPr wrap="square" rtlCol="0" anchor="ctr"/>
           <a:lstStyle/>
           <a:p>
-            <a:pPr algn="ctr" indent="0" marL="0">
+            <a:pPr marL="0" indent="0" algn="ctr">
               <a:buNone/>
             </a:pPr>
             <a:r>
@@ -17025,7 +18112,7 @@
           <a:bodyPr wrap="square" rtlCol="0" anchor="ctr"/>
           <a:lstStyle/>
           <a:p>
-            <a:pPr algn="ctr" indent="0" marL="0">
+            <a:pPr marL="0" indent="0" algn="ctr">
               <a:buNone/>
             </a:pPr>
             <a:r>
@@ -17061,7 +18148,7 @@
           <a:bodyPr wrap="square" rtlCol="0" anchor="ctr"/>
           <a:lstStyle/>
           <a:p>
-            <a:pPr algn="ctr" indent="0" marL="0">
+            <a:pPr marL="0" indent="0" algn="ctr">
               <a:buNone/>
             </a:pPr>
             <a:r>
@@ -17100,13 +18187,20 @@
             <a:prstDash val="solid"/>
           </a:ln>
           <a:effectLst>
-            <a:outerShdw sx="100000" sy="100000" kx="0" ky="0" algn="bl" rotWithShape="0" blurRad="101600" dist="25400" dir="8100000">
+            <a:outerShdw blurRad="101600" dist="25400" dir="8100000" algn="bl" rotWithShape="0">
               <a:srgbClr val="000000">
                 <a:alpha val="10000"/>
               </a:srgbClr>
             </a:outerShdw>
           </a:effectLst>
         </p:spPr>
+        <p:txBody>
+          <a:bodyPr/>
+          <a:lstStyle/>
+          <a:p>
+            <a:endParaRPr lang="en-US"/>
+          </a:p>
+        </p:txBody>
       </p:sp>
       <p:sp>
         <p:nvSpPr>
@@ -17132,6 +18226,13 @@
             <a:prstDash val="solid"/>
           </a:ln>
         </p:spPr>
+        <p:txBody>
+          <a:bodyPr/>
+          <a:lstStyle/>
+          <a:p>
+            <a:endParaRPr lang="en-US"/>
+          </a:p>
+        </p:txBody>
       </p:sp>
       <p:sp>
         <p:nvSpPr>
@@ -17154,7 +18255,7 @@
           <a:bodyPr wrap="square" rtlCol="0" anchor="ctr"/>
           <a:lstStyle/>
           <a:p>
-            <a:pPr algn="ctr" indent="0" marL="0">
+            <a:pPr marL="0" indent="0" algn="ctr">
               <a:buNone/>
             </a:pPr>
             <a:r>
@@ -17190,7 +18291,7 @@
           <a:bodyPr wrap="square" rtlCol="0" anchor="ctr"/>
           <a:lstStyle/>
           <a:p>
-            <a:pPr algn="ctr" indent="0" marL="0">
+            <a:pPr marL="0" indent="0" algn="ctr">
               <a:buNone/>
             </a:pPr>
             <a:r>
@@ -17226,7 +18327,7 @@
           <a:bodyPr wrap="square" rtlCol="0" anchor="ctr"/>
           <a:lstStyle/>
           <a:p>
-            <a:pPr algn="ctr" indent="0" marL="0">
+            <a:pPr marL="0" indent="0" algn="ctr">
               <a:buNone/>
             </a:pPr>
             <a:r>
@@ -17265,13 +18366,20 @@
             <a:prstDash val="solid"/>
           </a:ln>
           <a:effectLst>
-            <a:outerShdw sx="100000" sy="100000" kx="0" ky="0" algn="bl" rotWithShape="0" blurRad="101600" dist="25400" dir="8100000">
+            <a:outerShdw blurRad="101600" dist="25400" dir="8100000" algn="bl" rotWithShape="0">
               <a:srgbClr val="000000">
                 <a:alpha val="10000"/>
               </a:srgbClr>
             </a:outerShdw>
           </a:effectLst>
         </p:spPr>
+        <p:txBody>
+          <a:bodyPr/>
+          <a:lstStyle/>
+          <a:p>
+            <a:endParaRPr lang="en-US"/>
+          </a:p>
+        </p:txBody>
       </p:sp>
       <p:sp>
         <p:nvSpPr>
@@ -17297,6 +18405,13 @@
             <a:prstDash val="solid"/>
           </a:ln>
         </p:spPr>
+        <p:txBody>
+          <a:bodyPr/>
+          <a:lstStyle/>
+          <a:p>
+            <a:endParaRPr lang="en-US"/>
+          </a:p>
+        </p:txBody>
       </p:sp>
       <p:sp>
         <p:nvSpPr>
@@ -17319,7 +18434,7 @@
           <a:bodyPr wrap="square" rtlCol="0" anchor="ctr"/>
           <a:lstStyle/>
           <a:p>
-            <a:pPr algn="ctr" indent="0" marL="0">
+            <a:pPr marL="0" indent="0" algn="ctr">
               <a:buNone/>
             </a:pPr>
             <a:r>
@@ -17355,7 +18470,7 @@
           <a:bodyPr wrap="square" rtlCol="0" anchor="ctr"/>
           <a:lstStyle/>
           <a:p>
-            <a:pPr algn="ctr" indent="0" marL="0">
+            <a:pPr marL="0" indent="0" algn="ctr">
               <a:buNone/>
             </a:pPr>
             <a:r>
@@ -17391,7 +18506,7 @@
           <a:bodyPr wrap="square" rtlCol="0" anchor="ctr"/>
           <a:lstStyle/>
           <a:p>
-            <a:pPr algn="ctr" indent="0" marL="0">
+            <a:pPr marL="0" indent="0" algn="ctr">
               <a:buNone/>
             </a:pPr>
             <a:r>
@@ -17430,13 +18545,20 @@
             <a:prstDash val="solid"/>
           </a:ln>
           <a:effectLst>
-            <a:outerShdw sx="100000" sy="100000" kx="0" ky="0" algn="bl" rotWithShape="0" blurRad="101600" dist="25400" dir="8100000">
+            <a:outerShdw blurRad="101600" dist="25400" dir="8100000" algn="bl" rotWithShape="0">
               <a:srgbClr val="000000">
                 <a:alpha val="10000"/>
               </a:srgbClr>
             </a:outerShdw>
           </a:effectLst>
         </p:spPr>
+        <p:txBody>
+          <a:bodyPr/>
+          <a:lstStyle/>
+          <a:p>
+            <a:endParaRPr lang="en-US"/>
+          </a:p>
+        </p:txBody>
       </p:sp>
       <p:sp>
         <p:nvSpPr>
@@ -17462,6 +18584,13 @@
             <a:prstDash val="solid"/>
           </a:ln>
         </p:spPr>
+        <p:txBody>
+          <a:bodyPr/>
+          <a:lstStyle/>
+          <a:p>
+            <a:endParaRPr lang="en-US"/>
+          </a:p>
+        </p:txBody>
       </p:sp>
       <p:sp>
         <p:nvSpPr>
@@ -17484,7 +18613,7 @@
           <a:bodyPr wrap="square" rtlCol="0" anchor="ctr"/>
           <a:lstStyle/>
           <a:p>
-            <a:pPr algn="ctr" indent="0" marL="0">
+            <a:pPr marL="0" indent="0" algn="ctr">
               <a:buNone/>
             </a:pPr>
             <a:r>
@@ -17520,7 +18649,7 @@
           <a:bodyPr wrap="square" rtlCol="0" anchor="ctr"/>
           <a:lstStyle/>
           <a:p>
-            <a:pPr algn="ctr" indent="0" marL="0">
+            <a:pPr marL="0" indent="0" algn="ctr">
               <a:buNone/>
             </a:pPr>
             <a:r>
@@ -17556,7 +18685,7 @@
           <a:bodyPr wrap="square" rtlCol="0" anchor="ctr"/>
           <a:lstStyle/>
           <a:p>
-            <a:pPr algn="ctr" indent="0" marL="0">
+            <a:pPr marL="0" indent="0" algn="ctr">
               <a:buNone/>
             </a:pPr>
             <a:r>
@@ -17595,13 +18724,20 @@
             <a:prstDash val="solid"/>
           </a:ln>
           <a:effectLst>
-            <a:outerShdw sx="100000" sy="100000" kx="0" ky="0" algn="bl" rotWithShape="0" blurRad="101600" dist="25400" dir="8100000">
+            <a:outerShdw blurRad="101600" dist="25400" dir="8100000" algn="bl" rotWithShape="0">
               <a:srgbClr val="000000">
                 <a:alpha val="10000"/>
               </a:srgbClr>
             </a:outerShdw>
           </a:effectLst>
         </p:spPr>
+        <p:txBody>
+          <a:bodyPr/>
+          <a:lstStyle/>
+          <a:p>
+            <a:endParaRPr lang="en-US"/>
+          </a:p>
+        </p:txBody>
       </p:sp>
       <p:sp>
         <p:nvSpPr>
@@ -17627,6 +18763,13 @@
             <a:prstDash val="solid"/>
           </a:ln>
         </p:spPr>
+        <p:txBody>
+          <a:bodyPr/>
+          <a:lstStyle/>
+          <a:p>
+            <a:endParaRPr lang="en-US"/>
+          </a:p>
+        </p:txBody>
       </p:sp>
       <p:sp>
         <p:nvSpPr>
@@ -17649,7 +18792,7 @@
           <a:bodyPr wrap="square" rtlCol="0" anchor="ctr"/>
           <a:lstStyle/>
           <a:p>
-            <a:pPr algn="ctr" indent="0" marL="0">
+            <a:pPr marL="0" indent="0" algn="ctr">
               <a:buNone/>
             </a:pPr>
             <a:r>
@@ -17685,7 +18828,7 @@
           <a:bodyPr wrap="square" rtlCol="0" anchor="ctr"/>
           <a:lstStyle/>
           <a:p>
-            <a:pPr algn="ctr" indent="0" marL="0">
+            <a:pPr marL="0" indent="0" algn="ctr">
               <a:buNone/>
             </a:pPr>
             <a:r>
@@ -17721,7 +18864,7 @@
           <a:bodyPr wrap="square" rtlCol="0" anchor="ctr"/>
           <a:lstStyle/>
           <a:p>
-            <a:pPr algn="ctr" indent="0" marL="0">
+            <a:pPr marL="0" indent="0" algn="ctr">
               <a:buNone/>
             </a:pPr>
             <a:r>
@@ -17760,13 +18903,20 @@
             <a:prstDash val="solid"/>
           </a:ln>
           <a:effectLst>
-            <a:outerShdw sx="100000" sy="100000" kx="0" ky="0" algn="bl" rotWithShape="0" blurRad="101600" dist="25400" dir="8100000">
+            <a:outerShdw blurRad="101600" dist="25400" dir="8100000" algn="bl" rotWithShape="0">
               <a:srgbClr val="000000">
                 <a:alpha val="10000"/>
               </a:srgbClr>
             </a:outerShdw>
           </a:effectLst>
         </p:spPr>
+        <p:txBody>
+          <a:bodyPr/>
+          <a:lstStyle/>
+          <a:p>
+            <a:endParaRPr lang="en-US"/>
+          </a:p>
+        </p:txBody>
       </p:sp>
       <p:sp>
         <p:nvSpPr>
@@ -17792,6 +18942,13 @@
             <a:prstDash val="solid"/>
           </a:ln>
         </p:spPr>
+        <p:txBody>
+          <a:bodyPr/>
+          <a:lstStyle/>
+          <a:p>
+            <a:endParaRPr lang="en-US"/>
+          </a:p>
+        </p:txBody>
       </p:sp>
       <p:sp>
         <p:nvSpPr>
@@ -17814,7 +18971,7 @@
           <a:bodyPr wrap="square" rtlCol="0" anchor="ctr"/>
           <a:lstStyle/>
           <a:p>
-            <a:pPr algn="ctr" indent="0" marL="0">
+            <a:pPr marL="0" indent="0" algn="ctr">
               <a:buNone/>
             </a:pPr>
             <a:r>
@@ -17850,7 +19007,7 @@
           <a:bodyPr wrap="square" rtlCol="0" anchor="ctr"/>
           <a:lstStyle/>
           <a:p>
-            <a:pPr algn="ctr" indent="0" marL="0">
+            <a:pPr marL="0" indent="0" algn="ctr">
               <a:buNone/>
             </a:pPr>
             <a:r>
@@ -17886,7 +19043,7 @@
           <a:bodyPr wrap="square" rtlCol="0" anchor="ctr"/>
           <a:lstStyle/>
           <a:p>
-            <a:pPr algn="ctr" indent="0" marL="0">
+            <a:pPr marL="0" indent="0" algn="ctr">
               <a:buNone/>
             </a:pPr>
             <a:r>
@@ -17925,13 +19082,20 @@
             <a:prstDash val="solid"/>
           </a:ln>
           <a:effectLst>
-            <a:outerShdw sx="100000" sy="100000" kx="0" ky="0" algn="bl" rotWithShape="0" blurRad="101600" dist="25400" dir="8100000">
+            <a:outerShdw blurRad="101600" dist="25400" dir="8100000" algn="bl" rotWithShape="0">
               <a:srgbClr val="000000">
                 <a:alpha val="10000"/>
               </a:srgbClr>
             </a:outerShdw>
           </a:effectLst>
         </p:spPr>
+        <p:txBody>
+          <a:bodyPr/>
+          <a:lstStyle/>
+          <a:p>
+            <a:endParaRPr lang="en-US"/>
+          </a:p>
+        </p:txBody>
       </p:sp>
       <p:sp>
         <p:nvSpPr>
@@ -17957,6 +19121,13 @@
             <a:prstDash val="solid"/>
           </a:ln>
         </p:spPr>
+        <p:txBody>
+          <a:bodyPr/>
+          <a:lstStyle/>
+          <a:p>
+            <a:endParaRPr lang="en-US"/>
+          </a:p>
+        </p:txBody>
       </p:sp>
       <p:sp>
         <p:nvSpPr>
@@ -17979,7 +19150,7 @@
           <a:bodyPr wrap="square" rtlCol="0" anchor="ctr"/>
           <a:lstStyle/>
           <a:p>
-            <a:pPr algn="ctr" indent="0" marL="0">
+            <a:pPr marL="0" indent="0" algn="ctr">
               <a:buNone/>
             </a:pPr>
             <a:r>
@@ -18015,7 +19186,7 @@
           <a:bodyPr wrap="square" rtlCol="0" anchor="ctr"/>
           <a:lstStyle/>
           <a:p>
-            <a:pPr algn="ctr" indent="0" marL="0">
+            <a:pPr marL="0" indent="0" algn="ctr">
               <a:buNone/>
             </a:pPr>
             <a:r>
@@ -18051,7 +19222,7 @@
           <a:bodyPr wrap="square" rtlCol="0" anchor="ctr"/>
           <a:lstStyle/>
           <a:p>
-            <a:pPr algn="ctr" indent="0" marL="0">
+            <a:pPr marL="0" indent="0" algn="ctr">
               <a:buNone/>
             </a:pPr>
             <a:r>
@@ -18090,13 +19261,20 @@
             <a:prstDash val="solid"/>
           </a:ln>
           <a:effectLst>
-            <a:outerShdw sx="100000" sy="100000" kx="0" ky="0" algn="bl" rotWithShape="0" blurRad="101600" dist="25400" dir="8100000">
+            <a:outerShdw blurRad="101600" dist="25400" dir="8100000" algn="bl" rotWithShape="0">
               <a:srgbClr val="000000">
                 <a:alpha val="10000"/>
               </a:srgbClr>
             </a:outerShdw>
           </a:effectLst>
         </p:spPr>
+        <p:txBody>
+          <a:bodyPr/>
+          <a:lstStyle/>
+          <a:p>
+            <a:endParaRPr lang="en-US"/>
+          </a:p>
+        </p:txBody>
       </p:sp>
       <p:sp>
         <p:nvSpPr>
@@ -18122,6 +19300,13 @@
             <a:prstDash val="solid"/>
           </a:ln>
         </p:spPr>
+        <p:txBody>
+          <a:bodyPr/>
+          <a:lstStyle/>
+          <a:p>
+            <a:endParaRPr lang="en-US"/>
+          </a:p>
+        </p:txBody>
       </p:sp>
       <p:sp>
         <p:nvSpPr>
@@ -18144,7 +19329,7 @@
           <a:bodyPr wrap="square" rtlCol="0" anchor="ctr"/>
           <a:lstStyle/>
           <a:p>
-            <a:pPr algn="ctr" indent="0" marL="0">
+            <a:pPr marL="0" indent="0" algn="ctr">
               <a:buNone/>
             </a:pPr>
             <a:r>
@@ -18180,7 +19365,7 @@
           <a:bodyPr wrap="square" rtlCol="0" anchor="ctr"/>
           <a:lstStyle/>
           <a:p>
-            <a:pPr algn="ctr" indent="0" marL="0">
+            <a:pPr marL="0" indent="0" algn="ctr">
               <a:buNone/>
             </a:pPr>
             <a:r>
@@ -18216,7 +19401,7 @@
           <a:bodyPr wrap="square" rtlCol="0" anchor="ctr"/>
           <a:lstStyle/>
           <a:p>
-            <a:pPr algn="ctr" indent="0" marL="0">
+            <a:pPr marL="0" indent="0" algn="ctr">
               <a:buNone/>
             </a:pPr>
             <a:r>
@@ -18247,6 +19432,7 @@
         <a:solidFill>
           <a:srgbClr val="F8F9FA"/>
         </a:solidFill>
+        <a:effectLst/>
       </p:bgPr>
     </p:bg>
     <p:spTree>
@@ -18287,6 +19473,13 @@
             <a:prstDash val="solid"/>
           </a:ln>
         </p:spPr>
+        <p:txBody>
+          <a:bodyPr/>
+          <a:lstStyle/>
+          <a:p>
+            <a:endParaRPr lang="en-US"/>
+          </a:p>
+        </p:txBody>
       </p:sp>
       <p:sp>
         <p:nvSpPr>
@@ -18309,7 +19502,7 @@
           <a:bodyPr wrap="square" lIns="0" tIns="0" rIns="0" bIns="0" rtlCol="0" anchor="ctr"/>
           <a:lstStyle/>
           <a:p>
-            <a:pPr indent="0" marL="0">
+            <a:pPr marL="0" indent="0">
               <a:buNone/>
             </a:pPr>
             <a:r>
@@ -18345,7 +19538,7 @@
           <a:bodyPr wrap="square" lIns="0" tIns="0" rIns="0" bIns="0" rtlCol="0" anchor="ctr"/>
           <a:lstStyle/>
           <a:p>
-            <a:pPr algn="ctr" indent="0" marL="0">
+            <a:pPr marL="0" indent="0" algn="ctr">
               <a:buNone/>
             </a:pPr>
             <a:r>
@@ -18384,13 +19577,20 @@
             <a:prstDash val="solid"/>
           </a:ln>
           <a:effectLst>
-            <a:outerShdw sx="100000" sy="100000" kx="0" ky="0" algn="bl" rotWithShape="0" blurRad="101600" dist="25400" dir="8100000">
+            <a:outerShdw blurRad="101600" dist="25400" dir="8100000" algn="bl" rotWithShape="0">
               <a:srgbClr val="000000">
                 <a:alpha val="10000"/>
               </a:srgbClr>
             </a:outerShdw>
           </a:effectLst>
         </p:spPr>
+        <p:txBody>
+          <a:bodyPr/>
+          <a:lstStyle/>
+          <a:p>
+            <a:endParaRPr lang="en-US"/>
+          </a:p>
+        </p:txBody>
       </p:sp>
       <p:sp>
         <p:nvSpPr>
@@ -18416,6 +19616,13 @@
             <a:prstDash val="solid"/>
           </a:ln>
         </p:spPr>
+        <p:txBody>
+          <a:bodyPr/>
+          <a:lstStyle/>
+          <a:p>
+            <a:endParaRPr lang="en-US"/>
+          </a:p>
+        </p:txBody>
       </p:sp>
       <p:sp>
         <p:nvSpPr>
@@ -18438,7 +19645,7 @@
           <a:bodyPr wrap="square" lIns="0" tIns="0" rIns="0" bIns="0" rtlCol="0" anchor="ctr"/>
           <a:lstStyle/>
           <a:p>
-            <a:pPr algn="ctr" indent="0" marL="0">
+            <a:pPr marL="0" indent="0" algn="ctr">
               <a:buNone/>
             </a:pPr>
             <a:r>
@@ -18477,6 +19684,13 @@
             <a:prstDash val="solid"/>
           </a:ln>
         </p:spPr>
+        <p:txBody>
+          <a:bodyPr/>
+          <a:lstStyle/>
+          <a:p>
+            <a:endParaRPr lang="en-US"/>
+          </a:p>
+        </p:txBody>
       </p:sp>
       <p:sp>
         <p:nvSpPr>
@@ -18499,7 +19713,7 @@
           <a:bodyPr wrap="square" rtlCol="0" anchor="ctr"/>
           <a:lstStyle/>
           <a:p>
-            <a:pPr indent="0" marL="0">
+            <a:pPr marL="0" indent="0">
               <a:buNone/>
             </a:pPr>
             <a:r>
@@ -18535,7 +19749,7 @@
           <a:bodyPr wrap="square" rtlCol="0" anchor="ctr"/>
           <a:lstStyle/>
           <a:p>
-            <a:pPr indent="0" marL="0">
+            <a:pPr marL="0" indent="0">
               <a:buNone/>
             </a:pPr>
             <a:r>
@@ -18574,6 +19788,13 @@
             <a:prstDash val="solid"/>
           </a:ln>
         </p:spPr>
+        <p:txBody>
+          <a:bodyPr/>
+          <a:lstStyle/>
+          <a:p>
+            <a:endParaRPr lang="en-US"/>
+          </a:p>
+        </p:txBody>
       </p:sp>
       <p:sp>
         <p:nvSpPr>
@@ -18596,7 +19817,7 @@
           <a:bodyPr wrap="square" rtlCol="0" anchor="ctr"/>
           <a:lstStyle/>
           <a:p>
-            <a:pPr indent="0" marL="0">
+            <a:pPr marL="0" indent="0">
               <a:buNone/>
             </a:pPr>
             <a:r>
@@ -18632,7 +19853,7 @@
           <a:bodyPr wrap="square" rtlCol="0" anchor="ctr"/>
           <a:lstStyle/>
           <a:p>
-            <a:pPr indent="0" marL="0">
+            <a:pPr marL="0" indent="0">
               <a:buNone/>
             </a:pPr>
             <a:r>
@@ -18671,6 +19892,13 @@
             <a:prstDash val="solid"/>
           </a:ln>
         </p:spPr>
+        <p:txBody>
+          <a:bodyPr/>
+          <a:lstStyle/>
+          <a:p>
+            <a:endParaRPr lang="en-US"/>
+          </a:p>
+        </p:txBody>
       </p:sp>
       <p:sp>
         <p:nvSpPr>
@@ -18693,7 +19921,7 @@
           <a:bodyPr wrap="square" rtlCol="0" anchor="ctr"/>
           <a:lstStyle/>
           <a:p>
-            <a:pPr indent="0" marL="0">
+            <a:pPr marL="0" indent="0">
               <a:buNone/>
             </a:pPr>
             <a:r>
@@ -18729,7 +19957,7 @@
           <a:bodyPr wrap="square" rtlCol="0" anchor="ctr"/>
           <a:lstStyle/>
           <a:p>
-            <a:pPr indent="0" marL="0">
+            <a:pPr marL="0" indent="0">
               <a:buNone/>
             </a:pPr>
             <a:r>
@@ -18768,6 +19996,13 @@
             <a:prstDash val="solid"/>
           </a:ln>
         </p:spPr>
+        <p:txBody>
+          <a:bodyPr/>
+          <a:lstStyle/>
+          <a:p>
+            <a:endParaRPr lang="en-US"/>
+          </a:p>
+        </p:txBody>
       </p:sp>
       <p:sp>
         <p:nvSpPr>
@@ -18790,7 +20025,7 @@
           <a:bodyPr wrap="square" rtlCol="0" anchor="ctr"/>
           <a:lstStyle/>
           <a:p>
-            <a:pPr indent="0" marL="0">
+            <a:pPr marL="0" indent="0">
               <a:buNone/>
             </a:pPr>
             <a:r>
@@ -18826,7 +20061,7 @@
           <a:bodyPr wrap="square" rtlCol="0" anchor="ctr"/>
           <a:lstStyle/>
           <a:p>
-            <a:pPr indent="0" marL="0">
+            <a:pPr marL="0" indent="0">
               <a:buNone/>
             </a:pPr>
             <a:r>
@@ -18865,6 +20100,13 @@
             <a:prstDash val="solid"/>
           </a:ln>
         </p:spPr>
+        <p:txBody>
+          <a:bodyPr/>
+          <a:lstStyle/>
+          <a:p>
+            <a:endParaRPr lang="en-US"/>
+          </a:p>
+        </p:txBody>
       </p:sp>
       <p:sp>
         <p:nvSpPr>
@@ -18887,7 +20129,7 @@
           <a:bodyPr wrap="square" rtlCol="0" anchor="ctr"/>
           <a:lstStyle/>
           <a:p>
-            <a:pPr indent="0" marL="0">
+            <a:pPr marL="0" indent="0">
               <a:buNone/>
             </a:pPr>
             <a:r>
@@ -18923,7 +20165,7 @@
           <a:bodyPr wrap="square" rtlCol="0" anchor="ctr"/>
           <a:lstStyle/>
           <a:p>
-            <a:pPr indent="0" marL="0">
+            <a:pPr marL="0" indent="0">
               <a:buNone/>
             </a:pPr>
             <a:r>
@@ -18962,6 +20204,13 @@
             <a:prstDash val="solid"/>
           </a:ln>
         </p:spPr>
+        <p:txBody>
+          <a:bodyPr/>
+          <a:lstStyle/>
+          <a:p>
+            <a:endParaRPr lang="en-US"/>
+          </a:p>
+        </p:txBody>
       </p:sp>
       <p:sp>
         <p:nvSpPr>
@@ -18984,7 +20233,7 @@
           <a:bodyPr wrap="square" rtlCol="0" anchor="ctr"/>
           <a:lstStyle/>
           <a:p>
-            <a:pPr indent="0" marL="0">
+            <a:pPr marL="0" indent="0">
               <a:buNone/>
             </a:pPr>
             <a:r>
@@ -19020,7 +20269,7 @@
           <a:bodyPr wrap="square" rtlCol="0" anchor="ctr"/>
           <a:lstStyle/>
           <a:p>
-            <a:pPr indent="0" marL="0">
+            <a:pPr marL="0" indent="0">
               <a:buNone/>
             </a:pPr>
             <a:r>
@@ -19059,13 +20308,20 @@
             <a:prstDash val="solid"/>
           </a:ln>
           <a:effectLst>
-            <a:outerShdw sx="100000" sy="100000" kx="0" ky="0" algn="bl" rotWithShape="0" blurRad="101600" dist="25400" dir="8100000">
+            <a:outerShdw blurRad="101600" dist="25400" dir="8100000" algn="bl" rotWithShape="0">
               <a:srgbClr val="000000">
                 <a:alpha val="10000"/>
               </a:srgbClr>
             </a:outerShdw>
           </a:effectLst>
         </p:spPr>
+        <p:txBody>
+          <a:bodyPr/>
+          <a:lstStyle/>
+          <a:p>
+            <a:endParaRPr lang="en-US"/>
+          </a:p>
+        </p:txBody>
       </p:sp>
       <p:sp>
         <p:nvSpPr>
@@ -19091,6 +20347,13 @@
             <a:prstDash val="solid"/>
           </a:ln>
         </p:spPr>
+        <p:txBody>
+          <a:bodyPr/>
+          <a:lstStyle/>
+          <a:p>
+            <a:endParaRPr lang="en-US"/>
+          </a:p>
+        </p:txBody>
       </p:sp>
       <p:sp>
         <p:nvSpPr>
@@ -19113,7 +20376,7 @@
           <a:bodyPr wrap="square" lIns="0" tIns="0" rIns="0" bIns="0" rtlCol="0" anchor="ctr"/>
           <a:lstStyle/>
           <a:p>
-            <a:pPr algn="ctr" indent="0" marL="0">
+            <a:pPr marL="0" indent="0" algn="ctr">
               <a:buNone/>
             </a:pPr>
             <a:r>
@@ -19152,6 +20415,13 @@
             <a:prstDash val="solid"/>
           </a:ln>
         </p:spPr>
+        <p:txBody>
+          <a:bodyPr/>
+          <a:lstStyle/>
+          <a:p>
+            <a:endParaRPr lang="en-US"/>
+          </a:p>
+        </p:txBody>
       </p:sp>
       <p:sp>
         <p:nvSpPr>
@@ -19174,7 +20444,7 @@
           <a:bodyPr wrap="square" rtlCol="0" anchor="ctr"/>
           <a:lstStyle/>
           <a:p>
-            <a:pPr indent="0" marL="0">
+            <a:pPr marL="0" indent="0">
               <a:buNone/>
             </a:pPr>
             <a:r>
@@ -19210,7 +20480,7 @@
           <a:bodyPr wrap="square" rtlCol="0" anchor="ctr"/>
           <a:lstStyle/>
           <a:p>
-            <a:pPr indent="0" marL="0">
+            <a:pPr marL="0" indent="0">
               <a:buNone/>
             </a:pPr>
             <a:r>
@@ -19249,6 +20519,13 @@
             <a:prstDash val="solid"/>
           </a:ln>
         </p:spPr>
+        <p:txBody>
+          <a:bodyPr/>
+          <a:lstStyle/>
+          <a:p>
+            <a:endParaRPr lang="en-US"/>
+          </a:p>
+        </p:txBody>
       </p:sp>
       <p:sp>
         <p:nvSpPr>
@@ -19271,7 +20548,7 @@
           <a:bodyPr wrap="square" rtlCol="0" anchor="ctr"/>
           <a:lstStyle/>
           <a:p>
-            <a:pPr indent="0" marL="0">
+            <a:pPr marL="0" indent="0">
               <a:buNone/>
             </a:pPr>
             <a:r>
@@ -19307,7 +20584,7 @@
           <a:bodyPr wrap="square" rtlCol="0" anchor="ctr"/>
           <a:lstStyle/>
           <a:p>
-            <a:pPr indent="0" marL="0">
+            <a:pPr marL="0" indent="0">
               <a:buNone/>
             </a:pPr>
             <a:r>
@@ -19346,6 +20623,13 @@
             <a:prstDash val="solid"/>
           </a:ln>
         </p:spPr>
+        <p:txBody>
+          <a:bodyPr/>
+          <a:lstStyle/>
+          <a:p>
+            <a:endParaRPr lang="en-US"/>
+          </a:p>
+        </p:txBody>
       </p:sp>
       <p:sp>
         <p:nvSpPr>
@@ -19368,7 +20652,7 @@
           <a:bodyPr wrap="square" rtlCol="0" anchor="ctr"/>
           <a:lstStyle/>
           <a:p>
-            <a:pPr indent="0" marL="0">
+            <a:pPr marL="0" indent="0">
               <a:buNone/>
             </a:pPr>
             <a:r>
@@ -19404,7 +20688,7 @@
           <a:bodyPr wrap="square" rtlCol="0" anchor="ctr"/>
           <a:lstStyle/>
           <a:p>
-            <a:pPr indent="0" marL="0">
+            <a:pPr marL="0" indent="0">
               <a:buNone/>
             </a:pPr>
             <a:r>
@@ -19443,6 +20727,13 @@
             <a:prstDash val="solid"/>
           </a:ln>
         </p:spPr>
+        <p:txBody>
+          <a:bodyPr/>
+          <a:lstStyle/>
+          <a:p>
+            <a:endParaRPr lang="en-US"/>
+          </a:p>
+        </p:txBody>
       </p:sp>
       <p:sp>
         <p:nvSpPr>
@@ -19465,7 +20756,7 @@
           <a:bodyPr wrap="square" rtlCol="0" anchor="ctr"/>
           <a:lstStyle/>
           <a:p>
-            <a:pPr indent="0" marL="0">
+            <a:pPr marL="0" indent="0">
               <a:buNone/>
             </a:pPr>
             <a:r>
@@ -19501,7 +20792,7 @@
           <a:bodyPr wrap="square" rtlCol="0" anchor="ctr"/>
           <a:lstStyle/>
           <a:p>
-            <a:pPr indent="0" marL="0">
+            <a:pPr marL="0" indent="0">
               <a:buNone/>
             </a:pPr>
             <a:r>
@@ -19540,6 +20831,13 @@
             <a:prstDash val="solid"/>
           </a:ln>
         </p:spPr>
+        <p:txBody>
+          <a:bodyPr/>
+          <a:lstStyle/>
+          <a:p>
+            <a:endParaRPr lang="en-US"/>
+          </a:p>
+        </p:txBody>
       </p:sp>
       <p:sp>
         <p:nvSpPr>
@@ -19562,7 +20860,7 @@
           <a:bodyPr wrap="square" rtlCol="0" anchor="ctr"/>
           <a:lstStyle/>
           <a:p>
-            <a:pPr indent="0" marL="0">
+            <a:pPr marL="0" indent="0">
               <a:buNone/>
             </a:pPr>
             <a:r>
@@ -19598,7 +20896,7 @@
           <a:bodyPr wrap="square" rtlCol="0" anchor="ctr"/>
           <a:lstStyle/>
           <a:p>
-            <a:pPr indent="0" marL="0">
+            <a:pPr marL="0" indent="0">
               <a:buNone/>
             </a:pPr>
             <a:r>
@@ -19637,6 +20935,13 @@
             <a:prstDash val="solid"/>
           </a:ln>
         </p:spPr>
+        <p:txBody>
+          <a:bodyPr/>
+          <a:lstStyle/>
+          <a:p>
+            <a:endParaRPr lang="en-US"/>
+          </a:p>
+        </p:txBody>
       </p:sp>
       <p:sp>
         <p:nvSpPr>
@@ -19659,7 +20964,7 @@
           <a:bodyPr wrap="square" rtlCol="0" anchor="ctr"/>
           <a:lstStyle/>
           <a:p>
-            <a:pPr indent="0" marL="0">
+            <a:pPr marL="0" indent="0">
               <a:buNone/>
             </a:pPr>
             <a:r>
@@ -19695,7 +21000,7 @@
           <a:bodyPr wrap="square" rtlCol="0" anchor="ctr"/>
           <a:lstStyle/>
           <a:p>
-            <a:pPr indent="0" marL="0">
+            <a:pPr marL="0" indent="0">
               <a:buNone/>
             </a:pPr>
             <a:r>
@@ -19734,6 +21039,13 @@
             <a:prstDash val="solid"/>
           </a:ln>
         </p:spPr>
+        <p:txBody>
+          <a:bodyPr/>
+          <a:lstStyle/>
+          <a:p>
+            <a:endParaRPr lang="en-US"/>
+          </a:p>
+        </p:txBody>
       </p:sp>
       <p:sp>
         <p:nvSpPr>
@@ -19756,7 +21068,7 @@
           <a:bodyPr wrap="square" lIns="0" tIns="0" rIns="0" bIns="0" rtlCol="0" anchor="ctr"/>
           <a:lstStyle/>
           <a:p>
-            <a:pPr algn="ctr" indent="0" marL="0">
+            <a:pPr marL="0" indent="0" algn="ctr">
               <a:buNone/>
             </a:pPr>
             <a:r>
@@ -20072,4 +21384,341 @@
     </a:ext>
   </a:extLst>
 </a:theme>
+</file>
+
+<file path=ppt/theme/theme2.xml><?xml version="1.0" encoding="utf-8"?>
+<a:theme xmlns:a="http://schemas.openxmlformats.org/drawingml/2006/main" name="Office Theme">
+  <a:themeElements>
+    <a:clrScheme name="Office">
+      <a:dk1>
+        <a:sysClr val="windowText" lastClr="000000"/>
+      </a:dk1>
+      <a:lt1>
+        <a:sysClr val="window" lastClr="FFFFFF"/>
+      </a:lt1>
+      <a:dk2>
+        <a:srgbClr val="0E2841"/>
+      </a:dk2>
+      <a:lt2>
+        <a:srgbClr val="E8E8E8"/>
+      </a:lt2>
+      <a:accent1>
+        <a:srgbClr val="156082"/>
+      </a:accent1>
+      <a:accent2>
+        <a:srgbClr val="E97132"/>
+      </a:accent2>
+      <a:accent3>
+        <a:srgbClr val="196B24"/>
+      </a:accent3>
+      <a:accent4>
+        <a:srgbClr val="0F9ED5"/>
+      </a:accent4>
+      <a:accent5>
+        <a:srgbClr val="A02B93"/>
+      </a:accent5>
+      <a:accent6>
+        <a:srgbClr val="4EA72E"/>
+      </a:accent6>
+      <a:hlink>
+        <a:srgbClr val="467886"/>
+      </a:hlink>
+      <a:folHlink>
+        <a:srgbClr val="96607D"/>
+      </a:folHlink>
+    </a:clrScheme>
+    <a:fontScheme name="Office">
+      <a:majorFont>
+        <a:latin typeface="Aptos Display" panose="02110004020202020204"/>
+        <a:ea typeface=""/>
+        <a:cs typeface=""/>
+        <a:font script="Jpan" typeface="游ゴシック Light"/>
+        <a:font script="Hang" typeface="맑은 고딕"/>
+        <a:font script="Hans" typeface="等线 Light"/>
+        <a:font script="Hant" typeface="新細明體"/>
+        <a:font script="Arab" typeface="Times New Roman"/>
+        <a:font script="Hebr" typeface="Times New Roman"/>
+        <a:font script="Thai" typeface="Angsana New"/>
+        <a:font script="Ethi" typeface="Nyala"/>
+        <a:font script="Beng" typeface="Vrinda"/>
+        <a:font script="Gujr" typeface="Shruti"/>
+        <a:font script="Khmr" typeface="MoolBoran"/>
+        <a:font script="Knda" typeface="Tunga"/>
+        <a:font script="Guru" typeface="Raavi"/>
+        <a:font script="Cans" typeface="Euphemia"/>
+        <a:font script="Cher" typeface="Plantagenet Cherokee"/>
+        <a:font script="Yiii" typeface="Microsoft Yi Baiti"/>
+        <a:font script="Tibt" typeface="Microsoft Himalaya"/>
+        <a:font script="Thaa" typeface="MV Boli"/>
+        <a:font script="Deva" typeface="Mangal"/>
+        <a:font script="Telu" typeface="Gautami"/>
+        <a:font script="Taml" typeface="Latha"/>
+        <a:font script="Syrc" typeface="Estrangelo Edessa"/>
+        <a:font script="Orya" typeface="Kalinga"/>
+        <a:font script="Mlym" typeface="Kartika"/>
+        <a:font script="Laoo" typeface="DokChampa"/>
+        <a:font script="Sinh" typeface="Iskoola Pota"/>
+        <a:font script="Mong" typeface="Mongolian Baiti"/>
+        <a:font script="Viet" typeface="Times New Roman"/>
+        <a:font script="Uigh" typeface="Microsoft Uighur"/>
+        <a:font script="Geor" typeface="Sylfaen"/>
+        <a:font script="Armn" typeface="Arial"/>
+        <a:font script="Bugi" typeface="Leelawadee UI"/>
+        <a:font script="Bopo" typeface="Microsoft JhengHei"/>
+        <a:font script="Java" typeface="Javanese Text"/>
+        <a:font script="Lisu" typeface="Segoe UI"/>
+        <a:font script="Mymr" typeface="Myanmar Text"/>
+        <a:font script="Nkoo" typeface="Ebrima"/>
+        <a:font script="Olck" typeface="Nirmala UI"/>
+        <a:font script="Osma" typeface="Ebrima"/>
+        <a:font script="Phag" typeface="Phagspa"/>
+        <a:font script="Syrn" typeface="Estrangelo Edessa"/>
+        <a:font script="Syrj" typeface="Estrangelo Edessa"/>
+        <a:font script="Syre" typeface="Estrangelo Edessa"/>
+        <a:font script="Sora" typeface="Nirmala UI"/>
+        <a:font script="Tale" typeface="Microsoft Tai Le"/>
+        <a:font script="Talu" typeface="Microsoft New Tai Lue"/>
+        <a:font script="Tfng" typeface="Ebrima"/>
+      </a:majorFont>
+      <a:minorFont>
+        <a:latin typeface="Aptos" panose="02110004020202020204"/>
+        <a:ea typeface=""/>
+        <a:cs typeface=""/>
+        <a:font script="Jpan" typeface="游ゴシック"/>
+        <a:font script="Hang" typeface="맑은 고딕"/>
+        <a:font script="Hans" typeface="等线"/>
+        <a:font script="Hant" typeface="新細明體"/>
+        <a:font script="Arab" typeface="Arial"/>
+        <a:font script="Hebr" typeface="Arial"/>
+        <a:font script="Thai" typeface="Cordia New"/>
+        <a:font script="Ethi" typeface="Nyala"/>
+        <a:font script="Beng" typeface="Vrinda"/>
+        <a:font script="Gujr" typeface="Shruti"/>
+        <a:font script="Khmr" typeface="DaunPenh"/>
+        <a:font script="Knda" typeface="Tunga"/>
+        <a:font script="Guru" typeface="Raavi"/>
+        <a:font script="Cans" typeface="Euphemia"/>
+        <a:font script="Cher" typeface="Plantagenet Cherokee"/>
+        <a:font script="Yiii" typeface="Microsoft Yi Baiti"/>
+        <a:font script="Tibt" typeface="Microsoft Himalaya"/>
+        <a:font script="Thaa" typeface="MV Boli"/>
+        <a:font script="Deva" typeface="Mangal"/>
+        <a:font script="Telu" typeface="Gautami"/>
+        <a:font script="Taml" typeface="Latha"/>
+        <a:font script="Syrc" typeface="Estrangelo Edessa"/>
+        <a:font script="Orya" typeface="Kalinga"/>
+        <a:font script="Mlym" typeface="Kartika"/>
+        <a:font script="Laoo" typeface="DokChampa"/>
+        <a:font script="Sinh" typeface="Iskoola Pota"/>
+        <a:font script="Mong" typeface="Mongolian Baiti"/>
+        <a:font script="Viet" typeface="Arial"/>
+        <a:font script="Uigh" typeface="Microsoft Uighur"/>
+        <a:font script="Geor" typeface="Sylfaen"/>
+        <a:font script="Armn" typeface="Arial"/>
+        <a:font script="Bugi" typeface="Leelawadee UI"/>
+        <a:font script="Bopo" typeface="Microsoft JhengHei"/>
+        <a:font script="Java" typeface="Javanese Text"/>
+        <a:font script="Lisu" typeface="Segoe UI"/>
+        <a:font script="Mymr" typeface="Myanmar Text"/>
+        <a:font script="Nkoo" typeface="Ebrima"/>
+        <a:font script="Olck" typeface="Nirmala UI"/>
+        <a:font script="Osma" typeface="Ebrima"/>
+        <a:font script="Phag" typeface="Phagspa"/>
+        <a:font script="Syrn" typeface="Estrangelo Edessa"/>
+        <a:font script="Syrj" typeface="Estrangelo Edessa"/>
+        <a:font script="Syre" typeface="Estrangelo Edessa"/>
+        <a:font script="Sora" typeface="Nirmala UI"/>
+        <a:font script="Tale" typeface="Microsoft Tai Le"/>
+        <a:font script="Talu" typeface="Microsoft New Tai Lue"/>
+        <a:font script="Tfng" typeface="Ebrima"/>
+      </a:minorFont>
+    </a:fontScheme>
+    <a:fmtScheme name="Office">
+      <a:fillStyleLst>
+        <a:solidFill>
+          <a:schemeClr val="phClr"/>
+        </a:solidFill>
+        <a:gradFill rotWithShape="1">
+          <a:gsLst>
+            <a:gs pos="0">
+              <a:schemeClr val="phClr">
+                <a:lumMod val="110000"/>
+                <a:satMod val="105000"/>
+                <a:tint val="67000"/>
+              </a:schemeClr>
+            </a:gs>
+            <a:gs pos="50000">
+              <a:schemeClr val="phClr">
+                <a:lumMod val="105000"/>
+                <a:satMod val="103000"/>
+                <a:tint val="73000"/>
+              </a:schemeClr>
+            </a:gs>
+            <a:gs pos="100000">
+              <a:schemeClr val="phClr">
+                <a:lumMod val="105000"/>
+                <a:satMod val="109000"/>
+                <a:tint val="81000"/>
+              </a:schemeClr>
+            </a:gs>
+          </a:gsLst>
+          <a:lin ang="5400000" scaled="0"/>
+        </a:gradFill>
+        <a:gradFill rotWithShape="1">
+          <a:gsLst>
+            <a:gs pos="0">
+              <a:schemeClr val="phClr">
+                <a:satMod val="103000"/>
+                <a:lumMod val="102000"/>
+                <a:tint val="94000"/>
+              </a:schemeClr>
+            </a:gs>
+            <a:gs pos="50000">
+              <a:schemeClr val="phClr">
+                <a:satMod val="110000"/>
+                <a:lumMod val="100000"/>
+                <a:shade val="100000"/>
+              </a:schemeClr>
+            </a:gs>
+            <a:gs pos="100000">
+              <a:schemeClr val="phClr">
+                <a:lumMod val="99000"/>
+                <a:satMod val="120000"/>
+                <a:shade val="78000"/>
+              </a:schemeClr>
+            </a:gs>
+          </a:gsLst>
+          <a:lin ang="5400000" scaled="0"/>
+        </a:gradFill>
+      </a:fillStyleLst>
+      <a:lnStyleLst>
+        <a:ln w="12700" cap="flat" cmpd="sng" algn="ctr">
+          <a:solidFill>
+            <a:schemeClr val="phClr"/>
+          </a:solidFill>
+          <a:prstDash val="solid"/>
+          <a:miter lim="800000"/>
+        </a:ln>
+        <a:ln w="19050" cap="flat" cmpd="sng" algn="ctr">
+          <a:solidFill>
+            <a:schemeClr val="phClr"/>
+          </a:solidFill>
+          <a:prstDash val="solid"/>
+          <a:miter lim="800000"/>
+        </a:ln>
+        <a:ln w="25400" cap="flat" cmpd="sng" algn="ctr">
+          <a:solidFill>
+            <a:schemeClr val="phClr"/>
+          </a:solidFill>
+          <a:prstDash val="solid"/>
+          <a:miter lim="800000"/>
+        </a:ln>
+      </a:lnStyleLst>
+      <a:effectStyleLst>
+        <a:effectStyle>
+          <a:effectLst/>
+        </a:effectStyle>
+        <a:effectStyle>
+          <a:effectLst/>
+        </a:effectStyle>
+        <a:effectStyle>
+          <a:effectLst>
+            <a:outerShdw blurRad="57150" dist="19050" dir="5400000" algn="ctr" rotWithShape="0">
+              <a:srgbClr val="000000">
+                <a:alpha val="63000"/>
+              </a:srgbClr>
+            </a:outerShdw>
+          </a:effectLst>
+        </a:effectStyle>
+      </a:effectStyleLst>
+      <a:bgFillStyleLst>
+        <a:solidFill>
+          <a:schemeClr val="phClr"/>
+        </a:solidFill>
+        <a:solidFill>
+          <a:schemeClr val="phClr">
+            <a:tint val="95000"/>
+            <a:satMod val="170000"/>
+          </a:schemeClr>
+        </a:solidFill>
+        <a:gradFill rotWithShape="1">
+          <a:gsLst>
+            <a:gs pos="0">
+              <a:schemeClr val="phClr">
+                <a:tint val="93000"/>
+                <a:satMod val="150000"/>
+                <a:shade val="98000"/>
+                <a:lumMod val="102000"/>
+              </a:schemeClr>
+            </a:gs>
+            <a:gs pos="50000">
+              <a:schemeClr val="phClr">
+                <a:tint val="98000"/>
+                <a:satMod val="130000"/>
+                <a:shade val="90000"/>
+                <a:lumMod val="103000"/>
+              </a:schemeClr>
+            </a:gs>
+            <a:gs pos="100000">
+              <a:schemeClr val="phClr">
+                <a:shade val="63000"/>
+                <a:satMod val="120000"/>
+              </a:schemeClr>
+            </a:gs>
+          </a:gsLst>
+          <a:lin ang="5400000" scaled="0"/>
+        </a:gradFill>
+      </a:bgFillStyleLst>
+    </a:fmtScheme>
+  </a:themeElements>
+  <a:objectDefaults>
+    <a:lnDef>
+      <a:spPr/>
+      <a:bodyPr/>
+      <a:lstStyle/>
+      <a:style>
+        <a:lnRef idx="2">
+          <a:schemeClr val="accent1"/>
+        </a:lnRef>
+        <a:fillRef idx="0">
+          <a:schemeClr val="accent1"/>
+        </a:fillRef>
+        <a:effectRef idx="1">
+          <a:schemeClr val="accent1"/>
+        </a:effectRef>
+        <a:fontRef idx="minor">
+          <a:schemeClr val="tx1"/>
+        </a:fontRef>
+      </a:style>
+    </a:lnDef>
+  </a:objectDefaults>
+  <a:extraClrSchemeLst/>
+  <a:extLst>
+    <a:ext uri="{05A4C25C-085E-4340-85A3-A5531E510DB2}">
+      <thm15:themeFamily xmlns:thm15="http://schemas.microsoft.com/office/thememl/2012/main" name="Office Theme" id="{2E142A2C-CD16-42D6-873A-C26D2A0506FA}" vid="{1BDDFF52-6CD6-40A5-AB3C-68EB2F1E4D0A}"/>
+    </a:ext>
+  </a:extLst>
+</a:theme>
+</file>
+
+<file path=ppt/webextensions/taskpanes.xml><?xml version="1.0" encoding="utf-8"?>
+<wetp:taskpanes xmlns:wetp="http://schemas.microsoft.com/office/webextensions/taskpanes/2010/11">
+  <wetp:taskpane dockstate="right" visibility="0" width="350" row="1">
+    <wetp:webextensionref xmlns:r="http://schemas.openxmlformats.org/officeDocument/2006/relationships" r:id="rId1"/>
+  </wetp:taskpane>
+</wetp:taskpanes>
+</file>
+
+<file path=ppt/webextensions/webextension1.xml><?xml version="1.0" encoding="utf-8"?>
+<we:webextension xmlns:we="http://schemas.microsoft.com/office/webextensions/webextension/2010/11" id="{3C3B8861-A040-468F-8242-EC9E0A01EC6C}">
+  <we:reference id="wa200010001" version="1.0.0.1" store="en-US" storeType="OMEX"/>
+  <we:alternateReferences>
+    <we:reference id="wa200010001" version="1.0.0.1" store="en-US" storeType="OMEX"/>
+  </we:alternateReferences>
+  <we:properties>
+    <we:property name="claude.fileId" value="&quot;1cb30148-467c-4a1d-804e-02707dcb50a1&quot;"/>
+  </we:properties>
+  <we:bindings/>
+  <we:snapshot xmlns:r="http://schemas.openxmlformats.org/officeDocument/2006/relationships"/>
+</we:webextension>
 </file>
--- a/Step_Function_2026.pptx
+++ b/Step_Function_2026.pptx
@@ -9334,7 +9334,7 @@
                   <a:srgbClr val="64748B"/>
                 </a:solidFill>
               </a:rPr>
-              <a:t>Simultaneous calendar check, weather/hair complexity rating, and weekend detection</a:t>
+              <a:t>Simultaneous calendar check, weather/outfit complexity rating, and weekend detection</a:t>
             </a:r>
             <a:endParaRPr lang="en-US" sz="1100" dirty="0"/>
           </a:p>
